--- a/docs/public/course-assets/course-pptx/ov-002.pptx
+++ b/docs/public/course-assets/course-pptx/ov-002.pptx
@@ -2,21 +2,21 @@
 <file path=ppt/presentation.xml><?xml version="1.0" encoding="utf-8"?>
 <p:presentation xmlns:p="http://schemas.openxmlformats.org/presentationml/2006/main">
   <p:sldMasterIdLst>
-    <p:sldMasterId xmlns:r="http://schemas.openxmlformats.org/officeDocument/2006/relationships" id="2147483648" r:id="Ra9350956ff634530"/>
+    <p:sldMasterId xmlns:r="http://schemas.openxmlformats.org/officeDocument/2006/relationships" id="2147483648" r:id="Rabb5db8293e44502"/>
   </p:sldMasterIdLst>
   <p:notesMasterIdLst>
-    <p:notesMasterId xmlns:r="http://schemas.openxmlformats.org/officeDocument/2006/relationships" r:id="R6d22a6704bcb4ddd"/>
+    <p:notesMasterId xmlns:r="http://schemas.openxmlformats.org/officeDocument/2006/relationships" r:id="R431b543241244d22"/>
   </p:notesMasterIdLst>
   <p:sldIdLst>
-    <p:sldId xmlns:r="http://schemas.openxmlformats.org/officeDocument/2006/relationships" id="256" r:id="R41e5e0ff761b4939"/>
-    <p:sldId xmlns:r="http://schemas.openxmlformats.org/officeDocument/2006/relationships" id="257" r:id="R8cffa5b5c98e4185"/>
-    <p:sldId xmlns:r="http://schemas.openxmlformats.org/officeDocument/2006/relationships" id="258" r:id="Rfb3c394bc70c416d"/>
-    <p:sldId xmlns:r="http://schemas.openxmlformats.org/officeDocument/2006/relationships" id="259" r:id="R908cacd75127480c"/>
-    <p:sldId xmlns:r="http://schemas.openxmlformats.org/officeDocument/2006/relationships" id="260" r:id="R00eae35bfdbc4360"/>
-    <p:sldId xmlns:r="http://schemas.openxmlformats.org/officeDocument/2006/relationships" id="261" r:id="R5348f54aa6f94166"/>
-    <p:sldId xmlns:r="http://schemas.openxmlformats.org/officeDocument/2006/relationships" id="262" r:id="R8f2c9d1dd15a4bce"/>
-    <p:sldId xmlns:r="http://schemas.openxmlformats.org/officeDocument/2006/relationships" id="263" r:id="R4d27c3d754a94e49"/>
-    <p:sldId xmlns:r="http://schemas.openxmlformats.org/officeDocument/2006/relationships" id="264" r:id="Re0245e8e15b64954"/>
+    <p:sldId xmlns:r="http://schemas.openxmlformats.org/officeDocument/2006/relationships" id="256" r:id="R4a94baab4b4541e0"/>
+    <p:sldId xmlns:r="http://schemas.openxmlformats.org/officeDocument/2006/relationships" id="257" r:id="R03783709cc7f42b0"/>
+    <p:sldId xmlns:r="http://schemas.openxmlformats.org/officeDocument/2006/relationships" id="258" r:id="R7f0b13e8fa9246cf"/>
+    <p:sldId xmlns:r="http://schemas.openxmlformats.org/officeDocument/2006/relationships" id="259" r:id="R647e04ce93a74784"/>
+    <p:sldId xmlns:r="http://schemas.openxmlformats.org/officeDocument/2006/relationships" id="260" r:id="Ree0453c6a025432c"/>
+    <p:sldId xmlns:r="http://schemas.openxmlformats.org/officeDocument/2006/relationships" id="261" r:id="R79b5301a271a49ad"/>
+    <p:sldId xmlns:r="http://schemas.openxmlformats.org/officeDocument/2006/relationships" id="262" r:id="R9052e7fe43ac46d1"/>
+    <p:sldId xmlns:r="http://schemas.openxmlformats.org/officeDocument/2006/relationships" id="263" r:id="R8ba86eab02fa4272"/>
+    <p:sldId xmlns:r="http://schemas.openxmlformats.org/officeDocument/2006/relationships" id="264" r:id="R2ba7d7a83ed544ae"/>
   </p:sldIdLst>
   <p:sldSz cx="12192000" cy="6858000"/>
   <p:notesSz cx="6858000" cy="9144000"/>
@@ -1137,7 +1137,7 @@
   </p:cSld>
   <p:clrMap bg1="lt1" tx1="dk1" bg2="lt2" tx2="dk2" accent1="accent1" accent2="accent2" accent3="accent3" accent4="accent4" accent5="accent5" accent6="accent6" hlink="hlink" folHlink="folHlink"/>
   <p:sldLayoutIdLst>
-    <p:sldLayoutId xmlns:r="http://schemas.openxmlformats.org/officeDocument/2006/relationships" id="2147483649" r:id="R6742bfd483af4972"/>
+    <p:sldLayoutId xmlns:r="http://schemas.openxmlformats.org/officeDocument/2006/relationships" id="2147483649" r:id="R3981fdd5860b40b0"/>
   </p:sldLayoutIdLst>
   <p:txStyles>
     <p:titleStyle>
@@ -1688,7 +1688,7 @@
           <p:cNvPr id="1" name="cover-rule">
             <a:extLst xmlns:a="http://schemas.openxmlformats.org/drawingml/2006/main">
               <a:ext uri="{FF2B5EF4-FFF2-40B4-BE49-F238E27FC236}">
-                <a16:creationId xmlns:a16="http://schemas.microsoft.com/office/drawing/2014/main" id="{503AD730-5A8A-4C97-AE79-36AB13C6D90A}"/>
+                <a16:creationId xmlns:a16="http://schemas.microsoft.com/office/drawing/2014/main" id="{8A20FC20-8868-42F3-A24E-FD8EC13A52C5}"/>
               </a:ext>
             </a:extLst>
           </p:cNvPr>
@@ -1721,7 +1721,7 @@
           <p:cNvPr id="2" name="cover-ring-1">
             <a:extLst xmlns:a="http://schemas.openxmlformats.org/drawingml/2006/main">
               <a:ext uri="{FF2B5EF4-FFF2-40B4-BE49-F238E27FC236}">
-                <a16:creationId xmlns:a16="http://schemas.microsoft.com/office/drawing/2014/main" id="{9BBE081E-B368-4E74-AD89-1E16252E4358}"/>
+                <a16:creationId xmlns:a16="http://schemas.microsoft.com/office/drawing/2014/main" id="{5EDD8ECA-6E24-49CD-B1F9-794D3B44B9FE}"/>
               </a:ext>
             </a:extLst>
           </p:cNvPr>
@@ -1752,7 +1752,7 @@
           <p:cNvPr id="3" name="cover-ring-2">
             <a:extLst xmlns:a="http://schemas.openxmlformats.org/drawingml/2006/main">
               <a:ext uri="{FF2B5EF4-FFF2-40B4-BE49-F238E27FC236}">
-                <a16:creationId xmlns:a16="http://schemas.microsoft.com/office/drawing/2014/main" id="{446497DD-D491-4CAD-9959-4B8747D56EB7}"/>
+                <a16:creationId xmlns:a16="http://schemas.microsoft.com/office/drawing/2014/main" id="{7AFD18FF-D821-4572-9C1D-2443BD598CA0}"/>
               </a:ext>
             </a:extLst>
           </p:cNvPr>
@@ -1783,7 +1783,7 @@
           <p:cNvPr id="4" name="cover-core">
             <a:extLst xmlns:a="http://schemas.openxmlformats.org/drawingml/2006/main">
               <a:ext uri="{FF2B5EF4-FFF2-40B4-BE49-F238E27FC236}">
-                <a16:creationId xmlns:a16="http://schemas.microsoft.com/office/drawing/2014/main" id="{CF06C17A-E823-4AAC-A439-68E6AA485695}"/>
+                <a16:creationId xmlns:a16="http://schemas.microsoft.com/office/drawing/2014/main" id="{589E9D29-C3B6-4BAD-9FDF-B35AE7103BFD}"/>
               </a:ext>
             </a:extLst>
           </p:cNvPr>
@@ -1816,7 +1816,7 @@
           <p:cNvPr id="5" name="cover-line-1">
             <a:extLst xmlns:a="http://schemas.openxmlformats.org/drawingml/2006/main">
               <a:ext uri="{FF2B5EF4-FFF2-40B4-BE49-F238E27FC236}">
-                <a16:creationId xmlns:a16="http://schemas.microsoft.com/office/drawing/2014/main" id="{C8828C7C-184E-4533-8CF2-569F37335439}"/>
+                <a16:creationId xmlns:a16="http://schemas.microsoft.com/office/drawing/2014/main" id="{3B2407C5-DBAE-46C1-8BE4-77EF7E93E882}"/>
               </a:ext>
             </a:extLst>
           </p:cNvPr>
@@ -1847,7 +1847,7 @@
           <p:cNvPr id="6" name="cover-line-2">
             <a:extLst xmlns:a="http://schemas.openxmlformats.org/drawingml/2006/main">
               <a:ext uri="{FF2B5EF4-FFF2-40B4-BE49-F238E27FC236}">
-                <a16:creationId xmlns:a16="http://schemas.microsoft.com/office/drawing/2014/main" id="{400F1B38-16E4-4323-B10C-2A0C6405CEF3}"/>
+                <a16:creationId xmlns:a16="http://schemas.microsoft.com/office/drawing/2014/main" id="{9FBDF2AE-0916-4A2C-AC05-3FEE420FB3D1}"/>
               </a:ext>
             </a:extLst>
           </p:cNvPr>
@@ -1878,7 +1878,7 @@
           <p:cNvPr id="7" name="cover-eyebrow">
             <a:extLst xmlns:a="http://schemas.openxmlformats.org/drawingml/2006/main">
               <a:ext uri="{FF2B5EF4-FFF2-40B4-BE49-F238E27FC236}">
-                <a16:creationId xmlns:a16="http://schemas.microsoft.com/office/drawing/2014/main" id="{2737F4A4-0E00-47D9-BCAF-3D77649626A5}"/>
+                <a16:creationId xmlns:a16="http://schemas.microsoft.com/office/drawing/2014/main" id="{269AFB0A-08C4-4D8A-BEE2-DF2661E700E1}"/>
               </a:ext>
             </a:extLst>
           </p:cNvPr>
@@ -1936,7 +1936,7 @@
           <p:cNvPr id="8" name="cover-title">
             <a:extLst xmlns:a="http://schemas.openxmlformats.org/drawingml/2006/main">
               <a:ext uri="{FF2B5EF4-FFF2-40B4-BE49-F238E27FC236}">
-                <a16:creationId xmlns:a16="http://schemas.microsoft.com/office/drawing/2014/main" id="{C94A3DFA-6C40-4FEA-A1A7-5D012818F5BE}"/>
+                <a16:creationId xmlns:a16="http://schemas.microsoft.com/office/drawing/2014/main" id="{5201FB8E-A52F-430F-A520-ED1B2A97B101}"/>
               </a:ext>
             </a:extLst>
           </p:cNvPr>
@@ -1994,7 +1994,7 @@
           <p:cNvPr id="9" name="cover-subtitle">
             <a:extLst xmlns:a="http://schemas.openxmlformats.org/drawingml/2006/main">
               <a:ext uri="{FF2B5EF4-FFF2-40B4-BE49-F238E27FC236}">
-                <a16:creationId xmlns:a16="http://schemas.microsoft.com/office/drawing/2014/main" id="{0CBC196C-4E31-4591-8B39-A72C4625A68A}"/>
+                <a16:creationId xmlns:a16="http://schemas.microsoft.com/office/drawing/2014/main" id="{7A209BEC-B131-4FE7-84A1-76C67CD8505B}"/>
               </a:ext>
             </a:extLst>
           </p:cNvPr>
@@ -2056,7 +2056,7 @@
           <p:cNvPr id="10" name="cover-lead">
             <a:extLst xmlns:a="http://schemas.openxmlformats.org/drawingml/2006/main">
               <a:ext uri="{FF2B5EF4-FFF2-40B4-BE49-F238E27FC236}">
-                <a16:creationId xmlns:a16="http://schemas.microsoft.com/office/drawing/2014/main" id="{5B9766E4-8292-4CA7-BA63-E21860CE7834}"/>
+                <a16:creationId xmlns:a16="http://schemas.microsoft.com/office/drawing/2014/main" id="{BE7BDFBA-2176-415E-9547-E57B9393295E}"/>
               </a:ext>
             </a:extLst>
           </p:cNvPr>
@@ -2104,7 +2104,7 @@
                 <a:ea typeface="PingFang SC"/>
                 <a:cs typeface="PingFang SC"/>
               </a:rPr>
-              <a:t>人工智能的发展从来不是一条只由算法推动的直线。规则系统、机器学习、深度学习和大模型依次扩大了机器可处理的任务边界；与此同时，数据、算力、产品入口…</a:t>
+              <a:t>人工智能的发展从来不是一条只由算法推动的直线；规则系统、机器学习、深度学习和大模型依次扩大了机器可处理的任务边界</a:t>
             </a:r>
           </a:p>
         </p:txBody>
@@ -2114,7 +2114,7 @@
           <p:cNvPr id="11" name="cover-course">
             <a:extLst xmlns:a="http://schemas.openxmlformats.org/drawingml/2006/main">
               <a:ext uri="{FF2B5EF4-FFF2-40B4-BE49-F238E27FC236}">
-                <a16:creationId xmlns:a16="http://schemas.microsoft.com/office/drawing/2014/main" id="{D378E843-0BC8-49E1-95DE-DCE14DAC5441}"/>
+                <a16:creationId xmlns:a16="http://schemas.microsoft.com/office/drawing/2014/main" id="{C988BC3B-C61A-43A6-A02A-34BC1CF8A8B8}"/>
               </a:ext>
             </a:extLst>
           </p:cNvPr>
@@ -2172,7 +2172,7 @@
           <p:cNvPr id="12" name="cover-id">
             <a:extLst xmlns:a="http://schemas.openxmlformats.org/drawingml/2006/main">
               <a:ext uri="{FF2B5EF4-FFF2-40B4-BE49-F238E27FC236}">
-                <a16:creationId xmlns:a16="http://schemas.microsoft.com/office/drawing/2014/main" id="{E3FA8847-996D-4C97-B079-BE2F198DA04D}"/>
+                <a16:creationId xmlns:a16="http://schemas.microsoft.com/office/drawing/2014/main" id="{2413A953-0DC7-4937-AFFD-B6F0EAC98A73}"/>
               </a:ext>
             </a:extLst>
           </p:cNvPr>
@@ -2228,7 +2228,7 @@
     </p:spTree>
     <p:extLst>
       <p:ext uri="{BB962C8B-B14F-4D97-AF65-F5344CB8AC3E}">
-        <p14:creationId xmlns:p14="http://schemas.microsoft.com/office/powerpoint/2010/main" val="1512749723"/>
+        <p14:creationId xmlns:p14="http://schemas.microsoft.com/office/powerpoint/2010/main" val="859340909"/>
       </p:ext>
     </p:extLst>
   </p:cSld>
@@ -2259,7 +2259,7 @@
           <p:cNvPr id="1" name="s2-rule">
             <a:extLst xmlns:a="http://schemas.openxmlformats.org/drawingml/2006/main">
               <a:ext uri="{FF2B5EF4-FFF2-40B4-BE49-F238E27FC236}">
-                <a16:creationId xmlns:a16="http://schemas.microsoft.com/office/drawing/2014/main" id="{7B60FCD1-67D4-4ECD-BDAA-D1C63AEE6F12}"/>
+                <a16:creationId xmlns:a16="http://schemas.microsoft.com/office/drawing/2014/main" id="{7EC37F7F-85C6-4DF2-8855-DCC470AF0527}"/>
               </a:ext>
             </a:extLst>
           </p:cNvPr>
@@ -2292,7 +2292,7 @@
           <p:cNvPr id="2" name="s2-eyebrow">
             <a:extLst xmlns:a="http://schemas.openxmlformats.org/drawingml/2006/main">
               <a:ext uri="{FF2B5EF4-FFF2-40B4-BE49-F238E27FC236}">
-                <a16:creationId xmlns:a16="http://schemas.microsoft.com/office/drawing/2014/main" id="{813E0E36-D512-443A-B31B-D39E941D260B}"/>
+                <a16:creationId xmlns:a16="http://schemas.microsoft.com/office/drawing/2014/main" id="{1C627A8D-A1AE-447F-A228-E755D121CC2B}"/>
               </a:ext>
             </a:extLst>
           </p:cNvPr>
@@ -2350,7 +2350,7 @@
           <p:cNvPr id="3" name="s2-title">
             <a:extLst xmlns:a="http://schemas.openxmlformats.org/drawingml/2006/main">
               <a:ext uri="{FF2B5EF4-FFF2-40B4-BE49-F238E27FC236}">
-                <a16:creationId xmlns:a16="http://schemas.microsoft.com/office/drawing/2014/main" id="{912C3E3F-289B-4D51-BF16-19D817C5CD3D}"/>
+                <a16:creationId xmlns:a16="http://schemas.microsoft.com/office/drawing/2014/main" id="{66180BD3-2845-4B73-BB9F-D3C7E9E5F514}"/>
               </a:ext>
             </a:extLst>
           </p:cNvPr>
@@ -2398,7 +2398,7 @@
                 <a:ea typeface="PingFang SC"/>
                 <a:cs typeface="PingFang SC"/>
               </a:rPr>
-              <a:t>学完这一节，你能完成这些判断与行动</a:t>
+              <a:t>AI 发展与社会影响：3项学习结果</a:t>
             </a:r>
           </a:p>
         </p:txBody>
@@ -2408,7 +2408,7 @@
           <p:cNvPr id="4" name="s2-footer">
             <a:extLst xmlns:a="http://schemas.openxmlformats.org/drawingml/2006/main">
               <a:ext uri="{FF2B5EF4-FFF2-40B4-BE49-F238E27FC236}">
-                <a16:creationId xmlns:a16="http://schemas.microsoft.com/office/drawing/2014/main" id="{59A5A678-83AD-4449-B641-8D153C180D65}"/>
+                <a16:creationId xmlns:a16="http://schemas.microsoft.com/office/drawing/2014/main" id="{F078E7F6-DAD9-4254-BE35-9AF764EADA4B}"/>
               </a:ext>
             </a:extLst>
           </p:cNvPr>
@@ -2439,7 +2439,7 @@
           <p:cNvPr id="5" name="s2-identity">
             <a:extLst xmlns:a="http://schemas.openxmlformats.org/drawingml/2006/main">
               <a:ext uri="{FF2B5EF4-FFF2-40B4-BE49-F238E27FC236}">
-                <a16:creationId xmlns:a16="http://schemas.microsoft.com/office/drawing/2014/main" id="{16BB43D5-F34B-41D7-945F-CBAB4AAB392F}"/>
+                <a16:creationId xmlns:a16="http://schemas.microsoft.com/office/drawing/2014/main" id="{7E19C0FF-2687-4FDE-95AE-2EEC4EF3F00C}"/>
               </a:ext>
             </a:extLst>
           </p:cNvPr>
@@ -2497,7 +2497,7 @@
           <p:cNvPr id="6" name="objective-1">
             <a:extLst xmlns:a="http://schemas.openxmlformats.org/drawingml/2006/main">
               <a:ext uri="{FF2B5EF4-FFF2-40B4-BE49-F238E27FC236}">
-                <a16:creationId xmlns:a16="http://schemas.microsoft.com/office/drawing/2014/main" id="{0533D5EF-E3F9-427A-AD82-EB29767D0911}"/>
+                <a16:creationId xmlns:a16="http://schemas.microsoft.com/office/drawing/2014/main" id="{C5A4E0BB-148F-4331-9676-AA23A4468647}"/>
               </a:ext>
             </a:extLst>
           </p:cNvPr>
@@ -2584,7 +2584,7 @@
           <p:cNvPr id="7" name="objective-2">
             <a:extLst xmlns:a="http://schemas.openxmlformats.org/drawingml/2006/main">
               <a:ext uri="{FF2B5EF4-FFF2-40B4-BE49-F238E27FC236}">
-                <a16:creationId xmlns:a16="http://schemas.microsoft.com/office/drawing/2014/main" id="{542A2E84-DBED-4E2E-9893-DD29362198B6}"/>
+                <a16:creationId xmlns:a16="http://schemas.microsoft.com/office/drawing/2014/main" id="{89E27DBE-76D5-40DA-8131-A133E39DB24A}"/>
               </a:ext>
             </a:extLst>
           </p:cNvPr>
@@ -2671,7 +2671,7 @@
           <p:cNvPr id="8" name="objective-3">
             <a:extLst xmlns:a="http://schemas.openxmlformats.org/drawingml/2006/main">
               <a:ext uri="{FF2B5EF4-FFF2-40B4-BE49-F238E27FC236}">
-                <a16:creationId xmlns:a16="http://schemas.microsoft.com/office/drawing/2014/main" id="{824C5815-86C8-42F4-89BB-0A62206BE116}"/>
+                <a16:creationId xmlns:a16="http://schemas.microsoft.com/office/drawing/2014/main" id="{386D01E0-8ECF-4BEF-A095-687D76766240}"/>
               </a:ext>
             </a:extLst>
           </p:cNvPr>
@@ -2695,7 +2695,7 @@
           </a:solidFill>
           <a:ln xmlns:a="http://schemas.openxmlformats.org/drawingml/2006/main" w="19050">
             <a:solidFill>
-              <a:srgbClr val="D6A33A"/>
+              <a:srgbClr val="8A5A00"/>
             </a:solidFill>
             <a:prstDash val="solid"/>
           </a:ln>
@@ -2756,7 +2756,7 @@
     </p:spTree>
     <p:extLst>
       <p:ext uri="{BB962C8B-B14F-4D97-AF65-F5344CB8AC3E}">
-        <p14:creationId xmlns:p14="http://schemas.microsoft.com/office/powerpoint/2010/main" val="2007331849"/>
+        <p14:creationId xmlns:p14="http://schemas.microsoft.com/office/powerpoint/2010/main" val="1140458167"/>
       </p:ext>
     </p:extLst>
   </p:cSld>
@@ -2787,7 +2787,7 @@
           <p:cNvPr id="1" name="s3-rule">
             <a:extLst xmlns:a="http://schemas.openxmlformats.org/drawingml/2006/main">
               <a:ext uri="{FF2B5EF4-FFF2-40B4-BE49-F238E27FC236}">
-                <a16:creationId xmlns:a16="http://schemas.microsoft.com/office/drawing/2014/main" id="{64572A9E-2856-4672-9713-FE5CB5AC7F6D}"/>
+                <a16:creationId xmlns:a16="http://schemas.microsoft.com/office/drawing/2014/main" id="{D7286F2B-8C43-4F28-92A1-48B3EEF35CB6}"/>
               </a:ext>
             </a:extLst>
           </p:cNvPr>
@@ -2820,7 +2820,7 @@
           <p:cNvPr id="2" name="s3-eyebrow">
             <a:extLst xmlns:a="http://schemas.openxmlformats.org/drawingml/2006/main">
               <a:ext uri="{FF2B5EF4-FFF2-40B4-BE49-F238E27FC236}">
-                <a16:creationId xmlns:a16="http://schemas.microsoft.com/office/drawing/2014/main" id="{59380B8F-4092-449A-8FE9-228596E33B86}"/>
+                <a16:creationId xmlns:a16="http://schemas.microsoft.com/office/drawing/2014/main" id="{6680F913-C674-4EE4-9FF4-2489CB290BAB}"/>
               </a:ext>
             </a:extLst>
           </p:cNvPr>
@@ -2878,7 +2878,7 @@
           <p:cNvPr id="3" name="s3-title">
             <a:extLst xmlns:a="http://schemas.openxmlformats.org/drawingml/2006/main">
               <a:ext uri="{FF2B5EF4-FFF2-40B4-BE49-F238E27FC236}">
-                <a16:creationId xmlns:a16="http://schemas.microsoft.com/office/drawing/2014/main" id="{E4FE7C7A-2C8B-4486-ADC2-CFC04903617D}"/>
+                <a16:creationId xmlns:a16="http://schemas.microsoft.com/office/drawing/2014/main" id="{7D0915DE-04C1-4677-868E-5EAD94568EA2}"/>
               </a:ext>
             </a:extLst>
           </p:cNvPr>
@@ -2926,7 +2926,7 @@
                 <a:ea typeface="PingFang SC"/>
                 <a:cs typeface="PingFang SC"/>
               </a:rPr>
-              <a:t>早期人工智能强调把人的知识写成规则</a:t>
+              <a:t>AI 热潮与低谷由能力、资源和预期共同塑造</a:t>
             </a:r>
           </a:p>
         </p:txBody>
@@ -2936,7 +2936,7 @@
           <p:cNvPr id="4" name="s3-footer">
             <a:extLst xmlns:a="http://schemas.openxmlformats.org/drawingml/2006/main">
               <a:ext uri="{FF2B5EF4-FFF2-40B4-BE49-F238E27FC236}">
-                <a16:creationId xmlns:a16="http://schemas.microsoft.com/office/drawing/2014/main" id="{F4346C34-E6D7-4661-A5FE-A4E16A2BFDB7}"/>
+                <a16:creationId xmlns:a16="http://schemas.microsoft.com/office/drawing/2014/main" id="{D52797D1-9BD4-4C49-90C6-35AF4E91163F}"/>
               </a:ext>
             </a:extLst>
           </p:cNvPr>
@@ -2967,7 +2967,7 @@
           <p:cNvPr id="5" name="s3-identity">
             <a:extLst xmlns:a="http://schemas.openxmlformats.org/drawingml/2006/main">
               <a:ext uri="{FF2B5EF4-FFF2-40B4-BE49-F238E27FC236}">
-                <a16:creationId xmlns:a16="http://schemas.microsoft.com/office/drawing/2014/main" id="{F8E730FF-DE9F-46FD-AC49-6CF94DB6ABDC}"/>
+                <a16:creationId xmlns:a16="http://schemas.microsoft.com/office/drawing/2014/main" id="{13CBC47D-B69A-4EA7-9671-D715A792ED0A}"/>
               </a:ext>
             </a:extLst>
           </p:cNvPr>
@@ -3025,7 +3025,7 @@
           <p:cNvPr id="6" name="core-no-0">
             <a:extLst xmlns:a="http://schemas.openxmlformats.org/drawingml/2006/main">
               <a:ext uri="{FF2B5EF4-FFF2-40B4-BE49-F238E27FC236}">
-                <a16:creationId xmlns:a16="http://schemas.microsoft.com/office/drawing/2014/main" id="{2879B123-4018-424C-8EE9-5B5F710D2B96}"/>
+                <a16:creationId xmlns:a16="http://schemas.microsoft.com/office/drawing/2014/main" id="{8BAA7660-F96E-4D0E-806D-6C1D28A5AD51}"/>
               </a:ext>
             </a:extLst>
           </p:cNvPr>
@@ -3057,7 +3057,7 @@
             <a:pPr algn="l">
               <a:defRPr sz="2250" b="1">
                 <a:solidFill>
-                  <a:srgbClr val="D6A33A"/>
+                  <a:srgbClr val="8A5A00"/>
                 </a:solidFill>
                 <a:latin typeface="PingFang SC"/>
                 <a:ea typeface="PingFang SC"/>
@@ -3067,7 +3067,7 @@
             <a:r>
               <a:rPr sz="2250" b="1">
                 <a:solidFill>
-                  <a:srgbClr val="D6A33A"/>
+                  <a:srgbClr val="8A5A00"/>
                 </a:solidFill>
                 <a:latin typeface="PingFang SC"/>
                 <a:ea typeface="PingFang SC"/>
@@ -3083,7 +3083,7 @@
           <p:cNvPr id="7" name="core-label-0">
             <a:extLst xmlns:a="http://schemas.openxmlformats.org/drawingml/2006/main">
               <a:ext uri="{FF2B5EF4-FFF2-40B4-BE49-F238E27FC236}">
-                <a16:creationId xmlns:a16="http://schemas.microsoft.com/office/drawing/2014/main" id="{726AE8A0-A6BC-4D20-B3F3-B5E75CCA4ABE}"/>
+                <a16:creationId xmlns:a16="http://schemas.microsoft.com/office/drawing/2014/main" id="{576E9C2A-4E54-48AC-AB8E-14F436D09204}"/>
               </a:ext>
             </a:extLst>
           </p:cNvPr>
@@ -3095,7 +3095,7 @@
         <p:spPr>
           <a:xfrm xmlns:a="http://schemas.openxmlformats.org/drawingml/2006/main">
             <a:off x="914400" y="2590800"/>
-            <a:ext cx="5038725" cy="666750"/>
+            <a:ext cx="3263900" cy="666750"/>
           </a:xfrm>
           <a:prstGeom xmlns:a="http://schemas.openxmlformats.org/drawingml/2006/main" prst="rect">
             <a:avLst/>
@@ -3131,7 +3131,7 @@
                 <a:ea typeface="PingFang SC"/>
                 <a:cs typeface="PingFang SC"/>
               </a:rPr>
-              <a:t>从规则系统到生成与行动</a:t>
+              <a:t>六次转折：能力、资源与预期共同塑造 AI</a:t>
             </a:r>
           </a:p>
         </p:txBody>
@@ -3141,7 +3141,7 @@
           <p:cNvPr id="8" name="core-body-0">
             <a:extLst xmlns:a="http://schemas.openxmlformats.org/drawingml/2006/main">
               <a:ext uri="{FF2B5EF4-FFF2-40B4-BE49-F238E27FC236}">
-                <a16:creationId xmlns:a16="http://schemas.microsoft.com/office/drawing/2014/main" id="{CE47ADA4-9737-46E4-B240-08196C9010E3}"/>
+                <a16:creationId xmlns:a16="http://schemas.microsoft.com/office/drawing/2014/main" id="{437AF25C-4CF5-48B6-87B0-A2A233D30F8E}"/>
               </a:ext>
             </a:extLst>
           </p:cNvPr>
@@ -3153,7 +3153,7 @@
         <p:spPr>
           <a:xfrm xmlns:a="http://schemas.openxmlformats.org/drawingml/2006/main">
             <a:off x="914400" y="3390900"/>
-            <a:ext cx="5038725" cy="1714500"/>
+            <a:ext cx="3263900" cy="1714500"/>
           </a:xfrm>
           <a:prstGeom xmlns:a="http://schemas.openxmlformats.org/drawingml/2006/main" prst="roundRect">
             <a:avLst>
@@ -3165,19 +3165,19 @@
           </a:solidFill>
           <a:ln xmlns:a="http://schemas.openxmlformats.org/drawingml/2006/main" w="19050">
             <a:solidFill>
-              <a:srgbClr val="D6A33A"/>
+              <a:srgbClr val="8A5A00"/>
             </a:solidFill>
             <a:prstDash val="solid"/>
           </a:ln>
         </p:spPr>
         <p:txBody>
           <a:bodyPr xmlns:a="http://schemas.openxmlformats.org/drawingml/2006/main" lIns="152400" tIns="133350" rIns="152400" bIns="133350" anchor="ctr">
-            <a:normAutofit fontScale="98233"/>
+            <a:normAutofit fontScale="85261"/>
           </a:bodyPr>
           <a:lstStyle xmlns:a="http://schemas.openxmlformats.org/drawingml/2006/main"/>
           <a:p xmlns:a="http://schemas.openxmlformats.org/drawingml/2006/main">
             <a:pPr algn="l">
-              <a:defRPr sz="1800">
+              <a:defRPr sz="1650">
                 <a:solidFill>
                   <a:srgbClr val="10233F"/>
                 </a:solidFill>
@@ -3187,7 +3187,7 @@
               </a:defRPr>
             </a:pPr>
             <a:r>
-              <a:rPr sz="1800">
+              <a:rPr sz="1650">
                 <a:solidFill>
                   <a:srgbClr val="10233F"/>
                 </a:solidFill>
@@ -3195,7 +3195,7 @@
                 <a:ea typeface="PingFang SC"/>
                 <a:cs typeface="PingFang SC"/>
               </a:rPr>
-              <a:t>早期人工智能强调把人的知识写成规则，适合边界清楚的问题，却难以应对开放环境。机器学习把重点转向数据，深度学习进一步让模型自动学习特征；大模型则通过规模化预训练获得通用的语言与多模态能力…</a:t>
+              <a:t>1955/56—1980 年代；学科形成、专家系统与两次寒冬；达特茅斯提案让“人工智能”成为明确研究议题；早期高预期随后遭遇组合爆炸、数据和算力限制；专家系统在 1980 年代进入商业应用</a:t>
             </a:r>
           </a:p>
         </p:txBody>
@@ -3205,18 +3205,18 @@
           <p:cNvPr id="9" name="core-no-1">
             <a:extLst xmlns:a="http://schemas.openxmlformats.org/drawingml/2006/main">
               <a:ext uri="{FF2B5EF4-FFF2-40B4-BE49-F238E27FC236}">
-                <a16:creationId xmlns:a16="http://schemas.microsoft.com/office/drawing/2014/main" id="{577CE7C2-6707-4799-A2F2-4B713F1471D6}"/>
-              </a:ext>
-            </a:extLst>
-          </p:cNvPr>
-          <p:cNvSpPr>
-            <a:spLocks xmlns:a="http://schemas.openxmlformats.org/drawingml/2006/main" noGrp="1"/>
-          </p:cNvSpPr>
-          <p:nvPr/>
-        </p:nvSpPr>
-        <p:spPr>
-          <a:xfrm xmlns:a="http://schemas.openxmlformats.org/drawingml/2006/main">
-            <a:off x="6238875" y="2076450"/>
+                <a16:creationId xmlns:a16="http://schemas.microsoft.com/office/drawing/2014/main" id="{0D30F313-BD08-494D-BBBB-05F416D937BD}"/>
+              </a:ext>
+            </a:extLst>
+          </p:cNvPr>
+          <p:cNvSpPr>
+            <a:spLocks xmlns:a="http://schemas.openxmlformats.org/drawingml/2006/main" noGrp="1"/>
+          </p:cNvSpPr>
+          <p:nvPr/>
+        </p:nvSpPr>
+        <p:spPr>
+          <a:xfrm xmlns:a="http://schemas.openxmlformats.org/drawingml/2006/main">
+            <a:off x="4464050" y="2076450"/>
             <a:ext cx="666750" cy="419100"/>
           </a:xfrm>
           <a:prstGeom xmlns:a="http://schemas.openxmlformats.org/drawingml/2006/main" prst="rect">
@@ -3237,7 +3237,7 @@
             <a:pPr algn="l">
               <a:defRPr sz="2250" b="1">
                 <a:solidFill>
-                  <a:srgbClr val="D6A33A"/>
+                  <a:srgbClr val="8A5A00"/>
                 </a:solidFill>
                 <a:latin typeface="PingFang SC"/>
                 <a:ea typeface="PingFang SC"/>
@@ -3247,7 +3247,7 @@
             <a:r>
               <a:rPr sz="2250" b="1">
                 <a:solidFill>
-                  <a:srgbClr val="D6A33A"/>
+                  <a:srgbClr val="8A5A00"/>
                 </a:solidFill>
                 <a:latin typeface="PingFang SC"/>
                 <a:ea typeface="PingFang SC"/>
@@ -3263,19 +3263,19 @@
           <p:cNvPr id="10" name="core-body-1">
             <a:extLst xmlns:a="http://schemas.openxmlformats.org/drawingml/2006/main">
               <a:ext uri="{FF2B5EF4-FFF2-40B4-BE49-F238E27FC236}">
-                <a16:creationId xmlns:a16="http://schemas.microsoft.com/office/drawing/2014/main" id="{D8CB1411-1531-4EBC-B3C4-BDD561A56AD4}"/>
-              </a:ext>
-            </a:extLst>
-          </p:cNvPr>
-          <p:cNvSpPr>
-            <a:spLocks xmlns:a="http://schemas.openxmlformats.org/drawingml/2006/main" noGrp="1"/>
-          </p:cNvSpPr>
-          <p:nvPr/>
-        </p:nvSpPr>
-        <p:spPr>
-          <a:xfrm xmlns:a="http://schemas.openxmlformats.org/drawingml/2006/main">
-            <a:off x="6238875" y="2590800"/>
-            <a:ext cx="5038725" cy="2514600"/>
+                <a16:creationId xmlns:a16="http://schemas.microsoft.com/office/drawing/2014/main" id="{87457EE4-E652-448D-9C6D-0DC636177A5D}"/>
+              </a:ext>
+            </a:extLst>
+          </p:cNvPr>
+          <p:cNvSpPr>
+            <a:spLocks xmlns:a="http://schemas.openxmlformats.org/drawingml/2006/main" noGrp="1"/>
+          </p:cNvSpPr>
+          <p:nvPr/>
+        </p:nvSpPr>
+        <p:spPr>
+          <a:xfrm xmlns:a="http://schemas.openxmlformats.org/drawingml/2006/main">
+            <a:off x="4464050" y="2590800"/>
+            <a:ext cx="3263900" cy="2514600"/>
           </a:xfrm>
           <a:prstGeom xmlns:a="http://schemas.openxmlformats.org/drawingml/2006/main" prst="roundRect">
             <a:avLst>
@@ -3299,7 +3299,7 @@
           <a:lstStyle xmlns:a="http://schemas.openxmlformats.org/drawingml/2006/main"/>
           <a:p xmlns:a="http://schemas.openxmlformats.org/drawingml/2006/main">
             <a:pPr algn="l">
-              <a:defRPr sz="1800">
+              <a:defRPr sz="1650">
                 <a:solidFill>
                   <a:srgbClr val="10233F"/>
                 </a:solidFill>
@@ -3309,7 +3309,7 @@
               </a:defRPr>
             </a:pPr>
             <a:r>
-              <a:rPr sz="1800">
+              <a:rPr sz="1650">
                 <a:solidFill>
                   <a:srgbClr val="10233F"/>
                 </a:solidFill>
@@ -3317,17 +3317,139 @@
                 <a:ea typeface="PingFang SC"/>
                 <a:cs typeface="PingFang SC"/>
               </a:rPr>
-              <a:t>每次跃迁都伴随新的限制：规则难以穷尽，数据会带来偏差，深度模型缺乏可解释性，大模型会产生幻觉，智能体的行动还会放大权限与安全风险。理解历史的价值，不是背年份，而是知道每一代能力解决了什么…</a:t>
+              <a:t>1990 年代—2012；统计学习、数据与 GPU 共同积累；机器学习逐步从手写规则转向数据驱动；2012 年 AlexNet 的视觉结果成为标志性转折</a:t>
             </a:r>
           </a:p>
         </p:txBody>
       </p:sp>
       <p:sp>
         <p:nvSpPr>
-          <p:cNvPr id="11" name="s3-takeaway-rule">
-            <a:extLst xmlns:a="http://schemas.openxmlformats.org/drawingml/2006/main">
-              <a:ext uri="{FF2B5EF4-FFF2-40B4-BE49-F238E27FC236}">
-                <a16:creationId xmlns:a16="http://schemas.microsoft.com/office/drawing/2014/main" id="{7D64D946-E9E8-463C-99C6-763634AA64CF}"/>
+          <p:cNvPr id="11" name="core-no-2">
+            <a:extLst xmlns:a="http://schemas.openxmlformats.org/drawingml/2006/main">
+              <a:ext uri="{FF2B5EF4-FFF2-40B4-BE49-F238E27FC236}">
+                <a16:creationId xmlns:a16="http://schemas.microsoft.com/office/drawing/2014/main" id="{BD457572-C749-41BA-83D3-787C74389076}"/>
+              </a:ext>
+            </a:extLst>
+          </p:cNvPr>
+          <p:cNvSpPr>
+            <a:spLocks xmlns:a="http://schemas.openxmlformats.org/drawingml/2006/main" noGrp="1"/>
+          </p:cNvSpPr>
+          <p:nvPr/>
+        </p:nvSpPr>
+        <p:spPr>
+          <a:xfrm xmlns:a="http://schemas.openxmlformats.org/drawingml/2006/main">
+            <a:off x="8013700" y="2076450"/>
+            <a:ext cx="666750" cy="419100"/>
+          </a:xfrm>
+          <a:prstGeom xmlns:a="http://schemas.openxmlformats.org/drawingml/2006/main" prst="rect">
+            <a:avLst/>
+          </a:prstGeom>
+          <a:noFill xmlns:a="http://schemas.openxmlformats.org/drawingml/2006/main"/>
+          <a:ln xmlns:a="http://schemas.openxmlformats.org/drawingml/2006/main" w="0">
+            <a:noFill/>
+            <a:prstDash val="solid"/>
+          </a:ln>
+        </p:spPr>
+        <p:txBody>
+          <a:bodyPr xmlns:a="http://schemas.openxmlformats.org/drawingml/2006/main" lIns="0" tIns="0" rIns="0" bIns="0" anchor="t">
+            <a:normAutofit fontScale="100000"/>
+          </a:bodyPr>
+          <a:lstStyle xmlns:a="http://schemas.openxmlformats.org/drawingml/2006/main"/>
+          <a:p xmlns:a="http://schemas.openxmlformats.org/drawingml/2006/main">
+            <a:pPr algn="l">
+              <a:defRPr sz="2250" b="1">
+                <a:solidFill>
+                  <a:srgbClr val="8A5A00"/>
+                </a:solidFill>
+                <a:latin typeface="PingFang SC"/>
+                <a:ea typeface="PingFang SC"/>
+                <a:cs typeface="PingFang SC"/>
+              </a:defRPr>
+            </a:pPr>
+            <a:r>
+              <a:rPr sz="2250" b="1">
+                <a:solidFill>
+                  <a:srgbClr val="8A5A00"/>
+                </a:solidFill>
+                <a:latin typeface="PingFang SC"/>
+                <a:ea typeface="PingFang SC"/>
+                <a:cs typeface="PingFang SC"/>
+              </a:rPr>
+              <a:t>03</a:t>
+            </a:r>
+          </a:p>
+        </p:txBody>
+      </p:sp>
+      <p:sp>
+        <p:nvSpPr>
+          <p:cNvPr id="12" name="core-body-2">
+            <a:extLst xmlns:a="http://schemas.openxmlformats.org/drawingml/2006/main">
+              <a:ext uri="{FF2B5EF4-FFF2-40B4-BE49-F238E27FC236}">
+                <a16:creationId xmlns:a16="http://schemas.microsoft.com/office/drawing/2014/main" id="{C4630BF0-8336-498C-80F3-A21649B63771}"/>
+              </a:ext>
+            </a:extLst>
+          </p:cNvPr>
+          <p:cNvSpPr>
+            <a:spLocks xmlns:a="http://schemas.openxmlformats.org/drawingml/2006/main" noGrp="1"/>
+          </p:cNvSpPr>
+          <p:nvPr/>
+        </p:nvSpPr>
+        <p:spPr>
+          <a:xfrm xmlns:a="http://schemas.openxmlformats.org/drawingml/2006/main">
+            <a:off x="8013700" y="2590800"/>
+            <a:ext cx="3263900" cy="2514600"/>
+          </a:xfrm>
+          <a:prstGeom xmlns:a="http://schemas.openxmlformats.org/drawingml/2006/main" prst="roundRect">
+            <a:avLst>
+              <a:gd name="adj" fmla="val 6818"/>
+            </a:avLst>
+          </a:prstGeom>
+          <a:solidFill xmlns:a="http://schemas.openxmlformats.org/drawingml/2006/main">
+            <a:srgbClr val="FFFFFF"/>
+          </a:solidFill>
+          <a:ln xmlns:a="http://schemas.openxmlformats.org/drawingml/2006/main" w="19050">
+            <a:solidFill>
+              <a:srgbClr val="D8E0E8"/>
+            </a:solidFill>
+            <a:prstDash val="solid"/>
+          </a:ln>
+        </p:spPr>
+        <p:txBody>
+          <a:bodyPr xmlns:a="http://schemas.openxmlformats.org/drawingml/2006/main" lIns="152400" tIns="133350" rIns="152400" bIns="133350" anchor="ctr">
+            <a:normAutofit fontScale="100000"/>
+          </a:bodyPr>
+          <a:lstStyle xmlns:a="http://schemas.openxmlformats.org/drawingml/2006/main"/>
+          <a:p xmlns:a="http://schemas.openxmlformats.org/drawingml/2006/main">
+            <a:pPr algn="l">
+              <a:defRPr sz="1650">
+                <a:solidFill>
+                  <a:srgbClr val="10233F"/>
+                </a:solidFill>
+                <a:latin typeface="PingFang SC"/>
+                <a:ea typeface="PingFang SC"/>
+                <a:cs typeface="PingFang SC"/>
+              </a:defRPr>
+            </a:pPr>
+            <a:r>
+              <a:rPr sz="1650">
+                <a:solidFill>
+                  <a:srgbClr val="10233F"/>
+                </a:solidFill>
+                <a:latin typeface="PingFang SC"/>
+                <a:ea typeface="PingFang SC"/>
+                <a:cs typeface="PingFang SC"/>
+              </a:rPr>
+              <a:t>2017—2022；Transformer 与对话式生成 AI；Transformer 改变了序列建模和并行训练方式；2022 年 ChatGPT 把指令跟随与多轮对话带入大众产品入口</a:t>
+            </a:r>
+          </a:p>
+        </p:txBody>
+      </p:sp>
+      <p:sp>
+        <p:nvSpPr>
+          <p:cNvPr id="13" name="s3-takeaway-rule">
+            <a:extLst xmlns:a="http://schemas.openxmlformats.org/drawingml/2006/main">
+              <a:ext uri="{FF2B5EF4-FFF2-40B4-BE49-F238E27FC236}">
+                <a16:creationId xmlns:a16="http://schemas.microsoft.com/office/drawing/2014/main" id="{D94156B8-6DD6-42FA-92B6-783831B2EBD4}"/>
               </a:ext>
             </a:extLst>
           </p:cNvPr>
@@ -3357,10 +3479,10 @@
       </p:sp>
       <p:sp>
         <p:nvSpPr>
-          <p:cNvPr id="12" name="s3-takeaway">
-            <a:extLst xmlns:a="http://schemas.openxmlformats.org/drawingml/2006/main">
-              <a:ext uri="{FF2B5EF4-FFF2-40B4-BE49-F238E27FC236}">
-                <a16:creationId xmlns:a16="http://schemas.microsoft.com/office/drawing/2014/main" id="{FEE58D96-74E7-4D34-BEF2-EAD69D2D8C9F}"/>
+          <p:cNvPr id="14" name="s3-takeaway">
+            <a:extLst xmlns:a="http://schemas.openxmlformats.org/drawingml/2006/main">
+              <a:ext uri="{FF2B5EF4-FFF2-40B4-BE49-F238E27FC236}">
+                <a16:creationId xmlns:a16="http://schemas.microsoft.com/office/drawing/2014/main" id="{E71C8D62-F6E1-4FF5-9C03-477BB34BCED0}"/>
               </a:ext>
             </a:extLst>
           </p:cNvPr>
@@ -3408,7 +3530,7 @@
                 <a:ea typeface="PingFang SC"/>
                 <a:cs typeface="PingFang SC"/>
               </a:rPr>
-              <a:t>早期人工智能强调把人的知识写成规则</a:t>
+              <a:t>AI 热潮与低谷由能力、资源和预期共同塑造</a:t>
             </a:r>
           </a:p>
         </p:txBody>
@@ -3416,7 +3538,7 @@
     </p:spTree>
     <p:extLst>
       <p:ext uri="{BB962C8B-B14F-4D97-AF65-F5344CB8AC3E}">
-        <p14:creationId xmlns:p14="http://schemas.microsoft.com/office/powerpoint/2010/main" val="1726957137"/>
+        <p14:creationId xmlns:p14="http://schemas.microsoft.com/office/powerpoint/2010/main" val="1324830850"/>
       </p:ext>
     </p:extLst>
   </p:cSld>
@@ -3447,7 +3569,7 @@
           <p:cNvPr id="1" name="s4-rule">
             <a:extLst xmlns:a="http://schemas.openxmlformats.org/drawingml/2006/main">
               <a:ext uri="{FF2B5EF4-FFF2-40B4-BE49-F238E27FC236}">
-                <a16:creationId xmlns:a16="http://schemas.microsoft.com/office/drawing/2014/main" id="{6E1502F8-2CAA-44DB-A385-11BF27F9FD69}"/>
+                <a16:creationId xmlns:a16="http://schemas.microsoft.com/office/drawing/2014/main" id="{BFEEE4B5-F689-4EF5-87A6-93679C74D7F2}"/>
               </a:ext>
             </a:extLst>
           </p:cNvPr>
@@ -3480,7 +3602,7 @@
           <p:cNvPr id="2" name="s4-eyebrow">
             <a:extLst xmlns:a="http://schemas.openxmlformats.org/drawingml/2006/main">
               <a:ext uri="{FF2B5EF4-FFF2-40B4-BE49-F238E27FC236}">
-                <a16:creationId xmlns:a16="http://schemas.microsoft.com/office/drawing/2014/main" id="{E584DEFE-FB63-466C-887F-5C4946D42E61}"/>
+                <a16:creationId xmlns:a16="http://schemas.microsoft.com/office/drawing/2014/main" id="{7F79162C-BFFF-410A-802A-E9172D7ACCA5}"/>
               </a:ext>
             </a:extLst>
           </p:cNvPr>
@@ -3538,7 +3660,7 @@
           <p:cNvPr id="3" name="s4-title">
             <a:extLst xmlns:a="http://schemas.openxmlformats.org/drawingml/2006/main">
               <a:ext uri="{FF2B5EF4-FFF2-40B4-BE49-F238E27FC236}">
-                <a16:creationId xmlns:a16="http://schemas.microsoft.com/office/drawing/2014/main" id="{B9A0760B-4BD5-4903-A4AE-6B74F9E6C4BA}"/>
+                <a16:creationId xmlns:a16="http://schemas.microsoft.com/office/drawing/2014/main" id="{36D5BA87-774F-41A9-AC26-47FFE31F31A9}"/>
               </a:ext>
             </a:extLst>
           </p:cNvPr>
@@ -3596,7 +3718,7 @@
           <p:cNvPr id="4" name="s4-footer">
             <a:extLst xmlns:a="http://schemas.openxmlformats.org/drawingml/2006/main">
               <a:ext uri="{FF2B5EF4-FFF2-40B4-BE49-F238E27FC236}">
-                <a16:creationId xmlns:a16="http://schemas.microsoft.com/office/drawing/2014/main" id="{F9CDA8A1-1191-4D65-89EE-27AC256D44D0}"/>
+                <a16:creationId xmlns:a16="http://schemas.microsoft.com/office/drawing/2014/main" id="{8664E159-4B96-489F-A9C6-CB0AE9CE2764}"/>
               </a:ext>
             </a:extLst>
           </p:cNvPr>
@@ -3627,7 +3749,7 @@
           <p:cNvPr id="5" name="s4-identity">
             <a:extLst xmlns:a="http://schemas.openxmlformats.org/drawingml/2006/main">
               <a:ext uri="{FF2B5EF4-FFF2-40B4-BE49-F238E27FC236}">
-                <a16:creationId xmlns:a16="http://schemas.microsoft.com/office/drawing/2014/main" id="{3CB0F949-44B9-4A2F-A065-124B6BC52C9D}"/>
+                <a16:creationId xmlns:a16="http://schemas.microsoft.com/office/drawing/2014/main" id="{4AEF67A0-8E89-416D-9302-B208C182E34E}"/>
               </a:ext>
             </a:extLst>
           </p:cNvPr>
@@ -3685,7 +3807,7 @@
           <p:cNvPr id="6" name="core-no-0">
             <a:extLst xmlns:a="http://schemas.openxmlformats.org/drawingml/2006/main">
               <a:ext uri="{FF2B5EF4-FFF2-40B4-BE49-F238E27FC236}">
-                <a16:creationId xmlns:a16="http://schemas.microsoft.com/office/drawing/2014/main" id="{96F950B5-D7D5-4EC5-A76C-B6C354E0A80A}"/>
+                <a16:creationId xmlns:a16="http://schemas.microsoft.com/office/drawing/2014/main" id="{B038F216-4EC0-4950-96DB-EE3CE9422C70}"/>
               </a:ext>
             </a:extLst>
           </p:cNvPr>
@@ -3717,7 +3839,7 @@
             <a:pPr algn="l">
               <a:defRPr sz="2250" b="1">
                 <a:solidFill>
-                  <a:srgbClr val="D6A33A"/>
+                  <a:srgbClr val="8A5A00"/>
                 </a:solidFill>
                 <a:latin typeface="PingFang SC"/>
                 <a:ea typeface="PingFang SC"/>
@@ -3727,7 +3849,7 @@
             <a:r>
               <a:rPr sz="2250" b="1">
                 <a:solidFill>
-                  <a:srgbClr val="D6A33A"/>
+                  <a:srgbClr val="8A5A00"/>
                 </a:solidFill>
                 <a:latin typeface="PingFang SC"/>
                 <a:ea typeface="PingFang SC"/>
@@ -3743,7 +3865,7 @@
           <p:cNvPr id="7" name="core-label-0">
             <a:extLst xmlns:a="http://schemas.openxmlformats.org/drawingml/2006/main">
               <a:ext uri="{FF2B5EF4-FFF2-40B4-BE49-F238E27FC236}">
-                <a16:creationId xmlns:a16="http://schemas.microsoft.com/office/drawing/2014/main" id="{C2DCD2EF-0F78-4011-A845-4A3352F49A44}"/>
+                <a16:creationId xmlns:a16="http://schemas.microsoft.com/office/drawing/2014/main" id="{FF501439-ACDA-4DAA-8954-9E347354A264}"/>
               </a:ext>
             </a:extLst>
           </p:cNvPr>
@@ -3801,7 +3923,7 @@
           <p:cNvPr id="8" name="core-body-0">
             <a:extLst xmlns:a="http://schemas.openxmlformats.org/drawingml/2006/main">
               <a:ext uri="{FF2B5EF4-FFF2-40B4-BE49-F238E27FC236}">
-                <a16:creationId xmlns:a16="http://schemas.microsoft.com/office/drawing/2014/main" id="{317E1A54-47FA-4A49-B2F2-1C6BAD668F66}"/>
+                <a16:creationId xmlns:a16="http://schemas.microsoft.com/office/drawing/2014/main" id="{E7BCF0EC-907F-4CD3-9277-421255C3F44B}"/>
               </a:ext>
             </a:extLst>
           </p:cNvPr>
@@ -3825,7 +3947,7 @@
           </a:solidFill>
           <a:ln xmlns:a="http://schemas.openxmlformats.org/drawingml/2006/main" w="19050">
             <a:solidFill>
-              <a:srgbClr val="D6A33A"/>
+              <a:srgbClr val="8A5A00"/>
             </a:solidFill>
             <a:prstDash val="solid"/>
           </a:ln>
@@ -3855,7 +3977,7 @@
                 <a:ea typeface="PingFang SC"/>
                 <a:cs typeface="PingFang SC"/>
               </a:rPr>
-              <a:t>大模型的目标往往不止于模仿人类。在一些定义清楚、数据充分的基准任务中，模型能达到很高的分数；但分数取决于数据集、提示、工具和评价方法，不能直接外推成“全面超过人类”。程序员、教师、主播、翻译…</a:t>
+              <a:t>大模型的目标往往不止于模仿人类；在一些定义清楚、数据充分的基准任务中；模型能达到很高的分数；但分数取决于数据集、提示、工具和评价方法；不能直接外推成“全面超过人类”</a:t>
             </a:r>
           </a:p>
         </p:txBody>
@@ -3865,7 +3987,7 @@
           <p:cNvPr id="9" name="core-no-1">
             <a:extLst xmlns:a="http://schemas.openxmlformats.org/drawingml/2006/main">
               <a:ext uri="{FF2B5EF4-FFF2-40B4-BE49-F238E27FC236}">
-                <a16:creationId xmlns:a16="http://schemas.microsoft.com/office/drawing/2014/main" id="{14DF21D9-A442-4DAB-BE54-E6DEA9B9D6CF}"/>
+                <a16:creationId xmlns:a16="http://schemas.microsoft.com/office/drawing/2014/main" id="{5621820D-4092-4FAA-B197-15F5582B3666}"/>
               </a:ext>
             </a:extLst>
           </p:cNvPr>
@@ -3897,7 +4019,7 @@
             <a:pPr algn="l">
               <a:defRPr sz="2250" b="1">
                 <a:solidFill>
-                  <a:srgbClr val="D6A33A"/>
+                  <a:srgbClr val="8A5A00"/>
                 </a:solidFill>
                 <a:latin typeface="PingFang SC"/>
                 <a:ea typeface="PingFang SC"/>
@@ -3907,7 +4029,7 @@
             <a:r>
               <a:rPr sz="2250" b="1">
                 <a:solidFill>
-                  <a:srgbClr val="D6A33A"/>
+                  <a:srgbClr val="8A5A00"/>
                 </a:solidFill>
                 <a:latin typeface="PingFang SC"/>
                 <a:ea typeface="PingFang SC"/>
@@ -3923,7 +4045,7 @@
           <p:cNvPr id="10" name="core-body-1">
             <a:extLst xmlns:a="http://schemas.openxmlformats.org/drawingml/2006/main">
               <a:ext uri="{FF2B5EF4-FFF2-40B4-BE49-F238E27FC236}">
-                <a16:creationId xmlns:a16="http://schemas.microsoft.com/office/drawing/2014/main" id="{37E1C124-4731-4AFB-9156-8F75C513EB0B}"/>
+                <a16:creationId xmlns:a16="http://schemas.microsoft.com/office/drawing/2014/main" id="{E973152B-BD7D-4D47-8C91-E7533F452256}"/>
               </a:ext>
             </a:extLst>
           </p:cNvPr>
@@ -3977,7 +4099,7 @@
                 <a:ea typeface="PingFang SC"/>
                 <a:cs typeface="PingFang SC"/>
               </a:rPr>
-              <a:t>需要说明的是，被改变不等于整份职业被取代。更常见的变化，是职业内部的检索、起草、分类、分析和重复沟通被重新分工；人仍要负责目标、判断、责任与例外处理。与其只问“岗位会不会消失”，更有用的问题是…</a:t>
+              <a:t>需要说明的是，被改变不等于整份职业被取代；更常见的变化，是职业内部的检索、起草、分类、分析和重复沟通被重新分工；人仍要负责目标、判断、责任与例外处理；与其只问“岗位会不会消失”</a:t>
             </a:r>
           </a:p>
         </p:txBody>
@@ -3987,7 +4109,7 @@
           <p:cNvPr id="11" name="s4-takeaway-rule">
             <a:extLst xmlns:a="http://schemas.openxmlformats.org/drawingml/2006/main">
               <a:ext uri="{FF2B5EF4-FFF2-40B4-BE49-F238E27FC236}">
-                <a16:creationId xmlns:a16="http://schemas.microsoft.com/office/drawing/2014/main" id="{8ADD0521-BA2B-4D66-BD48-4B6331FE411D}"/>
+                <a16:creationId xmlns:a16="http://schemas.microsoft.com/office/drawing/2014/main" id="{9E27737A-4F70-4707-8208-69334D0EBB18}"/>
               </a:ext>
             </a:extLst>
           </p:cNvPr>
@@ -4020,7 +4142,7 @@
           <p:cNvPr id="12" name="s4-takeaway">
             <a:extLst xmlns:a="http://schemas.openxmlformats.org/drawingml/2006/main">
               <a:ext uri="{FF2B5EF4-FFF2-40B4-BE49-F238E27FC236}">
-                <a16:creationId xmlns:a16="http://schemas.microsoft.com/office/drawing/2014/main" id="{E4A1940B-F7BC-4D60-819E-11DDF0BD1D04}"/>
+                <a16:creationId xmlns:a16="http://schemas.microsoft.com/office/drawing/2014/main" id="{33C56C64-61A2-41AE-9D97-7FFEEE654974}"/>
               </a:ext>
             </a:extLst>
           </p:cNvPr>
@@ -4076,7 +4198,7 @@
     </p:spTree>
     <p:extLst>
       <p:ext uri="{BB962C8B-B14F-4D97-AF65-F5344CB8AC3E}">
-        <p14:creationId xmlns:p14="http://schemas.microsoft.com/office/powerpoint/2010/main" val="167326252"/>
+        <p14:creationId xmlns:p14="http://schemas.microsoft.com/office/powerpoint/2010/main" val="1759651867"/>
       </p:ext>
     </p:extLst>
   </p:cSld>
@@ -4107,7 +4229,7 @@
           <p:cNvPr id="1" name="s5-rule">
             <a:extLst xmlns:a="http://schemas.openxmlformats.org/drawingml/2006/main">
               <a:ext uri="{FF2B5EF4-FFF2-40B4-BE49-F238E27FC236}">
-                <a16:creationId xmlns:a16="http://schemas.microsoft.com/office/drawing/2014/main" id="{885443A6-990C-470B-A04B-ADE15B17CC4A}"/>
+                <a16:creationId xmlns:a16="http://schemas.microsoft.com/office/drawing/2014/main" id="{30CD68B4-A11C-4859-80D3-E50596824592}"/>
               </a:ext>
             </a:extLst>
           </p:cNvPr>
@@ -4140,7 +4262,7 @@
           <p:cNvPr id="2" name="s5-eyebrow">
             <a:extLst xmlns:a="http://schemas.openxmlformats.org/drawingml/2006/main">
               <a:ext uri="{FF2B5EF4-FFF2-40B4-BE49-F238E27FC236}">
-                <a16:creationId xmlns:a16="http://schemas.microsoft.com/office/drawing/2014/main" id="{BE3D7B73-033A-4FF3-9291-270001E79AAD}"/>
+                <a16:creationId xmlns:a16="http://schemas.microsoft.com/office/drawing/2014/main" id="{DF86FAC8-89E9-4248-AFD3-16B457D91384}"/>
               </a:ext>
             </a:extLst>
           </p:cNvPr>
@@ -4198,7 +4320,7 @@
           <p:cNvPr id="3" name="s5-title">
             <a:extLst xmlns:a="http://schemas.openxmlformats.org/drawingml/2006/main">
               <a:ext uri="{FF2B5EF4-FFF2-40B4-BE49-F238E27FC236}">
-                <a16:creationId xmlns:a16="http://schemas.microsoft.com/office/drawing/2014/main" id="{55C6670C-18C5-4D81-B72D-9B46FB120D1D}"/>
+                <a16:creationId xmlns:a16="http://schemas.microsoft.com/office/drawing/2014/main" id="{75A6234A-EADE-47EF-AD97-7C0DC89D0912}"/>
               </a:ext>
             </a:extLst>
           </p:cNvPr>
@@ -4256,7 +4378,7 @@
           <p:cNvPr id="4" name="s5-footer">
             <a:extLst xmlns:a="http://schemas.openxmlformats.org/drawingml/2006/main">
               <a:ext uri="{FF2B5EF4-FFF2-40B4-BE49-F238E27FC236}">
-                <a16:creationId xmlns:a16="http://schemas.microsoft.com/office/drawing/2014/main" id="{7CD1546B-7B3D-45A9-8C09-5D8559520A27}"/>
+                <a16:creationId xmlns:a16="http://schemas.microsoft.com/office/drawing/2014/main" id="{1C89BADB-6627-487F-8CC4-4398FAC6CD82}"/>
               </a:ext>
             </a:extLst>
           </p:cNvPr>
@@ -4287,7 +4409,7 @@
           <p:cNvPr id="5" name="s5-identity">
             <a:extLst xmlns:a="http://schemas.openxmlformats.org/drawingml/2006/main">
               <a:ext uri="{FF2B5EF4-FFF2-40B4-BE49-F238E27FC236}">
-                <a16:creationId xmlns:a16="http://schemas.microsoft.com/office/drawing/2014/main" id="{F1E54C02-63F9-43C4-8605-ABE476E3D2C0}"/>
+                <a16:creationId xmlns:a16="http://schemas.microsoft.com/office/drawing/2014/main" id="{4938FF08-980A-422A-A09E-C95D502B507A}"/>
               </a:ext>
             </a:extLst>
           </p:cNvPr>
@@ -4345,7 +4467,7 @@
           <p:cNvPr id="6" name="core-no-0">
             <a:extLst xmlns:a="http://schemas.openxmlformats.org/drawingml/2006/main">
               <a:ext uri="{FF2B5EF4-FFF2-40B4-BE49-F238E27FC236}">
-                <a16:creationId xmlns:a16="http://schemas.microsoft.com/office/drawing/2014/main" id="{020FBB56-56CD-44F8-B461-965FBFB82BBF}"/>
+                <a16:creationId xmlns:a16="http://schemas.microsoft.com/office/drawing/2014/main" id="{22280C0A-AC1E-4A78-8C63-73ED2957A0D4}"/>
               </a:ext>
             </a:extLst>
           </p:cNvPr>
@@ -4377,7 +4499,7 @@
             <a:pPr algn="l">
               <a:defRPr sz="2250" b="1">
                 <a:solidFill>
-                  <a:srgbClr val="D6A33A"/>
+                  <a:srgbClr val="8A5A00"/>
                 </a:solidFill>
                 <a:latin typeface="PingFang SC"/>
                 <a:ea typeface="PingFang SC"/>
@@ -4387,7 +4509,7 @@
             <a:r>
               <a:rPr sz="2250" b="1">
                 <a:solidFill>
-                  <a:srgbClr val="D6A33A"/>
+                  <a:srgbClr val="8A5A00"/>
                 </a:solidFill>
                 <a:latin typeface="PingFang SC"/>
                 <a:ea typeface="PingFang SC"/>
@@ -4403,7 +4525,7 @@
           <p:cNvPr id="7" name="core-label-0">
             <a:extLst xmlns:a="http://schemas.openxmlformats.org/drawingml/2006/main">
               <a:ext uri="{FF2B5EF4-FFF2-40B4-BE49-F238E27FC236}">
-                <a16:creationId xmlns:a16="http://schemas.microsoft.com/office/drawing/2014/main" id="{28173870-BEC5-458B-B72C-58EA0F501560}"/>
+                <a16:creationId xmlns:a16="http://schemas.microsoft.com/office/drawing/2014/main" id="{8C7D96F5-6441-47BA-811C-169D5DF5FEBB}"/>
               </a:ext>
             </a:extLst>
           </p:cNvPr>
@@ -4461,7 +4583,7 @@
           <p:cNvPr id="8" name="core-body-0">
             <a:extLst xmlns:a="http://schemas.openxmlformats.org/drawingml/2006/main">
               <a:ext uri="{FF2B5EF4-FFF2-40B4-BE49-F238E27FC236}">
-                <a16:creationId xmlns:a16="http://schemas.microsoft.com/office/drawing/2014/main" id="{A58A4B24-F440-4A13-AB88-F63A2F115FD3}"/>
+                <a16:creationId xmlns:a16="http://schemas.microsoft.com/office/drawing/2014/main" id="{E8F63F98-4D72-4130-B1F4-3003FA296CC4}"/>
               </a:ext>
             </a:extLst>
           </p:cNvPr>
@@ -4485,7 +4607,7 @@
           </a:solidFill>
           <a:ln xmlns:a="http://schemas.openxmlformats.org/drawingml/2006/main" w="19050">
             <a:solidFill>
-              <a:srgbClr val="D6A33A"/>
+              <a:srgbClr val="8A5A00"/>
             </a:solidFill>
             <a:prstDash val="solid"/>
           </a:ln>
@@ -4525,7 +4647,7 @@
           <p:cNvPr id="9" name="core-no-1">
             <a:extLst xmlns:a="http://schemas.openxmlformats.org/drawingml/2006/main">
               <a:ext uri="{FF2B5EF4-FFF2-40B4-BE49-F238E27FC236}">
-                <a16:creationId xmlns:a16="http://schemas.microsoft.com/office/drawing/2014/main" id="{82A20588-8D02-4A25-BE7E-9F0D86C59827}"/>
+                <a16:creationId xmlns:a16="http://schemas.microsoft.com/office/drawing/2014/main" id="{BBE1BBAD-E9BF-410A-9F53-B8B8DCF5939B}"/>
               </a:ext>
             </a:extLst>
           </p:cNvPr>
@@ -4557,7 +4679,7 @@
             <a:pPr algn="l">
               <a:defRPr sz="2250" b="1">
                 <a:solidFill>
-                  <a:srgbClr val="D6A33A"/>
+                  <a:srgbClr val="8A5A00"/>
                 </a:solidFill>
                 <a:latin typeface="PingFang SC"/>
                 <a:ea typeface="PingFang SC"/>
@@ -4567,7 +4689,7 @@
             <a:r>
               <a:rPr sz="2250" b="1">
                 <a:solidFill>
-                  <a:srgbClr val="D6A33A"/>
+                  <a:srgbClr val="8A5A00"/>
                 </a:solidFill>
                 <a:latin typeface="PingFang SC"/>
                 <a:ea typeface="PingFang SC"/>
@@ -4583,7 +4705,7 @@
           <p:cNvPr id="10" name="core-body-1">
             <a:extLst xmlns:a="http://schemas.openxmlformats.org/drawingml/2006/main">
               <a:ext uri="{FF2B5EF4-FFF2-40B4-BE49-F238E27FC236}">
-                <a16:creationId xmlns:a16="http://schemas.microsoft.com/office/drawing/2014/main" id="{E79E059F-B7BB-4C2C-B676-E75DED101BB8}"/>
+                <a16:creationId xmlns:a16="http://schemas.microsoft.com/office/drawing/2014/main" id="{86B5E505-B9FE-46C7-844D-5FAC5EED4B1B}"/>
               </a:ext>
             </a:extLst>
           </p:cNvPr>
@@ -4647,7 +4769,7 @@
           <p:cNvPr id="11" name="core-no-2">
             <a:extLst xmlns:a="http://schemas.openxmlformats.org/drawingml/2006/main">
               <a:ext uri="{FF2B5EF4-FFF2-40B4-BE49-F238E27FC236}">
-                <a16:creationId xmlns:a16="http://schemas.microsoft.com/office/drawing/2014/main" id="{37E1B568-3D0A-4BB0-BA99-64EEA1595454}"/>
+                <a16:creationId xmlns:a16="http://schemas.microsoft.com/office/drawing/2014/main" id="{30AA7014-468D-4D82-8FEF-001EE4914642}"/>
               </a:ext>
             </a:extLst>
           </p:cNvPr>
@@ -4679,7 +4801,7 @@
             <a:pPr algn="l">
               <a:defRPr sz="2250" b="1">
                 <a:solidFill>
-                  <a:srgbClr val="D6A33A"/>
+                  <a:srgbClr val="8A5A00"/>
                 </a:solidFill>
                 <a:latin typeface="PingFang SC"/>
                 <a:ea typeface="PingFang SC"/>
@@ -4689,7 +4811,7 @@
             <a:r>
               <a:rPr sz="2250" b="1">
                 <a:solidFill>
-                  <a:srgbClr val="D6A33A"/>
+                  <a:srgbClr val="8A5A00"/>
                 </a:solidFill>
                 <a:latin typeface="PingFang SC"/>
                 <a:ea typeface="PingFang SC"/>
@@ -4705,7 +4827,7 @@
           <p:cNvPr id="12" name="core-body-2">
             <a:extLst xmlns:a="http://schemas.openxmlformats.org/drawingml/2006/main">
               <a:ext uri="{FF2B5EF4-FFF2-40B4-BE49-F238E27FC236}">
-                <a16:creationId xmlns:a16="http://schemas.microsoft.com/office/drawing/2014/main" id="{A0E113C8-3567-4C07-87D8-71482993C9AA}"/>
+                <a16:creationId xmlns:a16="http://schemas.microsoft.com/office/drawing/2014/main" id="{14AA8A44-88C5-4D08-B7A7-DB7F851CD075}"/>
               </a:ext>
             </a:extLst>
           </p:cNvPr>
@@ -4769,7 +4891,7 @@
           <p:cNvPr id="13" name="s5-takeaway-rule">
             <a:extLst xmlns:a="http://schemas.openxmlformats.org/drawingml/2006/main">
               <a:ext uri="{FF2B5EF4-FFF2-40B4-BE49-F238E27FC236}">
-                <a16:creationId xmlns:a16="http://schemas.microsoft.com/office/drawing/2014/main" id="{22D10EC5-25CB-4C1D-BAA1-9D72B921B03A}"/>
+                <a16:creationId xmlns:a16="http://schemas.microsoft.com/office/drawing/2014/main" id="{4167AB36-DEB5-4DB3-86E7-2246A559EEAC}"/>
               </a:ext>
             </a:extLst>
           </p:cNvPr>
@@ -4802,7 +4924,7 @@
           <p:cNvPr id="14" name="s5-takeaway">
             <a:extLst xmlns:a="http://schemas.openxmlformats.org/drawingml/2006/main">
               <a:ext uri="{FF2B5EF4-FFF2-40B4-BE49-F238E27FC236}">
-                <a16:creationId xmlns:a16="http://schemas.microsoft.com/office/drawing/2014/main" id="{A22F98C9-E088-4124-8D4D-AF385F1019FD}"/>
+                <a16:creationId xmlns:a16="http://schemas.microsoft.com/office/drawing/2014/main" id="{3CF555FF-2F42-48D9-98A7-990EFB763B54}"/>
               </a:ext>
             </a:extLst>
           </p:cNvPr>
@@ -4858,7 +4980,7 @@
     </p:spTree>
     <p:extLst>
       <p:ext uri="{BB962C8B-B14F-4D97-AF65-F5344CB8AC3E}">
-        <p14:creationId xmlns:p14="http://schemas.microsoft.com/office/powerpoint/2010/main" val="1844079013"/>
+        <p14:creationId xmlns:p14="http://schemas.microsoft.com/office/powerpoint/2010/main" val="632974401"/>
       </p:ext>
     </p:extLst>
   </p:cSld>
@@ -4889,7 +5011,7 @@
           <p:cNvPr id="1" name="s6-rule">
             <a:extLst xmlns:a="http://schemas.openxmlformats.org/drawingml/2006/main">
               <a:ext uri="{FF2B5EF4-FFF2-40B4-BE49-F238E27FC236}">
-                <a16:creationId xmlns:a16="http://schemas.microsoft.com/office/drawing/2014/main" id="{0CF63870-0551-44B2-95CE-6016840F2246}"/>
+                <a16:creationId xmlns:a16="http://schemas.microsoft.com/office/drawing/2014/main" id="{974E4834-D806-439C-B031-81D23EAB0AE1}"/>
               </a:ext>
             </a:extLst>
           </p:cNvPr>
@@ -4922,7 +5044,7 @@
           <p:cNvPr id="2" name="s6-eyebrow">
             <a:extLst xmlns:a="http://schemas.openxmlformats.org/drawingml/2006/main">
               <a:ext uri="{FF2B5EF4-FFF2-40B4-BE49-F238E27FC236}">
-                <a16:creationId xmlns:a16="http://schemas.microsoft.com/office/drawing/2014/main" id="{906B35A6-0C04-46D1-A8E7-B52F12DE9D0A}"/>
+                <a16:creationId xmlns:a16="http://schemas.microsoft.com/office/drawing/2014/main" id="{FC5F8CFA-82BC-46C7-9F24-1F704AB8E88C}"/>
               </a:ext>
             </a:extLst>
           </p:cNvPr>
@@ -4980,7 +5102,7 @@
           <p:cNvPr id="3" name="s6-title">
             <a:extLst xmlns:a="http://schemas.openxmlformats.org/drawingml/2006/main">
               <a:ext uri="{FF2B5EF4-FFF2-40B4-BE49-F238E27FC236}">
-                <a16:creationId xmlns:a16="http://schemas.microsoft.com/office/drawing/2014/main" id="{00837F24-835D-4BA6-AEDF-44CE486E2D70}"/>
+                <a16:creationId xmlns:a16="http://schemas.microsoft.com/office/drawing/2014/main" id="{9ACA4B08-9750-446B-BBDD-A3DF23B9F6B1}"/>
               </a:ext>
             </a:extLst>
           </p:cNvPr>
@@ -5028,7 +5150,7 @@
                 <a:ea typeface="PingFang SC"/>
                 <a:cs typeface="PingFang SC"/>
               </a:rPr>
-              <a:t>一只乌鸦的启示必须经过边界验证</a:t>
+              <a:t>乌鸦提醒我们：智能不等于训练规模</a:t>
             </a:r>
           </a:p>
         </p:txBody>
@@ -5038,7 +5160,7 @@
           <p:cNvPr id="4" name="s6-footer">
             <a:extLst xmlns:a="http://schemas.openxmlformats.org/drawingml/2006/main">
               <a:ext uri="{FF2B5EF4-FFF2-40B4-BE49-F238E27FC236}">
-                <a16:creationId xmlns:a16="http://schemas.microsoft.com/office/drawing/2014/main" id="{B45CA3CA-A7E9-4CAE-89CE-7C259E8BC9F2}"/>
+                <a16:creationId xmlns:a16="http://schemas.microsoft.com/office/drawing/2014/main" id="{6AED92C0-26B1-4065-B58B-CA05EBF05C84}"/>
               </a:ext>
             </a:extLst>
           </p:cNvPr>
@@ -5069,7 +5191,7 @@
           <p:cNvPr id="5" name="s6-identity">
             <a:extLst xmlns:a="http://schemas.openxmlformats.org/drawingml/2006/main">
               <a:ext uri="{FF2B5EF4-FFF2-40B4-BE49-F238E27FC236}">
-                <a16:creationId xmlns:a16="http://schemas.microsoft.com/office/drawing/2014/main" id="{46B33F05-142D-4A97-AB5D-CC2A83F81D2C}"/>
+                <a16:creationId xmlns:a16="http://schemas.microsoft.com/office/drawing/2014/main" id="{5E74AFCA-3CE8-4E42-BCA0-5F0BCE97BA63}"/>
               </a:ext>
             </a:extLst>
           </p:cNvPr>
@@ -5127,7 +5249,7 @@
           <p:cNvPr id="6" name="case-title">
             <a:extLst xmlns:a="http://schemas.openxmlformats.org/drawingml/2006/main">
               <a:ext uri="{FF2B5EF4-FFF2-40B4-BE49-F238E27FC236}">
-                <a16:creationId xmlns:a16="http://schemas.microsoft.com/office/drawing/2014/main" id="{A47B7E21-E2FE-4089-840D-99688276A534}"/>
+                <a16:creationId xmlns:a16="http://schemas.microsoft.com/office/drawing/2014/main" id="{BD07D3CC-C2BE-4481-B8A2-34975BA8CB7C}"/>
               </a:ext>
             </a:extLst>
           </p:cNvPr>
@@ -5191,23 +5313,23 @@
           <p:cNvPr id="7" name="case-row-0">
             <a:extLst xmlns:a="http://schemas.openxmlformats.org/drawingml/2006/main">
               <a:ext uri="{FF2B5EF4-FFF2-40B4-BE49-F238E27FC236}">
-                <a16:creationId xmlns:a16="http://schemas.microsoft.com/office/drawing/2014/main" id="{94D9F892-2681-4B2D-8AE8-239A3A629D0D}"/>
-              </a:ext>
-            </a:extLst>
-          </p:cNvPr>
-          <p:cNvSpPr>
-            <a:spLocks xmlns:a="http://schemas.openxmlformats.org/drawingml/2006/main" noGrp="1"/>
-          </p:cNvSpPr>
-          <p:nvPr/>
-        </p:nvSpPr>
-        <p:spPr>
-          <a:xfrm xmlns:a="http://schemas.openxmlformats.org/drawingml/2006/main">
-            <a:off x="4286250" y="2228850"/>
-            <a:ext cx="6534150" cy="1238250"/>
+                <a16:creationId xmlns:a16="http://schemas.microsoft.com/office/drawing/2014/main" id="{A9F21B1B-5D1A-4047-9FAB-A8CE4859CA3A}"/>
+              </a:ext>
+            </a:extLst>
+          </p:cNvPr>
+          <p:cNvSpPr>
+            <a:spLocks xmlns:a="http://schemas.openxmlformats.org/drawingml/2006/main" noGrp="1"/>
+          </p:cNvSpPr>
+          <p:nvPr/>
+        </p:nvSpPr>
+        <p:spPr>
+          <a:xfrm xmlns:a="http://schemas.openxmlformats.org/drawingml/2006/main">
+            <a:off x="4286250" y="2038350"/>
+            <a:ext cx="6534150" cy="514350"/>
           </a:xfrm>
           <a:prstGeom xmlns:a="http://schemas.openxmlformats.org/drawingml/2006/main" prst="roundRect">
             <a:avLst>
-              <a:gd name="adj" fmla="val 10000"/>
+              <a:gd name="adj" fmla="val 24074"/>
             </a:avLst>
           </a:prstGeom>
           <a:solidFill xmlns:a="http://schemas.openxmlformats.org/drawingml/2006/main">
@@ -5222,7 +5344,7 @@
         </p:spPr>
         <p:txBody>
           <a:bodyPr xmlns:a="http://schemas.openxmlformats.org/drawingml/2006/main" lIns="152400" tIns="133350" rIns="152400" bIns="133350" anchor="ctr">
-            <a:normAutofit fontScale="100000"/>
+            <a:normAutofit fontScale="72956"/>
           </a:bodyPr>
           <a:lstStyle xmlns:a="http://schemas.openxmlformats.org/drawingml/2006/main"/>
           <a:p xmlns:a="http://schemas.openxmlformats.org/drawingml/2006/main">
@@ -5245,7 +5367,7 @@
                 <a:ea typeface="PingFang SC"/>
                 <a:cs typeface="PingFang SC"/>
               </a:rPr>
-              <a:t>场景｜城市中的乌鸦会利用车辆轧开坚果，并根据交通变化选择取食时机。它没有海量训练数据，却能在真实环境里感知、规划、使用工具并达成目标</a:t>
+              <a:t>场景｜城市中的乌鸦会利用车辆轧开坚果，并根据交通变化选择取食时机</a:t>
             </a:r>
           </a:p>
         </p:txBody>
@@ -5255,23 +5377,151 @@
           <p:cNvPr id="8" name="case-row-1">
             <a:extLst xmlns:a="http://schemas.openxmlformats.org/drawingml/2006/main">
               <a:ext uri="{FF2B5EF4-FFF2-40B4-BE49-F238E27FC236}">
-                <a16:creationId xmlns:a16="http://schemas.microsoft.com/office/drawing/2014/main" id="{ACA807AB-49A1-4C58-A997-A116608ACEAA}"/>
-              </a:ext>
-            </a:extLst>
-          </p:cNvPr>
-          <p:cNvSpPr>
-            <a:spLocks xmlns:a="http://schemas.openxmlformats.org/drawingml/2006/main" noGrp="1"/>
-          </p:cNvSpPr>
-          <p:nvPr/>
-        </p:nvSpPr>
-        <p:spPr>
-          <a:xfrm xmlns:a="http://schemas.openxmlformats.org/drawingml/2006/main">
-            <a:off x="4286250" y="3714750"/>
-            <a:ext cx="6534150" cy="1238250"/>
+                <a16:creationId xmlns:a16="http://schemas.microsoft.com/office/drawing/2014/main" id="{5602447E-D24C-4D4A-BBE4-EF83139B308D}"/>
+              </a:ext>
+            </a:extLst>
+          </p:cNvPr>
+          <p:cNvSpPr>
+            <a:spLocks xmlns:a="http://schemas.openxmlformats.org/drawingml/2006/main" noGrp="1"/>
+          </p:cNvSpPr>
+          <p:nvPr/>
+        </p:nvSpPr>
+        <p:spPr>
+          <a:xfrm xmlns:a="http://schemas.openxmlformats.org/drawingml/2006/main">
+            <a:off x="4286250" y="2667000"/>
+            <a:ext cx="6534150" cy="514350"/>
           </a:xfrm>
           <a:prstGeom xmlns:a="http://schemas.openxmlformats.org/drawingml/2006/main" prst="roundRect">
             <a:avLst>
-              <a:gd name="adj" fmla="val 10000"/>
+              <a:gd name="adj" fmla="val 24074"/>
+            </a:avLst>
+          </a:prstGeom>
+          <a:solidFill xmlns:a="http://schemas.openxmlformats.org/drawingml/2006/main">
+            <a:srgbClr val="FFFFFF"/>
+          </a:solidFill>
+          <a:ln xmlns:a="http://schemas.openxmlformats.org/drawingml/2006/main" w="9525">
+            <a:solidFill>
+              <a:srgbClr val="D8E0E8"/>
+            </a:solidFill>
+            <a:prstDash val="solid"/>
+          </a:ln>
+        </p:spPr>
+        <p:txBody>
+          <a:bodyPr xmlns:a="http://schemas.openxmlformats.org/drawingml/2006/main" lIns="152400" tIns="133350" rIns="152400" bIns="133350" anchor="ctr">
+            <a:normAutofit fontScale="72956"/>
+          </a:bodyPr>
+          <a:lstStyle xmlns:a="http://schemas.openxmlformats.org/drawingml/2006/main"/>
+          <a:p xmlns:a="http://schemas.openxmlformats.org/drawingml/2006/main">
+            <a:pPr algn="l">
+              <a:defRPr sz="1575" b="0">
+                <a:solidFill>
+                  <a:srgbClr val="10233F"/>
+                </a:solidFill>
+                <a:latin typeface="PingFang SC"/>
+                <a:ea typeface="PingFang SC"/>
+                <a:cs typeface="PingFang SC"/>
+              </a:defRPr>
+            </a:pPr>
+            <a:r>
+              <a:rPr sz="1575" b="0">
+                <a:solidFill>
+                  <a:srgbClr val="10233F"/>
+                </a:solidFill>
+                <a:latin typeface="PingFang SC"/>
+                <a:ea typeface="PingFang SC"/>
+                <a:cs typeface="PingFang SC"/>
+              </a:rPr>
+              <a:t>机制｜它没有海量训练数据，却能在真实环境里感知、规划、使用工具并达成目标</a:t>
+            </a:r>
+          </a:p>
+        </p:txBody>
+      </p:sp>
+      <p:sp>
+        <p:nvSpPr>
+          <p:cNvPr id="9" name="case-row-2">
+            <a:extLst xmlns:a="http://schemas.openxmlformats.org/drawingml/2006/main">
+              <a:ext uri="{FF2B5EF4-FFF2-40B4-BE49-F238E27FC236}">
+                <a16:creationId xmlns:a16="http://schemas.microsoft.com/office/drawing/2014/main" id="{16D1B91D-1BEC-418B-A686-602461C110D6}"/>
+              </a:ext>
+            </a:extLst>
+          </p:cNvPr>
+          <p:cNvSpPr>
+            <a:spLocks xmlns:a="http://schemas.openxmlformats.org/drawingml/2006/main" noGrp="1"/>
+          </p:cNvSpPr>
+          <p:nvPr/>
+        </p:nvSpPr>
+        <p:spPr>
+          <a:xfrm xmlns:a="http://schemas.openxmlformats.org/drawingml/2006/main">
+            <a:off x="4286250" y="3295650"/>
+            <a:ext cx="6534150" cy="514350"/>
+          </a:xfrm>
+          <a:prstGeom xmlns:a="http://schemas.openxmlformats.org/drawingml/2006/main" prst="roundRect">
+            <a:avLst>
+              <a:gd name="adj" fmla="val 24074"/>
+            </a:avLst>
+          </a:prstGeom>
+          <a:solidFill xmlns:a="http://schemas.openxmlformats.org/drawingml/2006/main">
+            <a:srgbClr val="FFFFFF"/>
+          </a:solidFill>
+          <a:ln xmlns:a="http://schemas.openxmlformats.org/drawingml/2006/main" w="9525">
+            <a:solidFill>
+              <a:srgbClr val="D8E0E8"/>
+            </a:solidFill>
+            <a:prstDash val="solid"/>
+          </a:ln>
+        </p:spPr>
+        <p:txBody>
+          <a:bodyPr xmlns:a="http://schemas.openxmlformats.org/drawingml/2006/main" lIns="152400" tIns="133350" rIns="152400" bIns="133350" anchor="ctr">
+            <a:normAutofit fontScale="72956"/>
+          </a:bodyPr>
+          <a:lstStyle xmlns:a="http://schemas.openxmlformats.org/drawingml/2006/main"/>
+          <a:p xmlns:a="http://schemas.openxmlformats.org/drawingml/2006/main">
+            <a:pPr algn="l">
+              <a:defRPr sz="1575" b="0">
+                <a:solidFill>
+                  <a:srgbClr val="10233F"/>
+                </a:solidFill>
+                <a:latin typeface="PingFang SC"/>
+                <a:ea typeface="PingFang SC"/>
+                <a:cs typeface="PingFang SC"/>
+              </a:defRPr>
+            </a:pPr>
+            <a:r>
+              <a:rPr sz="1575" b="0">
+                <a:solidFill>
+                  <a:srgbClr val="10233F"/>
+                </a:solidFill>
+                <a:latin typeface="PingFang SC"/>
+                <a:ea typeface="PingFang SC"/>
+                <a:cs typeface="PingFang SC"/>
+              </a:rPr>
+              <a:t>结果｜这个例子的启发在于，生物智能能利用有限经验、身体能力和环境反馈完成开放任务</a:t>
+            </a:r>
+          </a:p>
+        </p:txBody>
+      </p:sp>
+      <p:sp>
+        <p:nvSpPr>
+          <p:cNvPr id="10" name="case-row-3">
+            <a:extLst xmlns:a="http://schemas.openxmlformats.org/drawingml/2006/main">
+              <a:ext uri="{FF2B5EF4-FFF2-40B4-BE49-F238E27FC236}">
+                <a16:creationId xmlns:a16="http://schemas.microsoft.com/office/drawing/2014/main" id="{BBCC9A9C-8A2F-4D28-8FDA-FE89FCFF1741}"/>
+              </a:ext>
+            </a:extLst>
+          </p:cNvPr>
+          <p:cNvSpPr>
+            <a:spLocks xmlns:a="http://schemas.openxmlformats.org/drawingml/2006/main" noGrp="1"/>
+          </p:cNvSpPr>
+          <p:nvPr/>
+        </p:nvSpPr>
+        <p:spPr>
+          <a:xfrm xmlns:a="http://schemas.openxmlformats.org/drawingml/2006/main">
+            <a:off x="4286250" y="3924300"/>
+            <a:ext cx="6534150" cy="514350"/>
+          </a:xfrm>
+          <a:prstGeom xmlns:a="http://schemas.openxmlformats.org/drawingml/2006/main" prst="roundRect">
+            <a:avLst>
+              <a:gd name="adj" fmla="val 24074"/>
             </a:avLst>
           </a:prstGeom>
           <a:solidFill xmlns:a="http://schemas.openxmlformats.org/drawingml/2006/main">
@@ -5279,14 +5529,14 @@
           </a:solidFill>
           <a:ln xmlns:a="http://schemas.openxmlformats.org/drawingml/2006/main" w="9525">
             <a:solidFill>
-              <a:srgbClr val="D6A33A"/>
+              <a:srgbClr val="8A5A00"/>
             </a:solidFill>
             <a:prstDash val="solid"/>
           </a:ln>
         </p:spPr>
         <p:txBody>
           <a:bodyPr xmlns:a="http://schemas.openxmlformats.org/drawingml/2006/main" lIns="152400" tIns="133350" rIns="152400" bIns="133350" anchor="ctr">
-            <a:normAutofit fontScale="100000"/>
+            <a:normAutofit fontScale="46940"/>
           </a:bodyPr>
           <a:lstStyle xmlns:a="http://schemas.openxmlformats.org/drawingml/2006/main"/>
           <a:p xmlns:a="http://schemas.openxmlformats.org/drawingml/2006/main">
@@ -5309,17 +5559,17 @@
                 <a:ea typeface="PingFang SC"/>
                 <a:cs typeface="PingFang SC"/>
               </a:rPr>
-              <a:t>机制｜这个例子的启发在于，生物智能能利用有限经验、身体能力和环境反馈完成开放任务。它不能直接证明哪条 AI 技术路线一定正确，却提醒我们：判断智能不能只看训练规模…</a:t>
+              <a:t>边界｜它不能直接证明哪条 AI 技术路线一定正确，却提醒我们：判断智能不能只看训练规模，还要看系统能否在环境中感知、行动、纠错并承担后果</a:t>
             </a:r>
           </a:p>
         </p:txBody>
       </p:sp>
       <p:sp>
         <p:nvSpPr>
-          <p:cNvPr id="9" name="s6-takeaway-rule">
-            <a:extLst xmlns:a="http://schemas.openxmlformats.org/drawingml/2006/main">
-              <a:ext uri="{FF2B5EF4-FFF2-40B4-BE49-F238E27FC236}">
-                <a16:creationId xmlns:a16="http://schemas.microsoft.com/office/drawing/2014/main" id="{85C7F634-F538-44A1-A8E8-2B92DCA19856}"/>
+          <p:cNvPr id="11" name="s6-takeaway-rule">
+            <a:extLst xmlns:a="http://schemas.openxmlformats.org/drawingml/2006/main">
+              <a:ext uri="{FF2B5EF4-FFF2-40B4-BE49-F238E27FC236}">
+                <a16:creationId xmlns:a16="http://schemas.microsoft.com/office/drawing/2014/main" id="{E6D97300-CF3D-4505-BCF0-9E73BB1D1B3A}"/>
               </a:ext>
             </a:extLst>
           </p:cNvPr>
@@ -5349,10 +5599,10 @@
       </p:sp>
       <p:sp>
         <p:nvSpPr>
-          <p:cNvPr id="10" name="s6-takeaway">
-            <a:extLst xmlns:a="http://schemas.openxmlformats.org/drawingml/2006/main">
-              <a:ext uri="{FF2B5EF4-FFF2-40B4-BE49-F238E27FC236}">
-                <a16:creationId xmlns:a16="http://schemas.microsoft.com/office/drawing/2014/main" id="{F83E8FED-4763-4DBD-9797-A893A43BCC48}"/>
+          <p:cNvPr id="12" name="s6-takeaway">
+            <a:extLst xmlns:a="http://schemas.openxmlformats.org/drawingml/2006/main">
+              <a:ext uri="{FF2B5EF4-FFF2-40B4-BE49-F238E27FC236}">
+                <a16:creationId xmlns:a16="http://schemas.microsoft.com/office/drawing/2014/main" id="{F018C2EB-66E5-4C41-9CD8-D0CA967D0778}"/>
               </a:ext>
             </a:extLst>
           </p:cNvPr>
@@ -5400,7 +5650,7 @@
                 <a:ea typeface="PingFang SC"/>
                 <a:cs typeface="PingFang SC"/>
               </a:rPr>
-              <a:t>一只乌鸦的启示必须经过边界验证</a:t>
+              <a:t>乌鸦提醒我们：智能不等于训练规模</a:t>
             </a:r>
           </a:p>
         </p:txBody>
@@ -5408,7 +5658,7 @@
     </p:spTree>
     <p:extLst>
       <p:ext uri="{BB962C8B-B14F-4D97-AF65-F5344CB8AC3E}">
-        <p14:creationId xmlns:p14="http://schemas.microsoft.com/office/powerpoint/2010/main" val="1164443070"/>
+        <p14:creationId xmlns:p14="http://schemas.microsoft.com/office/powerpoint/2010/main" val="555498696"/>
       </p:ext>
     </p:extLst>
   </p:cSld>
@@ -5439,7 +5689,7 @@
           <p:cNvPr id="1" name="s7-rule">
             <a:extLst xmlns:a="http://schemas.openxmlformats.org/drawingml/2006/main">
               <a:ext uri="{FF2B5EF4-FFF2-40B4-BE49-F238E27FC236}">
-                <a16:creationId xmlns:a16="http://schemas.microsoft.com/office/drawing/2014/main" id="{DC3CC4D5-3D05-46E9-AEC9-F16217E5BAD4}"/>
+                <a16:creationId xmlns:a16="http://schemas.microsoft.com/office/drawing/2014/main" id="{CBCBB65E-1C8E-438B-8594-88548EBD4822}"/>
               </a:ext>
             </a:extLst>
           </p:cNvPr>
@@ -5472,7 +5722,7 @@
           <p:cNvPr id="2" name="s7-eyebrow">
             <a:extLst xmlns:a="http://schemas.openxmlformats.org/drawingml/2006/main">
               <a:ext uri="{FF2B5EF4-FFF2-40B4-BE49-F238E27FC236}">
-                <a16:creationId xmlns:a16="http://schemas.microsoft.com/office/drawing/2014/main" id="{4C350C9B-D144-4B2D-96FC-8C290DEF44F2}"/>
+                <a16:creationId xmlns:a16="http://schemas.microsoft.com/office/drawing/2014/main" id="{30503A87-1543-4D39-B450-4751DAEA2EA5}"/>
               </a:ext>
             </a:extLst>
           </p:cNvPr>
@@ -5530,7 +5780,7 @@
           <p:cNvPr id="3" name="s7-title">
             <a:extLst xmlns:a="http://schemas.openxmlformats.org/drawingml/2006/main">
               <a:ext uri="{FF2B5EF4-FFF2-40B4-BE49-F238E27FC236}">
-                <a16:creationId xmlns:a16="http://schemas.microsoft.com/office/drawing/2014/main" id="{67118A7D-2D18-4625-83E2-25EB3B421081}"/>
+                <a16:creationId xmlns:a16="http://schemas.microsoft.com/office/drawing/2014/main" id="{3B9B5EF2-4D40-4C81-B4B3-E40DF3E0889C}"/>
               </a:ext>
             </a:extLst>
           </p:cNvPr>
@@ -5578,7 +5828,7 @@
                 <a:ea typeface="PingFang SC"/>
                 <a:cs typeface="PingFang SC"/>
               </a:rPr>
-              <a:t>把方法落实为可验证的行动</a:t>
+              <a:t>AI 发展与社会影响：一次可验收练习</a:t>
             </a:r>
           </a:p>
         </p:txBody>
@@ -5588,7 +5838,7 @@
           <p:cNvPr id="4" name="s7-footer">
             <a:extLst xmlns:a="http://schemas.openxmlformats.org/drawingml/2006/main">
               <a:ext uri="{FF2B5EF4-FFF2-40B4-BE49-F238E27FC236}">
-                <a16:creationId xmlns:a16="http://schemas.microsoft.com/office/drawing/2014/main" id="{6EAE948D-A752-4F25-BCF5-8C238475B99E}"/>
+                <a16:creationId xmlns:a16="http://schemas.microsoft.com/office/drawing/2014/main" id="{DB73BC75-51E3-4CB1-B65E-E0A93411062B}"/>
               </a:ext>
             </a:extLst>
           </p:cNvPr>
@@ -5619,7 +5869,7 @@
           <p:cNvPr id="5" name="s7-identity">
             <a:extLst xmlns:a="http://schemas.openxmlformats.org/drawingml/2006/main">
               <a:ext uri="{FF2B5EF4-FFF2-40B4-BE49-F238E27FC236}">
-                <a16:creationId xmlns:a16="http://schemas.microsoft.com/office/drawing/2014/main" id="{6F7DDF21-60F9-4B04-9E2C-272B6371AEE0}"/>
+                <a16:creationId xmlns:a16="http://schemas.microsoft.com/office/drawing/2014/main" id="{FA8960A9-59C0-454C-8C43-D16069AB56F8}"/>
               </a:ext>
             </a:extLst>
           </p:cNvPr>
@@ -5677,7 +5927,7 @@
           <p:cNvPr id="6" name="practice-circle-0">
             <a:extLst xmlns:a="http://schemas.openxmlformats.org/drawingml/2006/main">
               <a:ext uri="{FF2B5EF4-FFF2-40B4-BE49-F238E27FC236}">
-                <a16:creationId xmlns:a16="http://schemas.microsoft.com/office/drawing/2014/main" id="{F37DD364-D423-4CF4-8E9E-D8A11A7A4458}"/>
+                <a16:creationId xmlns:a16="http://schemas.microsoft.com/office/drawing/2014/main" id="{4F7C4793-25C4-4CB9-99BB-E470F14ADA0B}"/>
               </a:ext>
             </a:extLst>
           </p:cNvPr>
@@ -5710,7 +5960,7 @@
           <p:cNvPr id="7" name="practice-number-0">
             <a:extLst xmlns:a="http://schemas.openxmlformats.org/drawingml/2006/main">
               <a:ext uri="{FF2B5EF4-FFF2-40B4-BE49-F238E27FC236}">
-                <a16:creationId xmlns:a16="http://schemas.microsoft.com/office/drawing/2014/main" id="{397F9D92-8C53-4BA9-AB25-12B86FB67BCE}"/>
+                <a16:creationId xmlns:a16="http://schemas.microsoft.com/office/drawing/2014/main" id="{5D1E25CF-9975-4F86-BC79-998B7603A113}"/>
               </a:ext>
             </a:extLst>
           </p:cNvPr>
@@ -5768,7 +6018,7 @@
           <p:cNvPr id="8" name="practice-item-0">
             <a:extLst xmlns:a="http://schemas.openxmlformats.org/drawingml/2006/main">
               <a:ext uri="{FF2B5EF4-FFF2-40B4-BE49-F238E27FC236}">
-                <a16:creationId xmlns:a16="http://schemas.microsoft.com/office/drawing/2014/main" id="{D54A016A-860B-4DDA-AFAB-A38FF0B059F5}"/>
+                <a16:creationId xmlns:a16="http://schemas.microsoft.com/office/drawing/2014/main" id="{BB7ACAFE-4591-4D90-97C9-67817661C677}"/>
               </a:ext>
             </a:extLst>
           </p:cNvPr>
@@ -5832,7 +6082,7 @@
           <p:cNvPr id="9" name="practice-connector-0">
             <a:extLst xmlns:a="http://schemas.openxmlformats.org/drawingml/2006/main">
               <a:ext uri="{FF2B5EF4-FFF2-40B4-BE49-F238E27FC236}">
-                <a16:creationId xmlns:a16="http://schemas.microsoft.com/office/drawing/2014/main" id="{F25DFD32-1E6C-4223-ABB3-DF0723CC6545}"/>
+                <a16:creationId xmlns:a16="http://schemas.microsoft.com/office/drawing/2014/main" id="{0A774FBF-6E4A-42BF-9F67-BCE0D68B63F7}"/>
               </a:ext>
             </a:extLst>
           </p:cNvPr>
@@ -5852,7 +6102,7 @@
           <a:noFill xmlns:a="http://schemas.openxmlformats.org/drawingml/2006/main"/>
           <a:ln xmlns:a="http://schemas.openxmlformats.org/drawingml/2006/main" w="28575">
             <a:solidFill>
-              <a:srgbClr val="D6A33A"/>
+              <a:srgbClr val="8A5A00"/>
             </a:solidFill>
             <a:prstDash val="solid"/>
           </a:ln>
@@ -5863,7 +6113,7 @@
           <p:cNvPr id="10" name="practice-circle-1">
             <a:extLst xmlns:a="http://schemas.openxmlformats.org/drawingml/2006/main">
               <a:ext uri="{FF2B5EF4-FFF2-40B4-BE49-F238E27FC236}">
-                <a16:creationId xmlns:a16="http://schemas.microsoft.com/office/drawing/2014/main" id="{81A3ADE3-0407-4525-9044-EC097722E982}"/>
+                <a16:creationId xmlns:a16="http://schemas.microsoft.com/office/drawing/2014/main" id="{E1AE3871-A280-4657-82A2-C24F2ED39892}"/>
               </a:ext>
             </a:extLst>
           </p:cNvPr>
@@ -5881,7 +6131,7 @@
             <a:avLst/>
           </a:prstGeom>
           <a:solidFill xmlns:a="http://schemas.openxmlformats.org/drawingml/2006/main">
-            <a:srgbClr val="D6A33A"/>
+            <a:srgbClr val="8A5A00"/>
           </a:solidFill>
           <a:ln xmlns:a="http://schemas.openxmlformats.org/drawingml/2006/main" w="28575">
             <a:solidFill>
@@ -5896,7 +6146,7 @@
           <p:cNvPr id="11" name="practice-number-1">
             <a:extLst xmlns:a="http://schemas.openxmlformats.org/drawingml/2006/main">
               <a:ext uri="{FF2B5EF4-FFF2-40B4-BE49-F238E27FC236}">
-                <a16:creationId xmlns:a16="http://schemas.microsoft.com/office/drawing/2014/main" id="{497CE188-594E-43A8-953B-6113057BBA33}"/>
+                <a16:creationId xmlns:a16="http://schemas.microsoft.com/office/drawing/2014/main" id="{AA93E880-8AD6-4799-A330-21CF293564CA}"/>
               </a:ext>
             </a:extLst>
           </p:cNvPr>
@@ -5954,7 +6204,7 @@
           <p:cNvPr id="12" name="practice-item-1">
             <a:extLst xmlns:a="http://schemas.openxmlformats.org/drawingml/2006/main">
               <a:ext uri="{FF2B5EF4-FFF2-40B4-BE49-F238E27FC236}">
-                <a16:creationId xmlns:a16="http://schemas.microsoft.com/office/drawing/2014/main" id="{A4B850B4-9793-4302-A23B-78C6ED73FB16}"/>
+                <a16:creationId xmlns:a16="http://schemas.microsoft.com/office/drawing/2014/main" id="{FD8A140E-C640-46BB-ACE2-CCC88A9E9399}"/>
               </a:ext>
             </a:extLst>
           </p:cNvPr>
@@ -5978,7 +6228,7 @@
           </a:solidFill>
           <a:ln xmlns:a="http://schemas.openxmlformats.org/drawingml/2006/main" w="19050">
             <a:solidFill>
-              <a:srgbClr val="D6A33A"/>
+              <a:srgbClr val="8A5A00"/>
             </a:solidFill>
             <a:prstDash val="solid"/>
           </a:ln>
@@ -6016,7 +6266,7 @@
     </p:spTree>
     <p:extLst>
       <p:ext uri="{BB962C8B-B14F-4D97-AF65-F5344CB8AC3E}">
-        <p14:creationId xmlns:p14="http://schemas.microsoft.com/office/powerpoint/2010/main" val="1154334049"/>
+        <p14:creationId xmlns:p14="http://schemas.microsoft.com/office/powerpoint/2010/main" val="532993336"/>
       </p:ext>
     </p:extLst>
   </p:cSld>
@@ -6047,7 +6297,7 @@
           <p:cNvPr id="1" name="s8-rule">
             <a:extLst xmlns:a="http://schemas.openxmlformats.org/drawingml/2006/main">
               <a:ext uri="{FF2B5EF4-FFF2-40B4-BE49-F238E27FC236}">
-                <a16:creationId xmlns:a16="http://schemas.microsoft.com/office/drawing/2014/main" id="{9E40EC56-190B-4C73-A7DC-CF120E78ED3E}"/>
+                <a16:creationId xmlns:a16="http://schemas.microsoft.com/office/drawing/2014/main" id="{057439FA-1BF0-435E-AC8A-AAEF0434E6D9}"/>
               </a:ext>
             </a:extLst>
           </p:cNvPr>
@@ -6080,7 +6330,7 @@
           <p:cNvPr id="2" name="s8-eyebrow">
             <a:extLst xmlns:a="http://schemas.openxmlformats.org/drawingml/2006/main">
               <a:ext uri="{FF2B5EF4-FFF2-40B4-BE49-F238E27FC236}">
-                <a16:creationId xmlns:a16="http://schemas.microsoft.com/office/drawing/2014/main" id="{39FDD187-2D8D-436B-BD81-B277504409E4}"/>
+                <a16:creationId xmlns:a16="http://schemas.microsoft.com/office/drawing/2014/main" id="{F9A354A2-B7AF-4793-AD2C-C140121F749B}"/>
               </a:ext>
             </a:extLst>
           </p:cNvPr>
@@ -6138,7 +6388,7 @@
           <p:cNvPr id="3" name="s8-title">
             <a:extLst xmlns:a="http://schemas.openxmlformats.org/drawingml/2006/main">
               <a:ext uri="{FF2B5EF4-FFF2-40B4-BE49-F238E27FC236}">
-                <a16:creationId xmlns:a16="http://schemas.microsoft.com/office/drawing/2014/main" id="{B9B06F72-13C2-42D9-B6F7-BC00DB834998}"/>
+                <a16:creationId xmlns:a16="http://schemas.microsoft.com/office/drawing/2014/main" id="{3A2A94EA-89D3-47E1-A893-A9F1F859FA41}"/>
               </a:ext>
             </a:extLst>
           </p:cNvPr>
@@ -6186,7 +6436,7 @@
                 <a:ea typeface="PingFang SC"/>
                 <a:cs typeface="PingFang SC"/>
               </a:rPr>
-              <a:t>带走三条可复用的判断原则</a:t>
+              <a:t>AI 发展与社会影响：判断时先抓住三点</a:t>
             </a:r>
           </a:p>
         </p:txBody>
@@ -6196,7 +6446,7 @@
           <p:cNvPr id="4" name="s8-footer">
             <a:extLst xmlns:a="http://schemas.openxmlformats.org/drawingml/2006/main">
               <a:ext uri="{FF2B5EF4-FFF2-40B4-BE49-F238E27FC236}">
-                <a16:creationId xmlns:a16="http://schemas.microsoft.com/office/drawing/2014/main" id="{BBCCA8DA-02F7-4B85-8F88-65C99BA5C28B}"/>
+                <a16:creationId xmlns:a16="http://schemas.microsoft.com/office/drawing/2014/main" id="{D83D1D2A-8AFA-4F39-9BDB-210E20CA0300}"/>
               </a:ext>
             </a:extLst>
           </p:cNvPr>
@@ -6227,7 +6477,7 @@
           <p:cNvPr id="5" name="s8-identity">
             <a:extLst xmlns:a="http://schemas.openxmlformats.org/drawingml/2006/main">
               <a:ext uri="{FF2B5EF4-FFF2-40B4-BE49-F238E27FC236}">
-                <a16:creationId xmlns:a16="http://schemas.microsoft.com/office/drawing/2014/main" id="{574A198E-8172-4D27-A28D-E2618BB7EB39}"/>
+                <a16:creationId xmlns:a16="http://schemas.microsoft.com/office/drawing/2014/main" id="{745913EC-54F9-4227-AC2C-A27DCED6AB9F}"/>
               </a:ext>
             </a:extLst>
           </p:cNvPr>
@@ -6285,7 +6535,7 @@
           <p:cNvPr id="6" name="recap-circle-0">
             <a:extLst xmlns:a="http://schemas.openxmlformats.org/drawingml/2006/main">
               <a:ext uri="{FF2B5EF4-FFF2-40B4-BE49-F238E27FC236}">
-                <a16:creationId xmlns:a16="http://schemas.microsoft.com/office/drawing/2014/main" id="{F187CDAB-C2A5-45A0-9A08-15E8640DBCC1}"/>
+                <a16:creationId xmlns:a16="http://schemas.microsoft.com/office/drawing/2014/main" id="{2A20EB8D-6C02-4384-9F70-38B0700EF420}"/>
               </a:ext>
             </a:extLst>
           </p:cNvPr>
@@ -6318,7 +6568,7 @@
           <p:cNvPr id="7" name="recap-number-0">
             <a:extLst xmlns:a="http://schemas.openxmlformats.org/drawingml/2006/main">
               <a:ext uri="{FF2B5EF4-FFF2-40B4-BE49-F238E27FC236}">
-                <a16:creationId xmlns:a16="http://schemas.microsoft.com/office/drawing/2014/main" id="{7B6C93F8-6E81-4302-B32A-65ABDC207FB4}"/>
+                <a16:creationId xmlns:a16="http://schemas.microsoft.com/office/drawing/2014/main" id="{4838160B-ACA7-4D6B-8D83-F0CB4E189B5F}"/>
               </a:ext>
             </a:extLst>
           </p:cNvPr>
@@ -6376,7 +6626,7 @@
           <p:cNvPr id="8" name="recap-item-0">
             <a:extLst xmlns:a="http://schemas.openxmlformats.org/drawingml/2006/main">
               <a:ext uri="{FF2B5EF4-FFF2-40B4-BE49-F238E27FC236}">
-                <a16:creationId xmlns:a16="http://schemas.microsoft.com/office/drawing/2014/main" id="{E1A23B9E-3985-4897-B821-601E488A0B38}"/>
+                <a16:creationId xmlns:a16="http://schemas.microsoft.com/office/drawing/2014/main" id="{CBECAD82-AF1F-41A3-AC8E-B34F8CBF2ABC}"/>
               </a:ext>
             </a:extLst>
           </p:cNvPr>
@@ -6430,7 +6680,7 @@
                 <a:ea typeface="PingFang SC"/>
                 <a:cs typeface="PingFang SC"/>
               </a:rPr>
-              <a:t>早期人工智能强调把人的知识写成规则</a:t>
+              <a:t>AI 热潮与低谷由能力、资源和预期共同塑造</a:t>
             </a:r>
           </a:p>
         </p:txBody>
@@ -6440,7 +6690,7 @@
           <p:cNvPr id="9" name="recap-connector-0">
             <a:extLst xmlns:a="http://schemas.openxmlformats.org/drawingml/2006/main">
               <a:ext uri="{FF2B5EF4-FFF2-40B4-BE49-F238E27FC236}">
-                <a16:creationId xmlns:a16="http://schemas.microsoft.com/office/drawing/2014/main" id="{0184F044-5BB8-4D3F-B1C2-6617C669D68B}"/>
+                <a16:creationId xmlns:a16="http://schemas.microsoft.com/office/drawing/2014/main" id="{B96598DF-DDD1-486B-8C25-B0993602ACDA}"/>
               </a:ext>
             </a:extLst>
           </p:cNvPr>
@@ -6460,7 +6710,7 @@
           <a:noFill xmlns:a="http://schemas.openxmlformats.org/drawingml/2006/main"/>
           <a:ln xmlns:a="http://schemas.openxmlformats.org/drawingml/2006/main" w="28575">
             <a:solidFill>
-              <a:srgbClr val="D6A33A"/>
+              <a:srgbClr val="8A5A00"/>
             </a:solidFill>
             <a:prstDash val="solid"/>
           </a:ln>
@@ -6471,7 +6721,7 @@
           <p:cNvPr id="10" name="recap-circle-1">
             <a:extLst xmlns:a="http://schemas.openxmlformats.org/drawingml/2006/main">
               <a:ext uri="{FF2B5EF4-FFF2-40B4-BE49-F238E27FC236}">
-                <a16:creationId xmlns:a16="http://schemas.microsoft.com/office/drawing/2014/main" id="{3AFFB4C6-6353-4EA8-95D4-5B6C6174B90E}"/>
+                <a16:creationId xmlns:a16="http://schemas.microsoft.com/office/drawing/2014/main" id="{28CCA344-2E7F-4362-BB99-6994D54F94BD}"/>
               </a:ext>
             </a:extLst>
           </p:cNvPr>
@@ -6504,7 +6754,7 @@
           <p:cNvPr id="11" name="recap-number-1">
             <a:extLst xmlns:a="http://schemas.openxmlformats.org/drawingml/2006/main">
               <a:ext uri="{FF2B5EF4-FFF2-40B4-BE49-F238E27FC236}">
-                <a16:creationId xmlns:a16="http://schemas.microsoft.com/office/drawing/2014/main" id="{9F17F162-38C6-48D7-8D6A-9905CD7E04F2}"/>
+                <a16:creationId xmlns:a16="http://schemas.microsoft.com/office/drawing/2014/main" id="{F932083A-07EE-4ECE-9567-D06AC21B72EC}"/>
               </a:ext>
             </a:extLst>
           </p:cNvPr>
@@ -6562,7 +6812,7 @@
           <p:cNvPr id="12" name="recap-item-1">
             <a:extLst xmlns:a="http://schemas.openxmlformats.org/drawingml/2006/main">
               <a:ext uri="{FF2B5EF4-FFF2-40B4-BE49-F238E27FC236}">
-                <a16:creationId xmlns:a16="http://schemas.microsoft.com/office/drawing/2014/main" id="{F00AD1E1-6F47-4EBC-84F3-1A673110B9D6}"/>
+                <a16:creationId xmlns:a16="http://schemas.microsoft.com/office/drawing/2014/main" id="{695561D2-0D01-4AF3-9F97-70BF2D65B739}"/>
               </a:ext>
             </a:extLst>
           </p:cNvPr>
@@ -6626,7 +6876,7 @@
           <p:cNvPr id="13" name="recap-connector-1">
             <a:extLst xmlns:a="http://schemas.openxmlformats.org/drawingml/2006/main">
               <a:ext uri="{FF2B5EF4-FFF2-40B4-BE49-F238E27FC236}">
-                <a16:creationId xmlns:a16="http://schemas.microsoft.com/office/drawing/2014/main" id="{ACB58622-95F6-4699-AB91-78F538C42F39}"/>
+                <a16:creationId xmlns:a16="http://schemas.microsoft.com/office/drawing/2014/main" id="{C7052DAA-16F2-41CC-B281-9D753FD768A6}"/>
               </a:ext>
             </a:extLst>
           </p:cNvPr>
@@ -6646,7 +6896,7 @@
           <a:noFill xmlns:a="http://schemas.openxmlformats.org/drawingml/2006/main"/>
           <a:ln xmlns:a="http://schemas.openxmlformats.org/drawingml/2006/main" w="28575">
             <a:solidFill>
-              <a:srgbClr val="D6A33A"/>
+              <a:srgbClr val="8A5A00"/>
             </a:solidFill>
             <a:prstDash val="solid"/>
           </a:ln>
@@ -6657,7 +6907,7 @@
           <p:cNvPr id="14" name="recap-circle-2">
             <a:extLst xmlns:a="http://schemas.openxmlformats.org/drawingml/2006/main">
               <a:ext uri="{FF2B5EF4-FFF2-40B4-BE49-F238E27FC236}">
-                <a16:creationId xmlns:a16="http://schemas.microsoft.com/office/drawing/2014/main" id="{5810977C-42A6-44B0-923E-9B9CFA572396}"/>
+                <a16:creationId xmlns:a16="http://schemas.microsoft.com/office/drawing/2014/main" id="{6C33C299-426A-42B0-9E3B-CC43C355EF27}"/>
               </a:ext>
             </a:extLst>
           </p:cNvPr>
@@ -6675,7 +6925,7 @@
             <a:avLst/>
           </a:prstGeom>
           <a:solidFill xmlns:a="http://schemas.openxmlformats.org/drawingml/2006/main">
-            <a:srgbClr val="D6A33A"/>
+            <a:srgbClr val="8A5A00"/>
           </a:solidFill>
           <a:ln xmlns:a="http://schemas.openxmlformats.org/drawingml/2006/main" w="28575">
             <a:solidFill>
@@ -6690,7 +6940,7 @@
           <p:cNvPr id="15" name="recap-number-2">
             <a:extLst xmlns:a="http://schemas.openxmlformats.org/drawingml/2006/main">
               <a:ext uri="{FF2B5EF4-FFF2-40B4-BE49-F238E27FC236}">
-                <a16:creationId xmlns:a16="http://schemas.microsoft.com/office/drawing/2014/main" id="{0C215B30-3B0F-4DBD-8512-7A84CB40D2F7}"/>
+                <a16:creationId xmlns:a16="http://schemas.microsoft.com/office/drawing/2014/main" id="{5F48A1CF-D89F-4290-B3E7-6082F1E7D1CD}"/>
               </a:ext>
             </a:extLst>
           </p:cNvPr>
@@ -6748,7 +6998,7 @@
           <p:cNvPr id="16" name="recap-item-2">
             <a:extLst xmlns:a="http://schemas.openxmlformats.org/drawingml/2006/main">
               <a:ext uri="{FF2B5EF4-FFF2-40B4-BE49-F238E27FC236}">
-                <a16:creationId xmlns:a16="http://schemas.microsoft.com/office/drawing/2014/main" id="{825C0C8E-7F48-4C99-9F71-88619E87D61C}"/>
+                <a16:creationId xmlns:a16="http://schemas.microsoft.com/office/drawing/2014/main" id="{5FA4B8D1-6C21-4AE6-8A7F-8DD4E77104EA}"/>
               </a:ext>
             </a:extLst>
           </p:cNvPr>
@@ -6772,7 +7022,7 @@
           </a:solidFill>
           <a:ln xmlns:a="http://schemas.openxmlformats.org/drawingml/2006/main" w="19050">
             <a:solidFill>
-              <a:srgbClr val="D6A33A"/>
+              <a:srgbClr val="8A5A00"/>
             </a:solidFill>
             <a:prstDash val="solid"/>
           </a:ln>
@@ -6810,7 +7060,7 @@
     </p:spTree>
     <p:extLst>
       <p:ext uri="{BB962C8B-B14F-4D97-AF65-F5344CB8AC3E}">
-        <p14:creationId xmlns:p14="http://schemas.microsoft.com/office/powerpoint/2010/main" val="1540982324"/>
+        <p14:creationId xmlns:p14="http://schemas.microsoft.com/office/powerpoint/2010/main" val="822947484"/>
       </p:ext>
     </p:extLst>
   </p:cSld>
@@ -6841,7 +7091,7 @@
           <p:cNvPr id="1" name="s9-rule">
             <a:extLst xmlns:a="http://schemas.openxmlformats.org/drawingml/2006/main">
               <a:ext uri="{FF2B5EF4-FFF2-40B4-BE49-F238E27FC236}">
-                <a16:creationId xmlns:a16="http://schemas.microsoft.com/office/drawing/2014/main" id="{67C8B01B-F930-4A90-8DCE-DC3B23B4DA49}"/>
+                <a16:creationId xmlns:a16="http://schemas.microsoft.com/office/drawing/2014/main" id="{06D1C87D-D5C8-40ED-AA95-7003A04C1169}"/>
               </a:ext>
             </a:extLst>
           </p:cNvPr>
@@ -6874,7 +7124,7 @@
           <p:cNvPr id="2" name="s9-eyebrow">
             <a:extLst xmlns:a="http://schemas.openxmlformats.org/drawingml/2006/main">
               <a:ext uri="{FF2B5EF4-FFF2-40B4-BE49-F238E27FC236}">
-                <a16:creationId xmlns:a16="http://schemas.microsoft.com/office/drawing/2014/main" id="{70189C4F-3579-4E1F-8141-FB0B26A88BD5}"/>
+                <a16:creationId xmlns:a16="http://schemas.microsoft.com/office/drawing/2014/main" id="{61BAC0EE-5FBE-47F3-9E3E-0EB6E1AD9EE3}"/>
               </a:ext>
             </a:extLst>
           </p:cNvPr>
@@ -6932,7 +7182,7 @@
           <p:cNvPr id="3" name="s9-title">
             <a:extLst xmlns:a="http://schemas.openxmlformats.org/drawingml/2006/main">
               <a:ext uri="{FF2B5EF4-FFF2-40B4-BE49-F238E27FC236}">
-                <a16:creationId xmlns:a16="http://schemas.microsoft.com/office/drawing/2014/main" id="{3E373516-102B-45F0-91AC-B92496C19762}"/>
+                <a16:creationId xmlns:a16="http://schemas.microsoft.com/office/drawing/2014/main" id="{D5F3E8A1-FAFF-4664-9F75-09D9FDB641E7}"/>
               </a:ext>
             </a:extLst>
           </p:cNvPr>
@@ -6980,7 +7230,7 @@
                 <a:ea typeface="PingFang SC"/>
                 <a:cs typeface="PingFang SC"/>
               </a:rPr>
-              <a:t>从公开重制课件回到可核对的学习资料</a:t>
+              <a:t>AI 发展与社会影响：依据、边界与延伸</a:t>
             </a:r>
           </a:p>
         </p:txBody>
@@ -6990,7 +7240,7 @@
           <p:cNvPr id="4" name="s9-footer">
             <a:extLst xmlns:a="http://schemas.openxmlformats.org/drawingml/2006/main">
               <a:ext uri="{FF2B5EF4-FFF2-40B4-BE49-F238E27FC236}">
-                <a16:creationId xmlns:a16="http://schemas.microsoft.com/office/drawing/2014/main" id="{05C1B0DB-A8D4-4CDE-B8B4-3F09D222A4A4}"/>
+                <a16:creationId xmlns:a16="http://schemas.microsoft.com/office/drawing/2014/main" id="{F9B52022-C499-4984-921B-6D56DB6F76B5}"/>
               </a:ext>
             </a:extLst>
           </p:cNvPr>
@@ -7021,7 +7271,7 @@
           <p:cNvPr id="5" name="s9-identity">
             <a:extLst xmlns:a="http://schemas.openxmlformats.org/drawingml/2006/main">
               <a:ext uri="{FF2B5EF4-FFF2-40B4-BE49-F238E27FC236}">
-                <a16:creationId xmlns:a16="http://schemas.microsoft.com/office/drawing/2014/main" id="{F3D75690-6D00-4439-9C88-5DE3F11818B8}"/>
+                <a16:creationId xmlns:a16="http://schemas.microsoft.com/office/drawing/2014/main" id="{F8E9B7FF-15BB-4216-BDE4-05BFBB153E4D}"/>
               </a:ext>
             </a:extLst>
           </p:cNvPr>
@@ -7079,7 +7329,7 @@
           <p:cNvPr id="6" name="source-0">
             <a:extLst xmlns:a="http://schemas.openxmlformats.org/drawingml/2006/main">
               <a:ext uri="{FF2B5EF4-FFF2-40B4-BE49-F238E27FC236}">
-                <a16:creationId xmlns:a16="http://schemas.microsoft.com/office/drawing/2014/main" id="{B3087C35-7B21-42B6-8CC3-E1A81A24705D}"/>
+                <a16:creationId xmlns:a16="http://schemas.microsoft.com/office/drawing/2014/main" id="{4B62DE9C-2BC0-4D51-B3CA-8077D6677917}"/>
               </a:ext>
             </a:extLst>
           </p:cNvPr>
@@ -7103,7 +7353,7 @@
           </a:solidFill>
           <a:ln xmlns:a="http://schemas.openxmlformats.org/drawingml/2006/main" w="9525">
             <a:solidFill>
-              <a:srgbClr val="D6A33A"/>
+              <a:srgbClr val="8A5A00"/>
             </a:solidFill>
             <a:prstDash val="solid"/>
           </a:ln>
@@ -7143,7 +7393,7 @@
           <p:cNvPr id="7" name="source-1">
             <a:extLst xmlns:a="http://schemas.openxmlformats.org/drawingml/2006/main">
               <a:ext uri="{FF2B5EF4-FFF2-40B4-BE49-F238E27FC236}">
-                <a16:creationId xmlns:a16="http://schemas.microsoft.com/office/drawing/2014/main" id="{475BDD49-6C4F-44F8-965F-6B8734647FF1}"/>
+                <a16:creationId xmlns:a16="http://schemas.microsoft.com/office/drawing/2014/main" id="{69C52EEA-0140-43A5-A574-247F4ED9D4D3}"/>
               </a:ext>
             </a:extLst>
           </p:cNvPr>
@@ -7174,7 +7424,7 @@
         </p:spPr>
         <p:txBody>
           <a:bodyPr xmlns:a="http://schemas.openxmlformats.org/drawingml/2006/main" lIns="152400" tIns="133350" rIns="152400" bIns="133350" anchor="ctr">
-            <a:normAutofit fontScale="87377"/>
+            <a:normAutofit fontScale="70162"/>
           </a:bodyPr>
           <a:lstStyle xmlns:a="http://schemas.openxmlformats.org/drawingml/2006/main"/>
           <a:p xmlns:a="http://schemas.openxmlformats.org/drawingml/2006/main">
@@ -7197,17 +7447,209 @@
                 <a:ea typeface="PingFang SC"/>
                 <a:cs typeface="PingFang SC"/>
               </a:rPr>
-              <a:t>02  建议把本节的历史阶段表与身边一个 AI 产品对照：它主要依赖规则、学习、生成，还是行动闭环？</a:t>
+              <a:t>02  英国议会《AI in the UK》历史章节：用于核对达特茅斯起点、专家系统与两次 AI 寒冬；历史低谷不能简单归因于一次报告或单一事件。（核对日期：2026-07-12）</a:t>
             </a:r>
           </a:p>
         </p:txBody>
       </p:sp>
       <p:sp>
         <p:nvSpPr>
-          <p:cNvPr id="8" name="s9-takeaway-rule">
-            <a:extLst xmlns:a="http://schemas.openxmlformats.org/drawingml/2006/main">
-              <a:ext uri="{FF2B5EF4-FFF2-40B4-BE49-F238E27FC236}">
-                <a16:creationId xmlns:a16="http://schemas.microsoft.com/office/drawing/2014/main" id="{DFD4DD90-BFFD-4E49-9208-1D46DC9925F4}"/>
+          <p:cNvPr id="8" name="source-2">
+            <a:extLst xmlns:a="http://schemas.openxmlformats.org/drawingml/2006/main">
+              <a:ext uri="{FF2B5EF4-FFF2-40B4-BE49-F238E27FC236}">
+                <a16:creationId xmlns:a16="http://schemas.microsoft.com/office/drawing/2014/main" id="{001ED44F-66C7-40FB-AB40-6201C101565A}"/>
+              </a:ext>
+            </a:extLst>
+          </p:cNvPr>
+          <p:cNvSpPr>
+            <a:spLocks xmlns:a="http://schemas.openxmlformats.org/drawingml/2006/main" noGrp="1"/>
+          </p:cNvSpPr>
+          <p:nvPr/>
+        </p:nvSpPr>
+        <p:spPr>
+          <a:xfrm xmlns:a="http://schemas.openxmlformats.org/drawingml/2006/main">
+            <a:off x="914400" y="3314700"/>
+            <a:ext cx="10363200" cy="533400"/>
+          </a:xfrm>
+          <a:prstGeom xmlns:a="http://schemas.openxmlformats.org/drawingml/2006/main" prst="roundRect">
+            <a:avLst>
+              <a:gd name="adj" fmla="val 21429"/>
+            </a:avLst>
+          </a:prstGeom>
+          <a:solidFill xmlns:a="http://schemas.openxmlformats.org/drawingml/2006/main">
+            <a:srgbClr val="FFFFFF"/>
+          </a:solidFill>
+          <a:ln xmlns:a="http://schemas.openxmlformats.org/drawingml/2006/main" w="9525">
+            <a:solidFill>
+              <a:srgbClr val="D8E0E8"/>
+            </a:solidFill>
+            <a:prstDash val="solid"/>
+          </a:ln>
+        </p:spPr>
+        <p:txBody>
+          <a:bodyPr xmlns:a="http://schemas.openxmlformats.org/drawingml/2006/main" lIns="152400" tIns="133350" rIns="152400" bIns="133350" anchor="ctr">
+            <a:normAutofit fontScale="87377"/>
+          </a:bodyPr>
+          <a:lstStyle xmlns:a="http://schemas.openxmlformats.org/drawingml/2006/main"/>
+          <a:p xmlns:a="http://schemas.openxmlformats.org/drawingml/2006/main">
+            <a:pPr algn="l">
+              <a:defRPr sz="1500" b="0">
+                <a:solidFill>
+                  <a:srgbClr val="10233F"/>
+                </a:solidFill>
+                <a:latin typeface="PingFang SC"/>
+                <a:ea typeface="PingFang SC"/>
+                <a:cs typeface="PingFang SC"/>
+              </a:defRPr>
+            </a:pPr>
+            <a:r>
+              <a:rPr sz="1500" b="0">
+                <a:solidFill>
+                  <a:srgbClr val="10233F"/>
+                </a:solidFill>
+                <a:latin typeface="PingFang SC"/>
+                <a:ea typeface="PingFang SC"/>
+                <a:cs typeface="PingFang SC"/>
+              </a:rPr>
+              <a:t>03  AlexNet 原论文：理解数据、GPU 与深层卷积网络共同推动的视觉转折。（核对日期：2026-07-12）</a:t>
+            </a:r>
+          </a:p>
+        </p:txBody>
+      </p:sp>
+      <p:sp>
+        <p:nvSpPr>
+          <p:cNvPr id="9" name="source-3">
+            <a:extLst xmlns:a="http://schemas.openxmlformats.org/drawingml/2006/main">
+              <a:ext uri="{FF2B5EF4-FFF2-40B4-BE49-F238E27FC236}">
+                <a16:creationId xmlns:a16="http://schemas.microsoft.com/office/drawing/2014/main" id="{B89A7138-176E-4603-8545-933CBEB1E4D5}"/>
+              </a:ext>
+            </a:extLst>
+          </p:cNvPr>
+          <p:cNvSpPr>
+            <a:spLocks xmlns:a="http://schemas.openxmlformats.org/drawingml/2006/main" noGrp="1"/>
+          </p:cNvSpPr>
+          <p:nvPr/>
+        </p:nvSpPr>
+        <p:spPr>
+          <a:xfrm xmlns:a="http://schemas.openxmlformats.org/drawingml/2006/main">
+            <a:off x="914400" y="4000500"/>
+            <a:ext cx="10363200" cy="533400"/>
+          </a:xfrm>
+          <a:prstGeom xmlns:a="http://schemas.openxmlformats.org/drawingml/2006/main" prst="roundRect">
+            <a:avLst>
+              <a:gd name="adj" fmla="val 21429"/>
+            </a:avLst>
+          </a:prstGeom>
+          <a:solidFill xmlns:a="http://schemas.openxmlformats.org/drawingml/2006/main">
+            <a:srgbClr val="FFFFFF"/>
+          </a:solidFill>
+          <a:ln xmlns:a="http://schemas.openxmlformats.org/drawingml/2006/main" w="9525">
+            <a:solidFill>
+              <a:srgbClr val="D8E0E8"/>
+            </a:solidFill>
+            <a:prstDash val="solid"/>
+          </a:ln>
+        </p:spPr>
+        <p:txBody>
+          <a:bodyPr xmlns:a="http://schemas.openxmlformats.org/drawingml/2006/main" lIns="152400" tIns="133350" rIns="152400" bIns="133350" anchor="ctr">
+            <a:normAutofit fontScale="82812"/>
+          </a:bodyPr>
+          <a:lstStyle xmlns:a="http://schemas.openxmlformats.org/drawingml/2006/main"/>
+          <a:p xmlns:a="http://schemas.openxmlformats.org/drawingml/2006/main">
+            <a:pPr algn="l">
+              <a:defRPr sz="1500" b="0">
+                <a:solidFill>
+                  <a:srgbClr val="10233F"/>
+                </a:solidFill>
+                <a:latin typeface="PingFang SC"/>
+                <a:ea typeface="PingFang SC"/>
+                <a:cs typeface="PingFang SC"/>
+              </a:defRPr>
+            </a:pPr>
+            <a:r>
+              <a:rPr sz="1500" b="0">
+                <a:solidFill>
+                  <a:srgbClr val="10233F"/>
+                </a:solidFill>
+                <a:latin typeface="PingFang SC"/>
+                <a:ea typeface="PingFang SC"/>
+                <a:cs typeface="PingFang SC"/>
+              </a:rPr>
+              <a:t>04  Attention Is All You Need：Transformer 原论文；证据来自机器翻译任务，不能直接外推为大模型全部能力。（核对日期：2026-07-12）</a:t>
+            </a:r>
+          </a:p>
+        </p:txBody>
+      </p:sp>
+      <p:sp>
+        <p:nvSpPr>
+          <p:cNvPr id="10" name="source-4">
+            <a:extLst xmlns:a="http://schemas.openxmlformats.org/drawingml/2006/main">
+              <a:ext uri="{FF2B5EF4-FFF2-40B4-BE49-F238E27FC236}">
+                <a16:creationId xmlns:a16="http://schemas.microsoft.com/office/drawing/2014/main" id="{455349A8-4EA6-471A-B16A-5814AFC893F9}"/>
+              </a:ext>
+            </a:extLst>
+          </p:cNvPr>
+          <p:cNvSpPr>
+            <a:spLocks xmlns:a="http://schemas.openxmlformats.org/drawingml/2006/main" noGrp="1"/>
+          </p:cNvSpPr>
+          <p:nvPr/>
+        </p:nvSpPr>
+        <p:spPr>
+          <a:xfrm xmlns:a="http://schemas.openxmlformats.org/drawingml/2006/main">
+            <a:off x="914400" y="4686300"/>
+            <a:ext cx="10363200" cy="533400"/>
+          </a:xfrm>
+          <a:prstGeom xmlns:a="http://schemas.openxmlformats.org/drawingml/2006/main" prst="roundRect">
+            <a:avLst>
+              <a:gd name="adj" fmla="val 21429"/>
+            </a:avLst>
+          </a:prstGeom>
+          <a:solidFill xmlns:a="http://schemas.openxmlformats.org/drawingml/2006/main">
+            <a:srgbClr val="FFFFFF"/>
+          </a:solidFill>
+          <a:ln xmlns:a="http://schemas.openxmlformats.org/drawingml/2006/main" w="9525">
+            <a:solidFill>
+              <a:srgbClr val="D8E0E8"/>
+            </a:solidFill>
+            <a:prstDash val="solid"/>
+          </a:ln>
+        </p:spPr>
+        <p:txBody>
+          <a:bodyPr xmlns:a="http://schemas.openxmlformats.org/drawingml/2006/main" lIns="152400" tIns="133350" rIns="152400" bIns="133350" anchor="ctr">
+            <a:normAutofit fontScale="87377"/>
+          </a:bodyPr>
+          <a:lstStyle xmlns:a="http://schemas.openxmlformats.org/drawingml/2006/main"/>
+          <a:p xmlns:a="http://schemas.openxmlformats.org/drawingml/2006/main">
+            <a:pPr algn="l">
+              <a:defRPr sz="1500" b="0">
+                <a:solidFill>
+                  <a:srgbClr val="10233F"/>
+                </a:solidFill>
+                <a:latin typeface="PingFang SC"/>
+                <a:ea typeface="PingFang SC"/>
+                <a:cs typeface="PingFang SC"/>
+              </a:defRPr>
+            </a:pPr>
+            <a:r>
+              <a:rPr sz="1500" b="0">
+                <a:solidFill>
+                  <a:srgbClr val="10233F"/>
+                </a:solidFill>
+                <a:latin typeface="PingFang SC"/>
+                <a:ea typeface="PingFang SC"/>
+                <a:cs typeface="PingFang SC"/>
+              </a:rPr>
+              <a:t>05  OpenAI：Introducing ChatGPT：核对 2022 年对话式研究预览的产品起点与指令跟随路线。（核对日期：2026-07-12）</a:t>
+            </a:r>
+          </a:p>
+        </p:txBody>
+      </p:sp>
+      <p:sp>
+        <p:nvSpPr>
+          <p:cNvPr id="11" name="s9-takeaway-rule">
+            <a:extLst xmlns:a="http://schemas.openxmlformats.org/drawingml/2006/main">
+              <a:ext uri="{FF2B5EF4-FFF2-40B4-BE49-F238E27FC236}">
+                <a16:creationId xmlns:a16="http://schemas.microsoft.com/office/drawing/2014/main" id="{7840200C-655D-4319-B04F-2C73E833429E}"/>
               </a:ext>
             </a:extLst>
           </p:cNvPr>
@@ -7237,10 +7679,10 @@
       </p:sp>
       <p:sp>
         <p:nvSpPr>
-          <p:cNvPr id="9" name="s9-takeaway">
-            <a:extLst xmlns:a="http://schemas.openxmlformats.org/drawingml/2006/main">
-              <a:ext uri="{FF2B5EF4-FFF2-40B4-BE49-F238E27FC236}">
-                <a16:creationId xmlns:a16="http://schemas.microsoft.com/office/drawing/2014/main" id="{AD685325-1CC3-42A0-A805-EA05F9BFA937}"/>
+          <p:cNvPr id="12" name="s9-takeaway">
+            <a:extLst xmlns:a="http://schemas.openxmlformats.org/drawingml/2006/main">
+              <a:ext uri="{FF2B5EF4-FFF2-40B4-BE49-F238E27FC236}">
+                <a16:creationId xmlns:a16="http://schemas.microsoft.com/office/drawing/2014/main" id="{35F1E2FE-CB45-4BB6-9DDC-9DBCB6D86531}"/>
               </a:ext>
             </a:extLst>
           </p:cNvPr>
@@ -7296,7 +7738,7 @@
     </p:spTree>
     <p:extLst>
       <p:ext uri="{BB962C8B-B14F-4D97-AF65-F5344CB8AC3E}">
-        <p14:creationId xmlns:p14="http://schemas.microsoft.com/office/powerpoint/2010/main" val="814140493"/>
+        <p14:creationId xmlns:p14="http://schemas.microsoft.com/office/powerpoint/2010/main" val="246934524"/>
       </p:ext>
     </p:extLst>
   </p:cSld>

--- a/docs/public/course-assets/course-pptx/ov-002.pptx
+++ b/docs/public/course-assets/course-pptx/ov-002.pptx
@@ -2,21 +2,21 @@
 <file path=ppt/presentation.xml><?xml version="1.0" encoding="utf-8"?>
 <p:presentation xmlns:p="http://schemas.openxmlformats.org/presentationml/2006/main">
   <p:sldMasterIdLst>
-    <p:sldMasterId xmlns:r="http://schemas.openxmlformats.org/officeDocument/2006/relationships" id="2147483648" r:id="Rabb5db8293e44502"/>
+    <p:sldMasterId xmlns:r="http://schemas.openxmlformats.org/officeDocument/2006/relationships" id="2147483648" r:id="R7b118443f1cf4bf6"/>
   </p:sldMasterIdLst>
   <p:notesMasterIdLst>
-    <p:notesMasterId xmlns:r="http://schemas.openxmlformats.org/officeDocument/2006/relationships" r:id="R431b543241244d22"/>
+    <p:notesMasterId xmlns:r="http://schemas.openxmlformats.org/officeDocument/2006/relationships" r:id="R02617e6fdc5e4cec"/>
   </p:notesMasterIdLst>
   <p:sldIdLst>
-    <p:sldId xmlns:r="http://schemas.openxmlformats.org/officeDocument/2006/relationships" id="256" r:id="R4a94baab4b4541e0"/>
-    <p:sldId xmlns:r="http://schemas.openxmlformats.org/officeDocument/2006/relationships" id="257" r:id="R03783709cc7f42b0"/>
-    <p:sldId xmlns:r="http://schemas.openxmlformats.org/officeDocument/2006/relationships" id="258" r:id="R7f0b13e8fa9246cf"/>
-    <p:sldId xmlns:r="http://schemas.openxmlformats.org/officeDocument/2006/relationships" id="259" r:id="R647e04ce93a74784"/>
-    <p:sldId xmlns:r="http://schemas.openxmlformats.org/officeDocument/2006/relationships" id="260" r:id="Ree0453c6a025432c"/>
-    <p:sldId xmlns:r="http://schemas.openxmlformats.org/officeDocument/2006/relationships" id="261" r:id="R79b5301a271a49ad"/>
-    <p:sldId xmlns:r="http://schemas.openxmlformats.org/officeDocument/2006/relationships" id="262" r:id="R9052e7fe43ac46d1"/>
-    <p:sldId xmlns:r="http://schemas.openxmlformats.org/officeDocument/2006/relationships" id="263" r:id="R8ba86eab02fa4272"/>
-    <p:sldId xmlns:r="http://schemas.openxmlformats.org/officeDocument/2006/relationships" id="264" r:id="R2ba7d7a83ed544ae"/>
+    <p:sldId xmlns:r="http://schemas.openxmlformats.org/officeDocument/2006/relationships" id="256" r:id="R29faa152bf554e25"/>
+    <p:sldId xmlns:r="http://schemas.openxmlformats.org/officeDocument/2006/relationships" id="257" r:id="R9b7d2b7bfe204b15"/>
+    <p:sldId xmlns:r="http://schemas.openxmlformats.org/officeDocument/2006/relationships" id="258" r:id="R84440a58a64d4f84"/>
+    <p:sldId xmlns:r="http://schemas.openxmlformats.org/officeDocument/2006/relationships" id="259" r:id="R3ad69f0eeaf84073"/>
+    <p:sldId xmlns:r="http://schemas.openxmlformats.org/officeDocument/2006/relationships" id="260" r:id="Rb85b0ccdae2747ba"/>
+    <p:sldId xmlns:r="http://schemas.openxmlformats.org/officeDocument/2006/relationships" id="261" r:id="R1ff08110ffe6472b"/>
+    <p:sldId xmlns:r="http://schemas.openxmlformats.org/officeDocument/2006/relationships" id="262" r:id="R0f1310a479ab4bb4"/>
+    <p:sldId xmlns:r="http://schemas.openxmlformats.org/officeDocument/2006/relationships" id="263" r:id="Rea1d52b666394104"/>
+    <p:sldId xmlns:r="http://schemas.openxmlformats.org/officeDocument/2006/relationships" id="264" r:id="Rb23d930b56c84cec"/>
   </p:sldIdLst>
   <p:sldSz cx="12192000" cy="6858000"/>
   <p:notesSz cx="6858000" cy="9144000"/>
@@ -1137,7 +1137,7 @@
   </p:cSld>
   <p:clrMap bg1="lt1" tx1="dk1" bg2="lt2" tx2="dk2" accent1="accent1" accent2="accent2" accent3="accent3" accent4="accent4" accent5="accent5" accent6="accent6" hlink="hlink" folHlink="folHlink"/>
   <p:sldLayoutIdLst>
-    <p:sldLayoutId xmlns:r="http://schemas.openxmlformats.org/officeDocument/2006/relationships" id="2147483649" r:id="R3981fdd5860b40b0"/>
+    <p:sldLayoutId xmlns:r="http://schemas.openxmlformats.org/officeDocument/2006/relationships" id="2147483649" r:id="Rc452a9adfe2548aa"/>
   </p:sldLayoutIdLst>
   <p:txStyles>
     <p:titleStyle>
@@ -1688,7 +1688,7 @@
           <p:cNvPr id="1" name="cover-rule">
             <a:extLst xmlns:a="http://schemas.openxmlformats.org/drawingml/2006/main">
               <a:ext uri="{FF2B5EF4-FFF2-40B4-BE49-F238E27FC236}">
-                <a16:creationId xmlns:a16="http://schemas.microsoft.com/office/drawing/2014/main" id="{8A20FC20-8868-42F3-A24E-FD8EC13A52C5}"/>
+                <a16:creationId xmlns:a16="http://schemas.microsoft.com/office/drawing/2014/main" id="{E6F905E1-29D9-4D5A-BD70-E54E3044646B}"/>
               </a:ext>
             </a:extLst>
           </p:cNvPr>
@@ -1721,7 +1721,7 @@
           <p:cNvPr id="2" name="cover-ring-1">
             <a:extLst xmlns:a="http://schemas.openxmlformats.org/drawingml/2006/main">
               <a:ext uri="{FF2B5EF4-FFF2-40B4-BE49-F238E27FC236}">
-                <a16:creationId xmlns:a16="http://schemas.microsoft.com/office/drawing/2014/main" id="{5EDD8ECA-6E24-49CD-B1F9-794D3B44B9FE}"/>
+                <a16:creationId xmlns:a16="http://schemas.microsoft.com/office/drawing/2014/main" id="{A5DD83C6-12FF-44FC-B82E-4222298BF6E4}"/>
               </a:ext>
             </a:extLst>
           </p:cNvPr>
@@ -1752,7 +1752,7 @@
           <p:cNvPr id="3" name="cover-ring-2">
             <a:extLst xmlns:a="http://schemas.openxmlformats.org/drawingml/2006/main">
               <a:ext uri="{FF2B5EF4-FFF2-40B4-BE49-F238E27FC236}">
-                <a16:creationId xmlns:a16="http://schemas.microsoft.com/office/drawing/2014/main" id="{7AFD18FF-D821-4572-9C1D-2443BD598CA0}"/>
+                <a16:creationId xmlns:a16="http://schemas.microsoft.com/office/drawing/2014/main" id="{665C1A00-A9DC-45B7-95B5-682DB0DB50F4}"/>
               </a:ext>
             </a:extLst>
           </p:cNvPr>
@@ -1783,7 +1783,7 @@
           <p:cNvPr id="4" name="cover-core">
             <a:extLst xmlns:a="http://schemas.openxmlformats.org/drawingml/2006/main">
               <a:ext uri="{FF2B5EF4-FFF2-40B4-BE49-F238E27FC236}">
-                <a16:creationId xmlns:a16="http://schemas.microsoft.com/office/drawing/2014/main" id="{589E9D29-C3B6-4BAD-9FDF-B35AE7103BFD}"/>
+                <a16:creationId xmlns:a16="http://schemas.microsoft.com/office/drawing/2014/main" id="{7DBF3538-EFD2-4013-B9F6-2E651E7FD125}"/>
               </a:ext>
             </a:extLst>
           </p:cNvPr>
@@ -1816,7 +1816,7 @@
           <p:cNvPr id="5" name="cover-line-1">
             <a:extLst xmlns:a="http://schemas.openxmlformats.org/drawingml/2006/main">
               <a:ext uri="{FF2B5EF4-FFF2-40B4-BE49-F238E27FC236}">
-                <a16:creationId xmlns:a16="http://schemas.microsoft.com/office/drawing/2014/main" id="{3B2407C5-DBAE-46C1-8BE4-77EF7E93E882}"/>
+                <a16:creationId xmlns:a16="http://schemas.microsoft.com/office/drawing/2014/main" id="{1FFFEAB7-F3C1-4D44-8AAB-D2465DF9D47C}"/>
               </a:ext>
             </a:extLst>
           </p:cNvPr>
@@ -1847,7 +1847,7 @@
           <p:cNvPr id="6" name="cover-line-2">
             <a:extLst xmlns:a="http://schemas.openxmlformats.org/drawingml/2006/main">
               <a:ext uri="{FF2B5EF4-FFF2-40B4-BE49-F238E27FC236}">
-                <a16:creationId xmlns:a16="http://schemas.microsoft.com/office/drawing/2014/main" id="{9FBDF2AE-0916-4A2C-AC05-3FEE420FB3D1}"/>
+                <a16:creationId xmlns:a16="http://schemas.microsoft.com/office/drawing/2014/main" id="{C7DB8E7C-48DE-4CC9-A29C-8D7A8CCA766F}"/>
               </a:ext>
             </a:extLst>
           </p:cNvPr>
@@ -1878,7 +1878,7 @@
           <p:cNvPr id="7" name="cover-eyebrow">
             <a:extLst xmlns:a="http://schemas.openxmlformats.org/drawingml/2006/main">
               <a:ext uri="{FF2B5EF4-FFF2-40B4-BE49-F238E27FC236}">
-                <a16:creationId xmlns:a16="http://schemas.microsoft.com/office/drawing/2014/main" id="{269AFB0A-08C4-4D8A-BEE2-DF2661E700E1}"/>
+                <a16:creationId xmlns:a16="http://schemas.microsoft.com/office/drawing/2014/main" id="{95BC642E-030A-4B36-B189-1CEE459B5083}"/>
               </a:ext>
             </a:extLst>
           </p:cNvPr>
@@ -1936,7 +1936,7 @@
           <p:cNvPr id="8" name="cover-title">
             <a:extLst xmlns:a="http://schemas.openxmlformats.org/drawingml/2006/main">
               <a:ext uri="{FF2B5EF4-FFF2-40B4-BE49-F238E27FC236}">
-                <a16:creationId xmlns:a16="http://schemas.microsoft.com/office/drawing/2014/main" id="{5201FB8E-A52F-430F-A520-ED1B2A97B101}"/>
+                <a16:creationId xmlns:a16="http://schemas.microsoft.com/office/drawing/2014/main" id="{FE60E940-7E79-45D7-95CC-9CE02045EDDB}"/>
               </a:ext>
             </a:extLst>
           </p:cNvPr>
@@ -1994,7 +1994,7 @@
           <p:cNvPr id="9" name="cover-subtitle">
             <a:extLst xmlns:a="http://schemas.openxmlformats.org/drawingml/2006/main">
               <a:ext uri="{FF2B5EF4-FFF2-40B4-BE49-F238E27FC236}">
-                <a16:creationId xmlns:a16="http://schemas.microsoft.com/office/drawing/2014/main" id="{7A209BEC-B131-4FE7-84A1-76C67CD8505B}"/>
+                <a16:creationId xmlns:a16="http://schemas.microsoft.com/office/drawing/2014/main" id="{50C5B2D1-C135-4D68-981E-27B54CC6C07C}"/>
               </a:ext>
             </a:extLst>
           </p:cNvPr>
@@ -2056,7 +2056,7 @@
           <p:cNvPr id="10" name="cover-lead">
             <a:extLst xmlns:a="http://schemas.openxmlformats.org/drawingml/2006/main">
               <a:ext uri="{FF2B5EF4-FFF2-40B4-BE49-F238E27FC236}">
-                <a16:creationId xmlns:a16="http://schemas.microsoft.com/office/drawing/2014/main" id="{BE7BDFBA-2176-415E-9547-E57B9393295E}"/>
+                <a16:creationId xmlns:a16="http://schemas.microsoft.com/office/drawing/2014/main" id="{C72DE464-3C8A-423D-824A-B542CE320DD4}"/>
               </a:ext>
             </a:extLst>
           </p:cNvPr>
@@ -2114,7 +2114,7 @@
           <p:cNvPr id="11" name="cover-course">
             <a:extLst xmlns:a="http://schemas.openxmlformats.org/drawingml/2006/main">
               <a:ext uri="{FF2B5EF4-FFF2-40B4-BE49-F238E27FC236}">
-                <a16:creationId xmlns:a16="http://schemas.microsoft.com/office/drawing/2014/main" id="{C988BC3B-C61A-43A6-A02A-34BC1CF8A8B8}"/>
+                <a16:creationId xmlns:a16="http://schemas.microsoft.com/office/drawing/2014/main" id="{5C9B61F9-B0F6-4B90-AB10-DC8F4D7E3901}"/>
               </a:ext>
             </a:extLst>
           </p:cNvPr>
@@ -2172,7 +2172,7 @@
           <p:cNvPr id="12" name="cover-id">
             <a:extLst xmlns:a="http://schemas.openxmlformats.org/drawingml/2006/main">
               <a:ext uri="{FF2B5EF4-FFF2-40B4-BE49-F238E27FC236}">
-                <a16:creationId xmlns:a16="http://schemas.microsoft.com/office/drawing/2014/main" id="{2413A953-0DC7-4937-AFFD-B6F0EAC98A73}"/>
+                <a16:creationId xmlns:a16="http://schemas.microsoft.com/office/drawing/2014/main" id="{319481D4-0BAC-4629-9EE0-15E7318B26E1}"/>
               </a:ext>
             </a:extLst>
           </p:cNvPr>
@@ -2228,7 +2228,7 @@
     </p:spTree>
     <p:extLst>
       <p:ext uri="{BB962C8B-B14F-4D97-AF65-F5344CB8AC3E}">
-        <p14:creationId xmlns:p14="http://schemas.microsoft.com/office/powerpoint/2010/main" val="859340909"/>
+        <p14:creationId xmlns:p14="http://schemas.microsoft.com/office/powerpoint/2010/main" val="1040312106"/>
       </p:ext>
     </p:extLst>
   </p:cSld>
@@ -2259,7 +2259,7 @@
           <p:cNvPr id="1" name="s2-rule">
             <a:extLst xmlns:a="http://schemas.openxmlformats.org/drawingml/2006/main">
               <a:ext uri="{FF2B5EF4-FFF2-40B4-BE49-F238E27FC236}">
-                <a16:creationId xmlns:a16="http://schemas.microsoft.com/office/drawing/2014/main" id="{7EC37F7F-85C6-4DF2-8855-DCC470AF0527}"/>
+                <a16:creationId xmlns:a16="http://schemas.microsoft.com/office/drawing/2014/main" id="{74B2AB2B-BE58-422F-83B0-CBC73780EB36}"/>
               </a:ext>
             </a:extLst>
           </p:cNvPr>
@@ -2292,7 +2292,7 @@
           <p:cNvPr id="2" name="s2-eyebrow">
             <a:extLst xmlns:a="http://schemas.openxmlformats.org/drawingml/2006/main">
               <a:ext uri="{FF2B5EF4-FFF2-40B4-BE49-F238E27FC236}">
-                <a16:creationId xmlns:a16="http://schemas.microsoft.com/office/drawing/2014/main" id="{1C627A8D-A1AE-447F-A228-E755D121CC2B}"/>
+                <a16:creationId xmlns:a16="http://schemas.microsoft.com/office/drawing/2014/main" id="{AB60FA77-2790-4D8A-9075-C90EF85A6EC0}"/>
               </a:ext>
             </a:extLst>
           </p:cNvPr>
@@ -2350,7 +2350,7 @@
           <p:cNvPr id="3" name="s2-title">
             <a:extLst xmlns:a="http://schemas.openxmlformats.org/drawingml/2006/main">
               <a:ext uri="{FF2B5EF4-FFF2-40B4-BE49-F238E27FC236}">
-                <a16:creationId xmlns:a16="http://schemas.microsoft.com/office/drawing/2014/main" id="{66180BD3-2845-4B73-BB9F-D3C7E9E5F514}"/>
+                <a16:creationId xmlns:a16="http://schemas.microsoft.com/office/drawing/2014/main" id="{E9357A26-5D3E-45FB-9E29-32DDA70D983B}"/>
               </a:ext>
             </a:extLst>
           </p:cNvPr>
@@ -2408,7 +2408,7 @@
           <p:cNvPr id="4" name="s2-footer">
             <a:extLst xmlns:a="http://schemas.openxmlformats.org/drawingml/2006/main">
               <a:ext uri="{FF2B5EF4-FFF2-40B4-BE49-F238E27FC236}">
-                <a16:creationId xmlns:a16="http://schemas.microsoft.com/office/drawing/2014/main" id="{F078E7F6-DAD9-4254-BE35-9AF764EADA4B}"/>
+                <a16:creationId xmlns:a16="http://schemas.microsoft.com/office/drawing/2014/main" id="{554D309D-5960-4B75-82A0-933A1974C734}"/>
               </a:ext>
             </a:extLst>
           </p:cNvPr>
@@ -2439,7 +2439,7 @@
           <p:cNvPr id="5" name="s2-identity">
             <a:extLst xmlns:a="http://schemas.openxmlformats.org/drawingml/2006/main">
               <a:ext uri="{FF2B5EF4-FFF2-40B4-BE49-F238E27FC236}">
-                <a16:creationId xmlns:a16="http://schemas.microsoft.com/office/drawing/2014/main" id="{7E19C0FF-2687-4FDE-95AE-2EEC4EF3F00C}"/>
+                <a16:creationId xmlns:a16="http://schemas.microsoft.com/office/drawing/2014/main" id="{A9676FEE-95E4-40EC-B4C5-1C0AAEA7851F}"/>
               </a:ext>
             </a:extLst>
           </p:cNvPr>
@@ -2497,7 +2497,7 @@
           <p:cNvPr id="6" name="objective-1">
             <a:extLst xmlns:a="http://schemas.openxmlformats.org/drawingml/2006/main">
               <a:ext uri="{FF2B5EF4-FFF2-40B4-BE49-F238E27FC236}">
-                <a16:creationId xmlns:a16="http://schemas.microsoft.com/office/drawing/2014/main" id="{C5A4E0BB-148F-4331-9676-AA23A4468647}"/>
+                <a16:creationId xmlns:a16="http://schemas.microsoft.com/office/drawing/2014/main" id="{BDB90304-3D8F-4BB7-BA8E-C454E8BFA88C}"/>
               </a:ext>
             </a:extLst>
           </p:cNvPr>
@@ -2584,7 +2584,7 @@
           <p:cNvPr id="7" name="objective-2">
             <a:extLst xmlns:a="http://schemas.openxmlformats.org/drawingml/2006/main">
               <a:ext uri="{FF2B5EF4-FFF2-40B4-BE49-F238E27FC236}">
-                <a16:creationId xmlns:a16="http://schemas.microsoft.com/office/drawing/2014/main" id="{89E27DBE-76D5-40DA-8131-A133E39DB24A}"/>
+                <a16:creationId xmlns:a16="http://schemas.microsoft.com/office/drawing/2014/main" id="{F74825B7-E3EA-4A91-BD9F-EC483DAD89CD}"/>
               </a:ext>
             </a:extLst>
           </p:cNvPr>
@@ -2671,7 +2671,7 @@
           <p:cNvPr id="8" name="objective-3">
             <a:extLst xmlns:a="http://schemas.openxmlformats.org/drawingml/2006/main">
               <a:ext uri="{FF2B5EF4-FFF2-40B4-BE49-F238E27FC236}">
-                <a16:creationId xmlns:a16="http://schemas.microsoft.com/office/drawing/2014/main" id="{386D01E0-8ECF-4BEF-A095-687D76766240}"/>
+                <a16:creationId xmlns:a16="http://schemas.microsoft.com/office/drawing/2014/main" id="{D5B3E96F-AAD5-40E5-9B0F-D4613934972A}"/>
               </a:ext>
             </a:extLst>
           </p:cNvPr>
@@ -2756,7 +2756,7 @@
     </p:spTree>
     <p:extLst>
       <p:ext uri="{BB962C8B-B14F-4D97-AF65-F5344CB8AC3E}">
-        <p14:creationId xmlns:p14="http://schemas.microsoft.com/office/powerpoint/2010/main" val="1140458167"/>
+        <p14:creationId xmlns:p14="http://schemas.microsoft.com/office/powerpoint/2010/main" val="233777403"/>
       </p:ext>
     </p:extLst>
   </p:cSld>
@@ -2787,7 +2787,7 @@
           <p:cNvPr id="1" name="s3-rule">
             <a:extLst xmlns:a="http://schemas.openxmlformats.org/drawingml/2006/main">
               <a:ext uri="{FF2B5EF4-FFF2-40B4-BE49-F238E27FC236}">
-                <a16:creationId xmlns:a16="http://schemas.microsoft.com/office/drawing/2014/main" id="{D7286F2B-8C43-4F28-92A1-48B3EEF35CB6}"/>
+                <a16:creationId xmlns:a16="http://schemas.microsoft.com/office/drawing/2014/main" id="{20142B73-7498-49CC-BFEE-ED131E8FF47E}"/>
               </a:ext>
             </a:extLst>
           </p:cNvPr>
@@ -2820,7 +2820,7 @@
           <p:cNvPr id="2" name="s3-eyebrow">
             <a:extLst xmlns:a="http://schemas.openxmlformats.org/drawingml/2006/main">
               <a:ext uri="{FF2B5EF4-FFF2-40B4-BE49-F238E27FC236}">
-                <a16:creationId xmlns:a16="http://schemas.microsoft.com/office/drawing/2014/main" id="{6680F913-C674-4EE4-9FF4-2489CB290BAB}"/>
+                <a16:creationId xmlns:a16="http://schemas.microsoft.com/office/drawing/2014/main" id="{E2CD09C0-65FB-44E8-9901-D96EE0ADDB60}"/>
               </a:ext>
             </a:extLst>
           </p:cNvPr>
@@ -2878,7 +2878,7 @@
           <p:cNvPr id="3" name="s3-title">
             <a:extLst xmlns:a="http://schemas.openxmlformats.org/drawingml/2006/main">
               <a:ext uri="{FF2B5EF4-FFF2-40B4-BE49-F238E27FC236}">
-                <a16:creationId xmlns:a16="http://schemas.microsoft.com/office/drawing/2014/main" id="{7D0915DE-04C1-4677-868E-5EAD94568EA2}"/>
+                <a16:creationId xmlns:a16="http://schemas.microsoft.com/office/drawing/2014/main" id="{0E9729CD-3AEE-4FE7-9849-D30422C4812C}"/>
               </a:ext>
             </a:extLst>
           </p:cNvPr>
@@ -2936,7 +2936,7 @@
           <p:cNvPr id="4" name="s3-footer">
             <a:extLst xmlns:a="http://schemas.openxmlformats.org/drawingml/2006/main">
               <a:ext uri="{FF2B5EF4-FFF2-40B4-BE49-F238E27FC236}">
-                <a16:creationId xmlns:a16="http://schemas.microsoft.com/office/drawing/2014/main" id="{D52797D1-9BD4-4C49-90C6-35AF4E91163F}"/>
+                <a16:creationId xmlns:a16="http://schemas.microsoft.com/office/drawing/2014/main" id="{509A2D63-2EFB-42D0-A6C1-5347091CF440}"/>
               </a:ext>
             </a:extLst>
           </p:cNvPr>
@@ -2967,7 +2967,7 @@
           <p:cNvPr id="5" name="s3-identity">
             <a:extLst xmlns:a="http://schemas.openxmlformats.org/drawingml/2006/main">
               <a:ext uri="{FF2B5EF4-FFF2-40B4-BE49-F238E27FC236}">
-                <a16:creationId xmlns:a16="http://schemas.microsoft.com/office/drawing/2014/main" id="{13CBC47D-B69A-4EA7-9671-D715A792ED0A}"/>
+                <a16:creationId xmlns:a16="http://schemas.microsoft.com/office/drawing/2014/main" id="{8726B9CD-8198-4556-8328-CC82E14B9661}"/>
               </a:ext>
             </a:extLst>
           </p:cNvPr>
@@ -3025,7 +3025,7 @@
           <p:cNvPr id="6" name="core-no-0">
             <a:extLst xmlns:a="http://schemas.openxmlformats.org/drawingml/2006/main">
               <a:ext uri="{FF2B5EF4-FFF2-40B4-BE49-F238E27FC236}">
-                <a16:creationId xmlns:a16="http://schemas.microsoft.com/office/drawing/2014/main" id="{8BAA7660-F96E-4D0E-806D-6C1D28A5AD51}"/>
+                <a16:creationId xmlns:a16="http://schemas.microsoft.com/office/drawing/2014/main" id="{596A70AC-D15B-4991-973C-5979F863C76E}"/>
               </a:ext>
             </a:extLst>
           </p:cNvPr>
@@ -3083,7 +3083,7 @@
           <p:cNvPr id="7" name="core-label-0">
             <a:extLst xmlns:a="http://schemas.openxmlformats.org/drawingml/2006/main">
               <a:ext uri="{FF2B5EF4-FFF2-40B4-BE49-F238E27FC236}">
-                <a16:creationId xmlns:a16="http://schemas.microsoft.com/office/drawing/2014/main" id="{576E9C2A-4E54-48AC-AB8E-14F436D09204}"/>
+                <a16:creationId xmlns:a16="http://schemas.microsoft.com/office/drawing/2014/main" id="{C1EDEE1B-E61A-478C-912A-8B9DB5C9AD0D}"/>
               </a:ext>
             </a:extLst>
           </p:cNvPr>
@@ -3141,7 +3141,7 @@
           <p:cNvPr id="8" name="core-body-0">
             <a:extLst xmlns:a="http://schemas.openxmlformats.org/drawingml/2006/main">
               <a:ext uri="{FF2B5EF4-FFF2-40B4-BE49-F238E27FC236}">
-                <a16:creationId xmlns:a16="http://schemas.microsoft.com/office/drawing/2014/main" id="{437AF25C-4CF5-48B6-87B0-A2A233D30F8E}"/>
+                <a16:creationId xmlns:a16="http://schemas.microsoft.com/office/drawing/2014/main" id="{3B0FF98B-EDCE-49AA-89FF-26D13E7A2F86}"/>
               </a:ext>
             </a:extLst>
           </p:cNvPr>
@@ -3205,7 +3205,7 @@
           <p:cNvPr id="9" name="core-no-1">
             <a:extLst xmlns:a="http://schemas.openxmlformats.org/drawingml/2006/main">
               <a:ext uri="{FF2B5EF4-FFF2-40B4-BE49-F238E27FC236}">
-                <a16:creationId xmlns:a16="http://schemas.microsoft.com/office/drawing/2014/main" id="{0D30F313-BD08-494D-BBBB-05F416D937BD}"/>
+                <a16:creationId xmlns:a16="http://schemas.microsoft.com/office/drawing/2014/main" id="{83C57F52-C997-4BE2-B9A7-EE6DE069B803}"/>
               </a:ext>
             </a:extLst>
           </p:cNvPr>
@@ -3263,7 +3263,7 @@
           <p:cNvPr id="10" name="core-body-1">
             <a:extLst xmlns:a="http://schemas.openxmlformats.org/drawingml/2006/main">
               <a:ext uri="{FF2B5EF4-FFF2-40B4-BE49-F238E27FC236}">
-                <a16:creationId xmlns:a16="http://schemas.microsoft.com/office/drawing/2014/main" id="{87457EE4-E652-448D-9C6D-0DC636177A5D}"/>
+                <a16:creationId xmlns:a16="http://schemas.microsoft.com/office/drawing/2014/main" id="{5BBA33CA-335D-46DA-8F20-CF5BE65A7955}"/>
               </a:ext>
             </a:extLst>
           </p:cNvPr>
@@ -3327,7 +3327,7 @@
           <p:cNvPr id="11" name="core-no-2">
             <a:extLst xmlns:a="http://schemas.openxmlformats.org/drawingml/2006/main">
               <a:ext uri="{FF2B5EF4-FFF2-40B4-BE49-F238E27FC236}">
-                <a16:creationId xmlns:a16="http://schemas.microsoft.com/office/drawing/2014/main" id="{BD457572-C749-41BA-83D3-787C74389076}"/>
+                <a16:creationId xmlns:a16="http://schemas.microsoft.com/office/drawing/2014/main" id="{FCD69A8F-59C2-4558-BEF8-ED69FBB61112}"/>
               </a:ext>
             </a:extLst>
           </p:cNvPr>
@@ -3385,7 +3385,7 @@
           <p:cNvPr id="12" name="core-body-2">
             <a:extLst xmlns:a="http://schemas.openxmlformats.org/drawingml/2006/main">
               <a:ext uri="{FF2B5EF4-FFF2-40B4-BE49-F238E27FC236}">
-                <a16:creationId xmlns:a16="http://schemas.microsoft.com/office/drawing/2014/main" id="{C4630BF0-8336-498C-80F3-A21649B63771}"/>
+                <a16:creationId xmlns:a16="http://schemas.microsoft.com/office/drawing/2014/main" id="{523B5BE9-75FA-443A-A62E-8890341E5A78}"/>
               </a:ext>
             </a:extLst>
           </p:cNvPr>
@@ -3449,7 +3449,7 @@
           <p:cNvPr id="13" name="s3-takeaway-rule">
             <a:extLst xmlns:a="http://schemas.openxmlformats.org/drawingml/2006/main">
               <a:ext uri="{FF2B5EF4-FFF2-40B4-BE49-F238E27FC236}">
-                <a16:creationId xmlns:a16="http://schemas.microsoft.com/office/drawing/2014/main" id="{D94156B8-6DD6-42FA-92B6-783831B2EBD4}"/>
+                <a16:creationId xmlns:a16="http://schemas.microsoft.com/office/drawing/2014/main" id="{245019FB-75EA-45FE-B452-834EA049E4D9}"/>
               </a:ext>
             </a:extLst>
           </p:cNvPr>
@@ -3482,7 +3482,7 @@
           <p:cNvPr id="14" name="s3-takeaway">
             <a:extLst xmlns:a="http://schemas.openxmlformats.org/drawingml/2006/main">
               <a:ext uri="{FF2B5EF4-FFF2-40B4-BE49-F238E27FC236}">
-                <a16:creationId xmlns:a16="http://schemas.microsoft.com/office/drawing/2014/main" id="{E71C8D62-F6E1-4FF5-9C03-477BB34BCED0}"/>
+                <a16:creationId xmlns:a16="http://schemas.microsoft.com/office/drawing/2014/main" id="{6648471D-89C2-4CF3-B667-47F0FF26DD84}"/>
               </a:ext>
             </a:extLst>
           </p:cNvPr>
@@ -3538,7 +3538,7 @@
     </p:spTree>
     <p:extLst>
       <p:ext uri="{BB962C8B-B14F-4D97-AF65-F5344CB8AC3E}">
-        <p14:creationId xmlns:p14="http://schemas.microsoft.com/office/powerpoint/2010/main" val="1324830850"/>
+        <p14:creationId xmlns:p14="http://schemas.microsoft.com/office/powerpoint/2010/main" val="1416377894"/>
       </p:ext>
     </p:extLst>
   </p:cSld>
@@ -3569,7 +3569,7 @@
           <p:cNvPr id="1" name="s4-rule">
             <a:extLst xmlns:a="http://schemas.openxmlformats.org/drawingml/2006/main">
               <a:ext uri="{FF2B5EF4-FFF2-40B4-BE49-F238E27FC236}">
-                <a16:creationId xmlns:a16="http://schemas.microsoft.com/office/drawing/2014/main" id="{BFEEE4B5-F689-4EF5-87A6-93679C74D7F2}"/>
+                <a16:creationId xmlns:a16="http://schemas.microsoft.com/office/drawing/2014/main" id="{1C832250-A849-4018-9B18-178DF28F6CF3}"/>
               </a:ext>
             </a:extLst>
           </p:cNvPr>
@@ -3602,7 +3602,7 @@
           <p:cNvPr id="2" name="s4-eyebrow">
             <a:extLst xmlns:a="http://schemas.openxmlformats.org/drawingml/2006/main">
               <a:ext uri="{FF2B5EF4-FFF2-40B4-BE49-F238E27FC236}">
-                <a16:creationId xmlns:a16="http://schemas.microsoft.com/office/drawing/2014/main" id="{7F79162C-BFFF-410A-802A-E9172D7ACCA5}"/>
+                <a16:creationId xmlns:a16="http://schemas.microsoft.com/office/drawing/2014/main" id="{783A5615-C631-4BEF-9F31-1DD8F3E6B2A1}"/>
               </a:ext>
             </a:extLst>
           </p:cNvPr>
@@ -3660,7 +3660,7 @@
           <p:cNvPr id="3" name="s4-title">
             <a:extLst xmlns:a="http://schemas.openxmlformats.org/drawingml/2006/main">
               <a:ext uri="{FF2B5EF4-FFF2-40B4-BE49-F238E27FC236}">
-                <a16:creationId xmlns:a16="http://schemas.microsoft.com/office/drawing/2014/main" id="{36D5BA87-774F-41A9-AC26-47FFE31F31A9}"/>
+                <a16:creationId xmlns:a16="http://schemas.microsoft.com/office/drawing/2014/main" id="{0A68C491-47E9-4ACE-AAA7-CCC457F22E76}"/>
               </a:ext>
             </a:extLst>
           </p:cNvPr>
@@ -3718,7 +3718,7 @@
           <p:cNvPr id="4" name="s4-footer">
             <a:extLst xmlns:a="http://schemas.openxmlformats.org/drawingml/2006/main">
               <a:ext uri="{FF2B5EF4-FFF2-40B4-BE49-F238E27FC236}">
-                <a16:creationId xmlns:a16="http://schemas.microsoft.com/office/drawing/2014/main" id="{8664E159-4B96-489F-A9C6-CB0AE9CE2764}"/>
+                <a16:creationId xmlns:a16="http://schemas.microsoft.com/office/drawing/2014/main" id="{C9C32DEF-A040-48FE-8AFE-76826A31F5CA}"/>
               </a:ext>
             </a:extLst>
           </p:cNvPr>
@@ -3749,7 +3749,7 @@
           <p:cNvPr id="5" name="s4-identity">
             <a:extLst xmlns:a="http://schemas.openxmlformats.org/drawingml/2006/main">
               <a:ext uri="{FF2B5EF4-FFF2-40B4-BE49-F238E27FC236}">
-                <a16:creationId xmlns:a16="http://schemas.microsoft.com/office/drawing/2014/main" id="{4AEF67A0-8E89-416D-9302-B208C182E34E}"/>
+                <a16:creationId xmlns:a16="http://schemas.microsoft.com/office/drawing/2014/main" id="{47A7D16C-151A-4007-933E-1CABF3627125}"/>
               </a:ext>
             </a:extLst>
           </p:cNvPr>
@@ -3807,7 +3807,7 @@
           <p:cNvPr id="6" name="core-no-0">
             <a:extLst xmlns:a="http://schemas.openxmlformats.org/drawingml/2006/main">
               <a:ext uri="{FF2B5EF4-FFF2-40B4-BE49-F238E27FC236}">
-                <a16:creationId xmlns:a16="http://schemas.microsoft.com/office/drawing/2014/main" id="{B038F216-4EC0-4950-96DB-EE3CE9422C70}"/>
+                <a16:creationId xmlns:a16="http://schemas.microsoft.com/office/drawing/2014/main" id="{AAD9593B-D756-4B5C-9A26-1D3CDC0BEEC2}"/>
               </a:ext>
             </a:extLst>
           </p:cNvPr>
@@ -3865,7 +3865,7 @@
           <p:cNvPr id="7" name="core-label-0">
             <a:extLst xmlns:a="http://schemas.openxmlformats.org/drawingml/2006/main">
               <a:ext uri="{FF2B5EF4-FFF2-40B4-BE49-F238E27FC236}">
-                <a16:creationId xmlns:a16="http://schemas.microsoft.com/office/drawing/2014/main" id="{FF501439-ACDA-4DAA-8954-9E347354A264}"/>
+                <a16:creationId xmlns:a16="http://schemas.microsoft.com/office/drawing/2014/main" id="{12E33474-2D7C-4DE4-8A35-9629082AD887}"/>
               </a:ext>
             </a:extLst>
           </p:cNvPr>
@@ -3923,7 +3923,7 @@
           <p:cNvPr id="8" name="core-body-0">
             <a:extLst xmlns:a="http://schemas.openxmlformats.org/drawingml/2006/main">
               <a:ext uri="{FF2B5EF4-FFF2-40B4-BE49-F238E27FC236}">
-                <a16:creationId xmlns:a16="http://schemas.microsoft.com/office/drawing/2014/main" id="{E7BCF0EC-907F-4CD3-9277-421255C3F44B}"/>
+                <a16:creationId xmlns:a16="http://schemas.microsoft.com/office/drawing/2014/main" id="{9C8C9E6F-1418-4AEC-8A22-B905B64B5708}"/>
               </a:ext>
             </a:extLst>
           </p:cNvPr>
@@ -3987,7 +3987,7 @@
           <p:cNvPr id="9" name="core-no-1">
             <a:extLst xmlns:a="http://schemas.openxmlformats.org/drawingml/2006/main">
               <a:ext uri="{FF2B5EF4-FFF2-40B4-BE49-F238E27FC236}">
-                <a16:creationId xmlns:a16="http://schemas.microsoft.com/office/drawing/2014/main" id="{5621820D-4092-4FAA-B197-15F5582B3666}"/>
+                <a16:creationId xmlns:a16="http://schemas.microsoft.com/office/drawing/2014/main" id="{7663CDD2-9A66-42C4-AE80-37A12B2D6DB6}"/>
               </a:ext>
             </a:extLst>
           </p:cNvPr>
@@ -4045,7 +4045,7 @@
           <p:cNvPr id="10" name="core-body-1">
             <a:extLst xmlns:a="http://schemas.openxmlformats.org/drawingml/2006/main">
               <a:ext uri="{FF2B5EF4-FFF2-40B4-BE49-F238E27FC236}">
-                <a16:creationId xmlns:a16="http://schemas.microsoft.com/office/drawing/2014/main" id="{E973152B-BD7D-4D47-8C91-E7533F452256}"/>
+                <a16:creationId xmlns:a16="http://schemas.microsoft.com/office/drawing/2014/main" id="{F7C9A873-11F6-4F9D-9099-7E6A9C01CEFF}"/>
               </a:ext>
             </a:extLst>
           </p:cNvPr>
@@ -4109,7 +4109,7 @@
           <p:cNvPr id="11" name="s4-takeaway-rule">
             <a:extLst xmlns:a="http://schemas.openxmlformats.org/drawingml/2006/main">
               <a:ext uri="{FF2B5EF4-FFF2-40B4-BE49-F238E27FC236}">
-                <a16:creationId xmlns:a16="http://schemas.microsoft.com/office/drawing/2014/main" id="{9E27737A-4F70-4707-8208-69334D0EBB18}"/>
+                <a16:creationId xmlns:a16="http://schemas.microsoft.com/office/drawing/2014/main" id="{1FC86A2A-9C3E-4B0E-9C8E-1E9ACF707726}"/>
               </a:ext>
             </a:extLst>
           </p:cNvPr>
@@ -4142,7 +4142,7 @@
           <p:cNvPr id="12" name="s4-takeaway">
             <a:extLst xmlns:a="http://schemas.openxmlformats.org/drawingml/2006/main">
               <a:ext uri="{FF2B5EF4-FFF2-40B4-BE49-F238E27FC236}">
-                <a16:creationId xmlns:a16="http://schemas.microsoft.com/office/drawing/2014/main" id="{33C56C64-61A2-41AE-9D97-7FFEEE654974}"/>
+                <a16:creationId xmlns:a16="http://schemas.microsoft.com/office/drawing/2014/main" id="{BDF61CCD-E89A-49E0-882B-F68BBBED1F1F}"/>
               </a:ext>
             </a:extLst>
           </p:cNvPr>
@@ -4198,7 +4198,7 @@
     </p:spTree>
     <p:extLst>
       <p:ext uri="{BB962C8B-B14F-4D97-AF65-F5344CB8AC3E}">
-        <p14:creationId xmlns:p14="http://schemas.microsoft.com/office/powerpoint/2010/main" val="1759651867"/>
+        <p14:creationId xmlns:p14="http://schemas.microsoft.com/office/powerpoint/2010/main" val="204677636"/>
       </p:ext>
     </p:extLst>
   </p:cSld>
@@ -4229,7 +4229,7 @@
           <p:cNvPr id="1" name="s5-rule">
             <a:extLst xmlns:a="http://schemas.openxmlformats.org/drawingml/2006/main">
               <a:ext uri="{FF2B5EF4-FFF2-40B4-BE49-F238E27FC236}">
-                <a16:creationId xmlns:a16="http://schemas.microsoft.com/office/drawing/2014/main" id="{30CD68B4-A11C-4859-80D3-E50596824592}"/>
+                <a16:creationId xmlns:a16="http://schemas.microsoft.com/office/drawing/2014/main" id="{7A1F473C-7E83-4B81-9862-9FBFC41064F4}"/>
               </a:ext>
             </a:extLst>
           </p:cNvPr>
@@ -4262,7 +4262,7 @@
           <p:cNvPr id="2" name="s5-eyebrow">
             <a:extLst xmlns:a="http://schemas.openxmlformats.org/drawingml/2006/main">
               <a:ext uri="{FF2B5EF4-FFF2-40B4-BE49-F238E27FC236}">
-                <a16:creationId xmlns:a16="http://schemas.microsoft.com/office/drawing/2014/main" id="{DF86FAC8-89E9-4248-AFD3-16B457D91384}"/>
+                <a16:creationId xmlns:a16="http://schemas.microsoft.com/office/drawing/2014/main" id="{125E302D-8A98-45A8-998E-70D491144EEF}"/>
               </a:ext>
             </a:extLst>
           </p:cNvPr>
@@ -4320,7 +4320,7 @@
           <p:cNvPr id="3" name="s5-title">
             <a:extLst xmlns:a="http://schemas.openxmlformats.org/drawingml/2006/main">
               <a:ext uri="{FF2B5EF4-FFF2-40B4-BE49-F238E27FC236}">
-                <a16:creationId xmlns:a16="http://schemas.microsoft.com/office/drawing/2014/main" id="{75A6234A-EADE-47EF-AD97-7C0DC89D0912}"/>
+                <a16:creationId xmlns:a16="http://schemas.microsoft.com/office/drawing/2014/main" id="{52F69D5E-95B4-4108-A5B1-65534C537DF4}"/>
               </a:ext>
             </a:extLst>
           </p:cNvPr>
@@ -4378,7 +4378,7 @@
           <p:cNvPr id="4" name="s5-footer">
             <a:extLst xmlns:a="http://schemas.openxmlformats.org/drawingml/2006/main">
               <a:ext uri="{FF2B5EF4-FFF2-40B4-BE49-F238E27FC236}">
-                <a16:creationId xmlns:a16="http://schemas.microsoft.com/office/drawing/2014/main" id="{1C89BADB-6627-487F-8CC4-4398FAC6CD82}"/>
+                <a16:creationId xmlns:a16="http://schemas.microsoft.com/office/drawing/2014/main" id="{79442323-2B42-448B-80A2-97B457097E1B}"/>
               </a:ext>
             </a:extLst>
           </p:cNvPr>
@@ -4409,7 +4409,7 @@
           <p:cNvPr id="5" name="s5-identity">
             <a:extLst xmlns:a="http://schemas.openxmlformats.org/drawingml/2006/main">
               <a:ext uri="{FF2B5EF4-FFF2-40B4-BE49-F238E27FC236}">
-                <a16:creationId xmlns:a16="http://schemas.microsoft.com/office/drawing/2014/main" id="{4938FF08-980A-422A-A09E-C95D502B507A}"/>
+                <a16:creationId xmlns:a16="http://schemas.microsoft.com/office/drawing/2014/main" id="{D7C20667-CB86-4955-97A5-C8EE38D0EC77}"/>
               </a:ext>
             </a:extLst>
           </p:cNvPr>
@@ -4467,7 +4467,7 @@
           <p:cNvPr id="6" name="core-no-0">
             <a:extLst xmlns:a="http://schemas.openxmlformats.org/drawingml/2006/main">
               <a:ext uri="{FF2B5EF4-FFF2-40B4-BE49-F238E27FC236}">
-                <a16:creationId xmlns:a16="http://schemas.microsoft.com/office/drawing/2014/main" id="{22280C0A-AC1E-4A78-8C63-73ED2957A0D4}"/>
+                <a16:creationId xmlns:a16="http://schemas.microsoft.com/office/drawing/2014/main" id="{93901C80-286B-4F51-9960-8BD6C0B9FC71}"/>
               </a:ext>
             </a:extLst>
           </p:cNvPr>
@@ -4525,7 +4525,7 @@
           <p:cNvPr id="7" name="core-label-0">
             <a:extLst xmlns:a="http://schemas.openxmlformats.org/drawingml/2006/main">
               <a:ext uri="{FF2B5EF4-FFF2-40B4-BE49-F238E27FC236}">
-                <a16:creationId xmlns:a16="http://schemas.microsoft.com/office/drawing/2014/main" id="{8C7D96F5-6441-47BA-811C-169D5DF5FEBB}"/>
+                <a16:creationId xmlns:a16="http://schemas.microsoft.com/office/drawing/2014/main" id="{1A42E5AB-5D48-46D9-8B38-896ED70DBE4D}"/>
               </a:ext>
             </a:extLst>
           </p:cNvPr>
@@ -4583,7 +4583,7 @@
           <p:cNvPr id="8" name="core-body-0">
             <a:extLst xmlns:a="http://schemas.openxmlformats.org/drawingml/2006/main">
               <a:ext uri="{FF2B5EF4-FFF2-40B4-BE49-F238E27FC236}">
-                <a16:creationId xmlns:a16="http://schemas.microsoft.com/office/drawing/2014/main" id="{E8F63F98-4D72-4130-B1F4-3003FA296CC4}"/>
+                <a16:creationId xmlns:a16="http://schemas.microsoft.com/office/drawing/2014/main" id="{8C6B17AC-EFBD-4CC6-B51D-4D53739C2485}"/>
               </a:ext>
             </a:extLst>
           </p:cNvPr>
@@ -4647,7 +4647,7 @@
           <p:cNvPr id="9" name="core-no-1">
             <a:extLst xmlns:a="http://schemas.openxmlformats.org/drawingml/2006/main">
               <a:ext uri="{FF2B5EF4-FFF2-40B4-BE49-F238E27FC236}">
-                <a16:creationId xmlns:a16="http://schemas.microsoft.com/office/drawing/2014/main" id="{BBE1BBAD-E9BF-410A-9F53-B8B8DCF5939B}"/>
+                <a16:creationId xmlns:a16="http://schemas.microsoft.com/office/drawing/2014/main" id="{6C93CFFE-A76A-4BE8-882B-A2A1A996EB22}"/>
               </a:ext>
             </a:extLst>
           </p:cNvPr>
@@ -4705,7 +4705,7 @@
           <p:cNvPr id="10" name="core-body-1">
             <a:extLst xmlns:a="http://schemas.openxmlformats.org/drawingml/2006/main">
               <a:ext uri="{FF2B5EF4-FFF2-40B4-BE49-F238E27FC236}">
-                <a16:creationId xmlns:a16="http://schemas.microsoft.com/office/drawing/2014/main" id="{86B5E505-B9FE-46C7-844D-5FAC5EED4B1B}"/>
+                <a16:creationId xmlns:a16="http://schemas.microsoft.com/office/drawing/2014/main" id="{459B33EB-8CA3-43DC-9EC0-E22F2CEBB603}"/>
               </a:ext>
             </a:extLst>
           </p:cNvPr>
@@ -4769,7 +4769,7 @@
           <p:cNvPr id="11" name="core-no-2">
             <a:extLst xmlns:a="http://schemas.openxmlformats.org/drawingml/2006/main">
               <a:ext uri="{FF2B5EF4-FFF2-40B4-BE49-F238E27FC236}">
-                <a16:creationId xmlns:a16="http://schemas.microsoft.com/office/drawing/2014/main" id="{30AA7014-468D-4D82-8FEF-001EE4914642}"/>
+                <a16:creationId xmlns:a16="http://schemas.microsoft.com/office/drawing/2014/main" id="{F317C191-F000-44FB-9100-A9EA1DADFDE6}"/>
               </a:ext>
             </a:extLst>
           </p:cNvPr>
@@ -4827,7 +4827,7 @@
           <p:cNvPr id="12" name="core-body-2">
             <a:extLst xmlns:a="http://schemas.openxmlformats.org/drawingml/2006/main">
               <a:ext uri="{FF2B5EF4-FFF2-40B4-BE49-F238E27FC236}">
-                <a16:creationId xmlns:a16="http://schemas.microsoft.com/office/drawing/2014/main" id="{14AA8A44-88C5-4D08-B7A7-DB7F851CD075}"/>
+                <a16:creationId xmlns:a16="http://schemas.microsoft.com/office/drawing/2014/main" id="{0B06D20D-607F-4B75-B7B4-3C8263EC6107}"/>
               </a:ext>
             </a:extLst>
           </p:cNvPr>
@@ -4891,7 +4891,7 @@
           <p:cNvPr id="13" name="s5-takeaway-rule">
             <a:extLst xmlns:a="http://schemas.openxmlformats.org/drawingml/2006/main">
               <a:ext uri="{FF2B5EF4-FFF2-40B4-BE49-F238E27FC236}">
-                <a16:creationId xmlns:a16="http://schemas.microsoft.com/office/drawing/2014/main" id="{4167AB36-DEB5-4DB3-86E7-2246A559EEAC}"/>
+                <a16:creationId xmlns:a16="http://schemas.microsoft.com/office/drawing/2014/main" id="{56EAE58D-9197-4F21-9202-F4DDE8A1BF9D}"/>
               </a:ext>
             </a:extLst>
           </p:cNvPr>
@@ -4924,7 +4924,7 @@
           <p:cNvPr id="14" name="s5-takeaway">
             <a:extLst xmlns:a="http://schemas.openxmlformats.org/drawingml/2006/main">
               <a:ext uri="{FF2B5EF4-FFF2-40B4-BE49-F238E27FC236}">
-                <a16:creationId xmlns:a16="http://schemas.microsoft.com/office/drawing/2014/main" id="{3CF555FF-2F42-48D9-98A7-990EFB763B54}"/>
+                <a16:creationId xmlns:a16="http://schemas.microsoft.com/office/drawing/2014/main" id="{4C1938EF-1734-4C58-A60F-7D6F82C88705}"/>
               </a:ext>
             </a:extLst>
           </p:cNvPr>
@@ -4980,7 +4980,7 @@
     </p:spTree>
     <p:extLst>
       <p:ext uri="{BB962C8B-B14F-4D97-AF65-F5344CB8AC3E}">
-        <p14:creationId xmlns:p14="http://schemas.microsoft.com/office/powerpoint/2010/main" val="632974401"/>
+        <p14:creationId xmlns:p14="http://schemas.microsoft.com/office/powerpoint/2010/main" val="1074362376"/>
       </p:ext>
     </p:extLst>
   </p:cSld>
@@ -5011,7 +5011,7 @@
           <p:cNvPr id="1" name="s6-rule">
             <a:extLst xmlns:a="http://schemas.openxmlformats.org/drawingml/2006/main">
               <a:ext uri="{FF2B5EF4-FFF2-40B4-BE49-F238E27FC236}">
-                <a16:creationId xmlns:a16="http://schemas.microsoft.com/office/drawing/2014/main" id="{974E4834-D806-439C-B031-81D23EAB0AE1}"/>
+                <a16:creationId xmlns:a16="http://schemas.microsoft.com/office/drawing/2014/main" id="{114D3FED-AED0-4103-B60C-2C00B23E768D}"/>
               </a:ext>
             </a:extLst>
           </p:cNvPr>
@@ -5044,7 +5044,7 @@
           <p:cNvPr id="2" name="s6-eyebrow">
             <a:extLst xmlns:a="http://schemas.openxmlformats.org/drawingml/2006/main">
               <a:ext uri="{FF2B5EF4-FFF2-40B4-BE49-F238E27FC236}">
-                <a16:creationId xmlns:a16="http://schemas.microsoft.com/office/drawing/2014/main" id="{FC5F8CFA-82BC-46C7-9F24-1F704AB8E88C}"/>
+                <a16:creationId xmlns:a16="http://schemas.microsoft.com/office/drawing/2014/main" id="{86362689-DC45-4CB7-AD0D-A9FF0D76C50D}"/>
               </a:ext>
             </a:extLst>
           </p:cNvPr>
@@ -5102,7 +5102,7 @@
           <p:cNvPr id="3" name="s6-title">
             <a:extLst xmlns:a="http://schemas.openxmlformats.org/drawingml/2006/main">
               <a:ext uri="{FF2B5EF4-FFF2-40B4-BE49-F238E27FC236}">
-                <a16:creationId xmlns:a16="http://schemas.microsoft.com/office/drawing/2014/main" id="{9ACA4B08-9750-446B-BBDD-A3DF23B9F6B1}"/>
+                <a16:creationId xmlns:a16="http://schemas.microsoft.com/office/drawing/2014/main" id="{4A957274-4AB1-4D0A-A9C7-F9A39E64DEA6}"/>
               </a:ext>
             </a:extLst>
           </p:cNvPr>
@@ -5160,7 +5160,7 @@
           <p:cNvPr id="4" name="s6-footer">
             <a:extLst xmlns:a="http://schemas.openxmlformats.org/drawingml/2006/main">
               <a:ext uri="{FF2B5EF4-FFF2-40B4-BE49-F238E27FC236}">
-                <a16:creationId xmlns:a16="http://schemas.microsoft.com/office/drawing/2014/main" id="{6AED92C0-26B1-4065-B58B-CA05EBF05C84}"/>
+                <a16:creationId xmlns:a16="http://schemas.microsoft.com/office/drawing/2014/main" id="{E8EA5943-B919-4B7C-8ED8-AB9FBCF0151C}"/>
               </a:ext>
             </a:extLst>
           </p:cNvPr>
@@ -5191,7 +5191,7 @@
           <p:cNvPr id="5" name="s6-identity">
             <a:extLst xmlns:a="http://schemas.openxmlformats.org/drawingml/2006/main">
               <a:ext uri="{FF2B5EF4-FFF2-40B4-BE49-F238E27FC236}">
-                <a16:creationId xmlns:a16="http://schemas.microsoft.com/office/drawing/2014/main" id="{5E74AFCA-3CE8-4E42-BCA0-5F0BCE97BA63}"/>
+                <a16:creationId xmlns:a16="http://schemas.microsoft.com/office/drawing/2014/main" id="{4ADB420B-6E96-4BD4-A078-038DE62C623E}"/>
               </a:ext>
             </a:extLst>
           </p:cNvPr>
@@ -5249,7 +5249,7 @@
           <p:cNvPr id="6" name="case-title">
             <a:extLst xmlns:a="http://schemas.openxmlformats.org/drawingml/2006/main">
               <a:ext uri="{FF2B5EF4-FFF2-40B4-BE49-F238E27FC236}">
-                <a16:creationId xmlns:a16="http://schemas.microsoft.com/office/drawing/2014/main" id="{BD07D3CC-C2BE-4481-B8A2-34975BA8CB7C}"/>
+                <a16:creationId xmlns:a16="http://schemas.microsoft.com/office/drawing/2014/main" id="{715CCFA0-3C1F-483C-A12B-8A8C488E2616}"/>
               </a:ext>
             </a:extLst>
           </p:cNvPr>
@@ -5313,7 +5313,7 @@
           <p:cNvPr id="7" name="case-row-0">
             <a:extLst xmlns:a="http://schemas.openxmlformats.org/drawingml/2006/main">
               <a:ext uri="{FF2B5EF4-FFF2-40B4-BE49-F238E27FC236}">
-                <a16:creationId xmlns:a16="http://schemas.microsoft.com/office/drawing/2014/main" id="{A9F21B1B-5D1A-4047-9FAB-A8CE4859CA3A}"/>
+                <a16:creationId xmlns:a16="http://schemas.microsoft.com/office/drawing/2014/main" id="{95E0492A-118E-4DDF-905B-3A749B9CFA2A}"/>
               </a:ext>
             </a:extLst>
           </p:cNvPr>
@@ -5377,7 +5377,7 @@
           <p:cNvPr id="8" name="case-row-1">
             <a:extLst xmlns:a="http://schemas.openxmlformats.org/drawingml/2006/main">
               <a:ext uri="{FF2B5EF4-FFF2-40B4-BE49-F238E27FC236}">
-                <a16:creationId xmlns:a16="http://schemas.microsoft.com/office/drawing/2014/main" id="{5602447E-D24C-4D4A-BBE4-EF83139B308D}"/>
+                <a16:creationId xmlns:a16="http://schemas.microsoft.com/office/drawing/2014/main" id="{5DD1A1F0-FDCB-4E31-93F1-D387495348A0}"/>
               </a:ext>
             </a:extLst>
           </p:cNvPr>
@@ -5441,7 +5441,7 @@
           <p:cNvPr id="9" name="case-row-2">
             <a:extLst xmlns:a="http://schemas.openxmlformats.org/drawingml/2006/main">
               <a:ext uri="{FF2B5EF4-FFF2-40B4-BE49-F238E27FC236}">
-                <a16:creationId xmlns:a16="http://schemas.microsoft.com/office/drawing/2014/main" id="{16D1B91D-1BEC-418B-A686-602461C110D6}"/>
+                <a16:creationId xmlns:a16="http://schemas.microsoft.com/office/drawing/2014/main" id="{20B80C3F-0528-4FCF-8E24-F36CA89F3749}"/>
               </a:ext>
             </a:extLst>
           </p:cNvPr>
@@ -5505,7 +5505,7 @@
           <p:cNvPr id="10" name="case-row-3">
             <a:extLst xmlns:a="http://schemas.openxmlformats.org/drawingml/2006/main">
               <a:ext uri="{FF2B5EF4-FFF2-40B4-BE49-F238E27FC236}">
-                <a16:creationId xmlns:a16="http://schemas.microsoft.com/office/drawing/2014/main" id="{BBCC9A9C-8A2F-4D28-8FDA-FE89FCFF1741}"/>
+                <a16:creationId xmlns:a16="http://schemas.microsoft.com/office/drawing/2014/main" id="{96DA8DAD-57AC-4637-BF49-FCF6204BA120}"/>
               </a:ext>
             </a:extLst>
           </p:cNvPr>
@@ -5569,7 +5569,7 @@
           <p:cNvPr id="11" name="s6-takeaway-rule">
             <a:extLst xmlns:a="http://schemas.openxmlformats.org/drawingml/2006/main">
               <a:ext uri="{FF2B5EF4-FFF2-40B4-BE49-F238E27FC236}">
-                <a16:creationId xmlns:a16="http://schemas.microsoft.com/office/drawing/2014/main" id="{E6D97300-CF3D-4505-BCF0-9E73BB1D1B3A}"/>
+                <a16:creationId xmlns:a16="http://schemas.microsoft.com/office/drawing/2014/main" id="{6FCDE615-3D76-49C3-9E40-6CE34FD2C9D0}"/>
               </a:ext>
             </a:extLst>
           </p:cNvPr>
@@ -5602,7 +5602,7 @@
           <p:cNvPr id="12" name="s6-takeaway">
             <a:extLst xmlns:a="http://schemas.openxmlformats.org/drawingml/2006/main">
               <a:ext uri="{FF2B5EF4-FFF2-40B4-BE49-F238E27FC236}">
-                <a16:creationId xmlns:a16="http://schemas.microsoft.com/office/drawing/2014/main" id="{F018C2EB-66E5-4C41-9CD8-D0CA967D0778}"/>
+                <a16:creationId xmlns:a16="http://schemas.microsoft.com/office/drawing/2014/main" id="{505FFA2B-FCB7-454F-BAF0-317D3FAF208D}"/>
               </a:ext>
             </a:extLst>
           </p:cNvPr>
@@ -5658,7 +5658,7 @@
     </p:spTree>
     <p:extLst>
       <p:ext uri="{BB962C8B-B14F-4D97-AF65-F5344CB8AC3E}">
-        <p14:creationId xmlns:p14="http://schemas.microsoft.com/office/powerpoint/2010/main" val="555498696"/>
+        <p14:creationId xmlns:p14="http://schemas.microsoft.com/office/powerpoint/2010/main" val="1716807834"/>
       </p:ext>
     </p:extLst>
   </p:cSld>
@@ -5689,7 +5689,7 @@
           <p:cNvPr id="1" name="s7-rule">
             <a:extLst xmlns:a="http://schemas.openxmlformats.org/drawingml/2006/main">
               <a:ext uri="{FF2B5EF4-FFF2-40B4-BE49-F238E27FC236}">
-                <a16:creationId xmlns:a16="http://schemas.microsoft.com/office/drawing/2014/main" id="{CBCBB65E-1C8E-438B-8594-88548EBD4822}"/>
+                <a16:creationId xmlns:a16="http://schemas.microsoft.com/office/drawing/2014/main" id="{7314420F-7F62-4D13-8B63-A700BF5A8C1B}"/>
               </a:ext>
             </a:extLst>
           </p:cNvPr>
@@ -5722,7 +5722,7 @@
           <p:cNvPr id="2" name="s7-eyebrow">
             <a:extLst xmlns:a="http://schemas.openxmlformats.org/drawingml/2006/main">
               <a:ext uri="{FF2B5EF4-FFF2-40B4-BE49-F238E27FC236}">
-                <a16:creationId xmlns:a16="http://schemas.microsoft.com/office/drawing/2014/main" id="{30503A87-1543-4D39-B450-4751DAEA2EA5}"/>
+                <a16:creationId xmlns:a16="http://schemas.microsoft.com/office/drawing/2014/main" id="{6316CB5F-90D0-4503-8C55-2200C91CFE17}"/>
               </a:ext>
             </a:extLst>
           </p:cNvPr>
@@ -5780,7 +5780,7 @@
           <p:cNvPr id="3" name="s7-title">
             <a:extLst xmlns:a="http://schemas.openxmlformats.org/drawingml/2006/main">
               <a:ext uri="{FF2B5EF4-FFF2-40B4-BE49-F238E27FC236}">
-                <a16:creationId xmlns:a16="http://schemas.microsoft.com/office/drawing/2014/main" id="{3B9B5EF2-4D40-4C81-B4B3-E40DF3E0889C}"/>
+                <a16:creationId xmlns:a16="http://schemas.microsoft.com/office/drawing/2014/main" id="{A8CE6790-DD68-410D-AD08-6010AD878E2D}"/>
               </a:ext>
             </a:extLst>
           </p:cNvPr>
@@ -5838,7 +5838,7 @@
           <p:cNvPr id="4" name="s7-footer">
             <a:extLst xmlns:a="http://schemas.openxmlformats.org/drawingml/2006/main">
               <a:ext uri="{FF2B5EF4-FFF2-40B4-BE49-F238E27FC236}">
-                <a16:creationId xmlns:a16="http://schemas.microsoft.com/office/drawing/2014/main" id="{DB73BC75-51E3-4CB1-B65E-E0A93411062B}"/>
+                <a16:creationId xmlns:a16="http://schemas.microsoft.com/office/drawing/2014/main" id="{BD2ECB46-1750-47D3-9BA2-2AD703515117}"/>
               </a:ext>
             </a:extLst>
           </p:cNvPr>
@@ -5869,7 +5869,7 @@
           <p:cNvPr id="5" name="s7-identity">
             <a:extLst xmlns:a="http://schemas.openxmlformats.org/drawingml/2006/main">
               <a:ext uri="{FF2B5EF4-FFF2-40B4-BE49-F238E27FC236}">
-                <a16:creationId xmlns:a16="http://schemas.microsoft.com/office/drawing/2014/main" id="{FA8960A9-59C0-454C-8C43-D16069AB56F8}"/>
+                <a16:creationId xmlns:a16="http://schemas.microsoft.com/office/drawing/2014/main" id="{ADB77B17-8178-4AD4-9B63-E1DA823DC647}"/>
               </a:ext>
             </a:extLst>
           </p:cNvPr>
@@ -5927,7 +5927,7 @@
           <p:cNvPr id="6" name="practice-circle-0">
             <a:extLst xmlns:a="http://schemas.openxmlformats.org/drawingml/2006/main">
               <a:ext uri="{FF2B5EF4-FFF2-40B4-BE49-F238E27FC236}">
-                <a16:creationId xmlns:a16="http://schemas.microsoft.com/office/drawing/2014/main" id="{4F7C4793-25C4-4CB9-99BB-E470F14ADA0B}"/>
+                <a16:creationId xmlns:a16="http://schemas.microsoft.com/office/drawing/2014/main" id="{C3F98466-2841-427A-B935-EFD2BF5F5E34}"/>
               </a:ext>
             </a:extLst>
           </p:cNvPr>
@@ -5960,7 +5960,7 @@
           <p:cNvPr id="7" name="practice-number-0">
             <a:extLst xmlns:a="http://schemas.openxmlformats.org/drawingml/2006/main">
               <a:ext uri="{FF2B5EF4-FFF2-40B4-BE49-F238E27FC236}">
-                <a16:creationId xmlns:a16="http://schemas.microsoft.com/office/drawing/2014/main" id="{5D1E25CF-9975-4F86-BC79-998B7603A113}"/>
+                <a16:creationId xmlns:a16="http://schemas.microsoft.com/office/drawing/2014/main" id="{DFDC5CC5-C345-4F87-A89D-73EDF484CD62}"/>
               </a:ext>
             </a:extLst>
           </p:cNvPr>
@@ -6018,7 +6018,7 @@
           <p:cNvPr id="8" name="practice-item-0">
             <a:extLst xmlns:a="http://schemas.openxmlformats.org/drawingml/2006/main">
               <a:ext uri="{FF2B5EF4-FFF2-40B4-BE49-F238E27FC236}">
-                <a16:creationId xmlns:a16="http://schemas.microsoft.com/office/drawing/2014/main" id="{BB7ACAFE-4591-4D90-97C9-67817661C677}"/>
+                <a16:creationId xmlns:a16="http://schemas.microsoft.com/office/drawing/2014/main" id="{BE57C38F-3E38-4119-9605-E0C29D61594D}"/>
               </a:ext>
             </a:extLst>
           </p:cNvPr>
@@ -6082,7 +6082,7 @@
           <p:cNvPr id="9" name="practice-connector-0">
             <a:extLst xmlns:a="http://schemas.openxmlformats.org/drawingml/2006/main">
               <a:ext uri="{FF2B5EF4-FFF2-40B4-BE49-F238E27FC236}">
-                <a16:creationId xmlns:a16="http://schemas.microsoft.com/office/drawing/2014/main" id="{0A774FBF-6E4A-42BF-9F67-BCE0D68B63F7}"/>
+                <a16:creationId xmlns:a16="http://schemas.microsoft.com/office/drawing/2014/main" id="{9D08A16B-B3D0-4D63-8CD0-502AD0A5A928}"/>
               </a:ext>
             </a:extLst>
           </p:cNvPr>
@@ -6113,7 +6113,7 @@
           <p:cNvPr id="10" name="practice-circle-1">
             <a:extLst xmlns:a="http://schemas.openxmlformats.org/drawingml/2006/main">
               <a:ext uri="{FF2B5EF4-FFF2-40B4-BE49-F238E27FC236}">
-                <a16:creationId xmlns:a16="http://schemas.microsoft.com/office/drawing/2014/main" id="{E1AE3871-A280-4657-82A2-C24F2ED39892}"/>
+                <a16:creationId xmlns:a16="http://schemas.microsoft.com/office/drawing/2014/main" id="{C509897F-24F5-439C-B4FC-88B7DB5154A6}"/>
               </a:ext>
             </a:extLst>
           </p:cNvPr>
@@ -6146,7 +6146,7 @@
           <p:cNvPr id="11" name="practice-number-1">
             <a:extLst xmlns:a="http://schemas.openxmlformats.org/drawingml/2006/main">
               <a:ext uri="{FF2B5EF4-FFF2-40B4-BE49-F238E27FC236}">
-                <a16:creationId xmlns:a16="http://schemas.microsoft.com/office/drawing/2014/main" id="{AA93E880-8AD6-4799-A330-21CF293564CA}"/>
+                <a16:creationId xmlns:a16="http://schemas.microsoft.com/office/drawing/2014/main" id="{A845716E-8F5C-4934-B481-458676DE85BE}"/>
               </a:ext>
             </a:extLst>
           </p:cNvPr>
@@ -6204,7 +6204,7 @@
           <p:cNvPr id="12" name="practice-item-1">
             <a:extLst xmlns:a="http://schemas.openxmlformats.org/drawingml/2006/main">
               <a:ext uri="{FF2B5EF4-FFF2-40B4-BE49-F238E27FC236}">
-                <a16:creationId xmlns:a16="http://schemas.microsoft.com/office/drawing/2014/main" id="{FD8A140E-C640-46BB-ACE2-CCC88A9E9399}"/>
+                <a16:creationId xmlns:a16="http://schemas.microsoft.com/office/drawing/2014/main" id="{A292DEA5-A3A4-4C2D-96D4-491B4F09F8E6}"/>
               </a:ext>
             </a:extLst>
           </p:cNvPr>
@@ -6266,7 +6266,7 @@
     </p:spTree>
     <p:extLst>
       <p:ext uri="{BB962C8B-B14F-4D97-AF65-F5344CB8AC3E}">
-        <p14:creationId xmlns:p14="http://schemas.microsoft.com/office/powerpoint/2010/main" val="532993336"/>
+        <p14:creationId xmlns:p14="http://schemas.microsoft.com/office/powerpoint/2010/main" val="985168422"/>
       </p:ext>
     </p:extLst>
   </p:cSld>
@@ -6297,7 +6297,7 @@
           <p:cNvPr id="1" name="s8-rule">
             <a:extLst xmlns:a="http://schemas.openxmlformats.org/drawingml/2006/main">
               <a:ext uri="{FF2B5EF4-FFF2-40B4-BE49-F238E27FC236}">
-                <a16:creationId xmlns:a16="http://schemas.microsoft.com/office/drawing/2014/main" id="{057439FA-1BF0-435E-AC8A-AAEF0434E6D9}"/>
+                <a16:creationId xmlns:a16="http://schemas.microsoft.com/office/drawing/2014/main" id="{18513C4D-0FA1-4B00-9004-6DFB57C35D51}"/>
               </a:ext>
             </a:extLst>
           </p:cNvPr>
@@ -6330,7 +6330,7 @@
           <p:cNvPr id="2" name="s8-eyebrow">
             <a:extLst xmlns:a="http://schemas.openxmlformats.org/drawingml/2006/main">
               <a:ext uri="{FF2B5EF4-FFF2-40B4-BE49-F238E27FC236}">
-                <a16:creationId xmlns:a16="http://schemas.microsoft.com/office/drawing/2014/main" id="{F9A354A2-B7AF-4793-AD2C-C140121F749B}"/>
+                <a16:creationId xmlns:a16="http://schemas.microsoft.com/office/drawing/2014/main" id="{E53BE31A-4544-4215-9CD6-06187BC52C5E}"/>
               </a:ext>
             </a:extLst>
           </p:cNvPr>
@@ -6388,7 +6388,7 @@
           <p:cNvPr id="3" name="s8-title">
             <a:extLst xmlns:a="http://schemas.openxmlformats.org/drawingml/2006/main">
               <a:ext uri="{FF2B5EF4-FFF2-40B4-BE49-F238E27FC236}">
-                <a16:creationId xmlns:a16="http://schemas.microsoft.com/office/drawing/2014/main" id="{3A2A94EA-89D3-47E1-A893-A9F1F859FA41}"/>
+                <a16:creationId xmlns:a16="http://schemas.microsoft.com/office/drawing/2014/main" id="{5127725B-F8F9-464C-B7B4-953AD7F3B89E}"/>
               </a:ext>
             </a:extLst>
           </p:cNvPr>
@@ -6446,7 +6446,7 @@
           <p:cNvPr id="4" name="s8-footer">
             <a:extLst xmlns:a="http://schemas.openxmlformats.org/drawingml/2006/main">
               <a:ext uri="{FF2B5EF4-FFF2-40B4-BE49-F238E27FC236}">
-                <a16:creationId xmlns:a16="http://schemas.microsoft.com/office/drawing/2014/main" id="{D83D1D2A-8AFA-4F39-9BDB-210E20CA0300}"/>
+                <a16:creationId xmlns:a16="http://schemas.microsoft.com/office/drawing/2014/main" id="{BE0E8FAD-0334-4938-A094-1878E1130E79}"/>
               </a:ext>
             </a:extLst>
           </p:cNvPr>
@@ -6477,7 +6477,7 @@
           <p:cNvPr id="5" name="s8-identity">
             <a:extLst xmlns:a="http://schemas.openxmlformats.org/drawingml/2006/main">
               <a:ext uri="{FF2B5EF4-FFF2-40B4-BE49-F238E27FC236}">
-                <a16:creationId xmlns:a16="http://schemas.microsoft.com/office/drawing/2014/main" id="{745913EC-54F9-4227-AC2C-A27DCED6AB9F}"/>
+                <a16:creationId xmlns:a16="http://schemas.microsoft.com/office/drawing/2014/main" id="{E9D7CF16-4EF7-4EA4-8CF4-859C8E477B9D}"/>
               </a:ext>
             </a:extLst>
           </p:cNvPr>
@@ -6535,7 +6535,7 @@
           <p:cNvPr id="6" name="recap-circle-0">
             <a:extLst xmlns:a="http://schemas.openxmlformats.org/drawingml/2006/main">
               <a:ext uri="{FF2B5EF4-FFF2-40B4-BE49-F238E27FC236}">
-                <a16:creationId xmlns:a16="http://schemas.microsoft.com/office/drawing/2014/main" id="{2A20EB8D-6C02-4384-9F70-38B0700EF420}"/>
+                <a16:creationId xmlns:a16="http://schemas.microsoft.com/office/drawing/2014/main" id="{B93932C7-01AA-489F-89D9-E5ACAD165000}"/>
               </a:ext>
             </a:extLst>
           </p:cNvPr>
@@ -6568,7 +6568,7 @@
           <p:cNvPr id="7" name="recap-number-0">
             <a:extLst xmlns:a="http://schemas.openxmlformats.org/drawingml/2006/main">
               <a:ext uri="{FF2B5EF4-FFF2-40B4-BE49-F238E27FC236}">
-                <a16:creationId xmlns:a16="http://schemas.microsoft.com/office/drawing/2014/main" id="{4838160B-ACA7-4D6B-8D83-F0CB4E189B5F}"/>
+                <a16:creationId xmlns:a16="http://schemas.microsoft.com/office/drawing/2014/main" id="{36FE6D97-8F20-41D2-845C-FD4EEEEAED32}"/>
               </a:ext>
             </a:extLst>
           </p:cNvPr>
@@ -6626,7 +6626,7 @@
           <p:cNvPr id="8" name="recap-item-0">
             <a:extLst xmlns:a="http://schemas.openxmlformats.org/drawingml/2006/main">
               <a:ext uri="{FF2B5EF4-FFF2-40B4-BE49-F238E27FC236}">
-                <a16:creationId xmlns:a16="http://schemas.microsoft.com/office/drawing/2014/main" id="{CBECAD82-AF1F-41A3-AC8E-B34F8CBF2ABC}"/>
+                <a16:creationId xmlns:a16="http://schemas.microsoft.com/office/drawing/2014/main" id="{64EB9E0A-C858-4571-9B4C-A228374AB530}"/>
               </a:ext>
             </a:extLst>
           </p:cNvPr>
@@ -6690,7 +6690,7 @@
           <p:cNvPr id="9" name="recap-connector-0">
             <a:extLst xmlns:a="http://schemas.openxmlformats.org/drawingml/2006/main">
               <a:ext uri="{FF2B5EF4-FFF2-40B4-BE49-F238E27FC236}">
-                <a16:creationId xmlns:a16="http://schemas.microsoft.com/office/drawing/2014/main" id="{B96598DF-DDD1-486B-8C25-B0993602ACDA}"/>
+                <a16:creationId xmlns:a16="http://schemas.microsoft.com/office/drawing/2014/main" id="{BF3F56C4-59F9-4E70-A019-92431725960F}"/>
               </a:ext>
             </a:extLst>
           </p:cNvPr>
@@ -6721,7 +6721,7 @@
           <p:cNvPr id="10" name="recap-circle-1">
             <a:extLst xmlns:a="http://schemas.openxmlformats.org/drawingml/2006/main">
               <a:ext uri="{FF2B5EF4-FFF2-40B4-BE49-F238E27FC236}">
-                <a16:creationId xmlns:a16="http://schemas.microsoft.com/office/drawing/2014/main" id="{28CCA344-2E7F-4362-BB99-6994D54F94BD}"/>
+                <a16:creationId xmlns:a16="http://schemas.microsoft.com/office/drawing/2014/main" id="{2187CB4F-0E34-4A83-94DC-DA83EB21D8BB}"/>
               </a:ext>
             </a:extLst>
           </p:cNvPr>
@@ -6754,7 +6754,7 @@
           <p:cNvPr id="11" name="recap-number-1">
             <a:extLst xmlns:a="http://schemas.openxmlformats.org/drawingml/2006/main">
               <a:ext uri="{FF2B5EF4-FFF2-40B4-BE49-F238E27FC236}">
-                <a16:creationId xmlns:a16="http://schemas.microsoft.com/office/drawing/2014/main" id="{F932083A-07EE-4ECE-9567-D06AC21B72EC}"/>
+                <a16:creationId xmlns:a16="http://schemas.microsoft.com/office/drawing/2014/main" id="{B1E8468B-89A3-4665-9A15-DCD64085CBD1}"/>
               </a:ext>
             </a:extLst>
           </p:cNvPr>
@@ -6812,7 +6812,7 @@
           <p:cNvPr id="12" name="recap-item-1">
             <a:extLst xmlns:a="http://schemas.openxmlformats.org/drawingml/2006/main">
               <a:ext uri="{FF2B5EF4-FFF2-40B4-BE49-F238E27FC236}">
-                <a16:creationId xmlns:a16="http://schemas.microsoft.com/office/drawing/2014/main" id="{695561D2-0D01-4AF3-9F97-70BF2D65B739}"/>
+                <a16:creationId xmlns:a16="http://schemas.microsoft.com/office/drawing/2014/main" id="{FD1A0384-68DC-4D84-B39D-F5D962E0735C}"/>
               </a:ext>
             </a:extLst>
           </p:cNvPr>
@@ -6876,7 +6876,7 @@
           <p:cNvPr id="13" name="recap-connector-1">
             <a:extLst xmlns:a="http://schemas.openxmlformats.org/drawingml/2006/main">
               <a:ext uri="{FF2B5EF4-FFF2-40B4-BE49-F238E27FC236}">
-                <a16:creationId xmlns:a16="http://schemas.microsoft.com/office/drawing/2014/main" id="{C7052DAA-16F2-41CC-B281-9D753FD768A6}"/>
+                <a16:creationId xmlns:a16="http://schemas.microsoft.com/office/drawing/2014/main" id="{50DF86E3-7CF0-409D-BCF0-9BAE1329CDBA}"/>
               </a:ext>
             </a:extLst>
           </p:cNvPr>
@@ -6907,7 +6907,7 @@
           <p:cNvPr id="14" name="recap-circle-2">
             <a:extLst xmlns:a="http://schemas.openxmlformats.org/drawingml/2006/main">
               <a:ext uri="{FF2B5EF4-FFF2-40B4-BE49-F238E27FC236}">
-                <a16:creationId xmlns:a16="http://schemas.microsoft.com/office/drawing/2014/main" id="{6C33C299-426A-42B0-9E3B-CC43C355EF27}"/>
+                <a16:creationId xmlns:a16="http://schemas.microsoft.com/office/drawing/2014/main" id="{3DAC3D23-69D1-47A6-96FB-E2BBCA8969DC}"/>
               </a:ext>
             </a:extLst>
           </p:cNvPr>
@@ -6940,7 +6940,7 @@
           <p:cNvPr id="15" name="recap-number-2">
             <a:extLst xmlns:a="http://schemas.openxmlformats.org/drawingml/2006/main">
               <a:ext uri="{FF2B5EF4-FFF2-40B4-BE49-F238E27FC236}">
-                <a16:creationId xmlns:a16="http://schemas.microsoft.com/office/drawing/2014/main" id="{5F48A1CF-D89F-4290-B3E7-6082F1E7D1CD}"/>
+                <a16:creationId xmlns:a16="http://schemas.microsoft.com/office/drawing/2014/main" id="{8B775102-4A0C-472F-9F94-7FEB0F49B37C}"/>
               </a:ext>
             </a:extLst>
           </p:cNvPr>
@@ -6998,7 +6998,7 @@
           <p:cNvPr id="16" name="recap-item-2">
             <a:extLst xmlns:a="http://schemas.openxmlformats.org/drawingml/2006/main">
               <a:ext uri="{FF2B5EF4-FFF2-40B4-BE49-F238E27FC236}">
-                <a16:creationId xmlns:a16="http://schemas.microsoft.com/office/drawing/2014/main" id="{5FA4B8D1-6C21-4AE6-8A7F-8DD4E77104EA}"/>
+                <a16:creationId xmlns:a16="http://schemas.microsoft.com/office/drawing/2014/main" id="{D391EA20-C0DB-412F-8437-F00A86FDF5E1}"/>
               </a:ext>
             </a:extLst>
           </p:cNvPr>
@@ -7060,7 +7060,7 @@
     </p:spTree>
     <p:extLst>
       <p:ext uri="{BB962C8B-B14F-4D97-AF65-F5344CB8AC3E}">
-        <p14:creationId xmlns:p14="http://schemas.microsoft.com/office/powerpoint/2010/main" val="822947484"/>
+        <p14:creationId xmlns:p14="http://schemas.microsoft.com/office/powerpoint/2010/main" val="1075972647"/>
       </p:ext>
     </p:extLst>
   </p:cSld>
@@ -7091,7 +7091,7 @@
           <p:cNvPr id="1" name="s9-rule">
             <a:extLst xmlns:a="http://schemas.openxmlformats.org/drawingml/2006/main">
               <a:ext uri="{FF2B5EF4-FFF2-40B4-BE49-F238E27FC236}">
-                <a16:creationId xmlns:a16="http://schemas.microsoft.com/office/drawing/2014/main" id="{06D1C87D-D5C8-40ED-AA95-7003A04C1169}"/>
+                <a16:creationId xmlns:a16="http://schemas.microsoft.com/office/drawing/2014/main" id="{77ACA562-768C-41FE-B7C4-4ACE4628315E}"/>
               </a:ext>
             </a:extLst>
           </p:cNvPr>
@@ -7124,7 +7124,7 @@
           <p:cNvPr id="2" name="s9-eyebrow">
             <a:extLst xmlns:a="http://schemas.openxmlformats.org/drawingml/2006/main">
               <a:ext uri="{FF2B5EF4-FFF2-40B4-BE49-F238E27FC236}">
-                <a16:creationId xmlns:a16="http://schemas.microsoft.com/office/drawing/2014/main" id="{61BAC0EE-5FBE-47F3-9E3E-0EB6E1AD9EE3}"/>
+                <a16:creationId xmlns:a16="http://schemas.microsoft.com/office/drawing/2014/main" id="{1064A53D-691A-48BF-B706-214D52E3604B}"/>
               </a:ext>
             </a:extLst>
           </p:cNvPr>
@@ -7182,7 +7182,7 @@
           <p:cNvPr id="3" name="s9-title">
             <a:extLst xmlns:a="http://schemas.openxmlformats.org/drawingml/2006/main">
               <a:ext uri="{FF2B5EF4-FFF2-40B4-BE49-F238E27FC236}">
-                <a16:creationId xmlns:a16="http://schemas.microsoft.com/office/drawing/2014/main" id="{D5F3E8A1-FAFF-4664-9F75-09D9FDB641E7}"/>
+                <a16:creationId xmlns:a16="http://schemas.microsoft.com/office/drawing/2014/main" id="{6CDE2082-6F70-47D6-BD21-3CDB7F5CA902}"/>
               </a:ext>
             </a:extLst>
           </p:cNvPr>
@@ -7240,7 +7240,7 @@
           <p:cNvPr id="4" name="s9-footer">
             <a:extLst xmlns:a="http://schemas.openxmlformats.org/drawingml/2006/main">
               <a:ext uri="{FF2B5EF4-FFF2-40B4-BE49-F238E27FC236}">
-                <a16:creationId xmlns:a16="http://schemas.microsoft.com/office/drawing/2014/main" id="{F9B52022-C499-4984-921B-6D56DB6F76B5}"/>
+                <a16:creationId xmlns:a16="http://schemas.microsoft.com/office/drawing/2014/main" id="{1133FD1D-B72B-43F5-88B8-75B6A0773163}"/>
               </a:ext>
             </a:extLst>
           </p:cNvPr>
@@ -7271,7 +7271,7 @@
           <p:cNvPr id="5" name="s9-identity">
             <a:extLst xmlns:a="http://schemas.openxmlformats.org/drawingml/2006/main">
               <a:ext uri="{FF2B5EF4-FFF2-40B4-BE49-F238E27FC236}">
-                <a16:creationId xmlns:a16="http://schemas.microsoft.com/office/drawing/2014/main" id="{F8E9B7FF-15BB-4216-BDE4-05BFBB153E4D}"/>
+                <a16:creationId xmlns:a16="http://schemas.microsoft.com/office/drawing/2014/main" id="{4BD8C1EC-95E4-4644-AF3F-59485F7C2B0F}"/>
               </a:ext>
             </a:extLst>
           </p:cNvPr>
@@ -7329,7 +7329,7 @@
           <p:cNvPr id="6" name="source-0">
             <a:extLst xmlns:a="http://schemas.openxmlformats.org/drawingml/2006/main">
               <a:ext uri="{FF2B5EF4-FFF2-40B4-BE49-F238E27FC236}">
-                <a16:creationId xmlns:a16="http://schemas.microsoft.com/office/drawing/2014/main" id="{4B62DE9C-2BC0-4D51-B3CA-8077D6677917}"/>
+                <a16:creationId xmlns:a16="http://schemas.microsoft.com/office/drawing/2014/main" id="{68797894-1A6E-4D5D-8079-DF81EB4F42B2}"/>
               </a:ext>
             </a:extLst>
           </p:cNvPr>
@@ -7393,7 +7393,7 @@
           <p:cNvPr id="7" name="source-1">
             <a:extLst xmlns:a="http://schemas.openxmlformats.org/drawingml/2006/main">
               <a:ext uri="{FF2B5EF4-FFF2-40B4-BE49-F238E27FC236}">
-                <a16:creationId xmlns:a16="http://schemas.microsoft.com/office/drawing/2014/main" id="{69C52EEA-0140-43A5-A574-247F4ED9D4D3}"/>
+                <a16:creationId xmlns:a16="http://schemas.microsoft.com/office/drawing/2014/main" id="{39315468-270A-4F75-A4E3-66EE5440A509}"/>
               </a:ext>
             </a:extLst>
           </p:cNvPr>
@@ -7457,7 +7457,7 @@
           <p:cNvPr id="8" name="source-2">
             <a:extLst xmlns:a="http://schemas.openxmlformats.org/drawingml/2006/main">
               <a:ext uri="{FF2B5EF4-FFF2-40B4-BE49-F238E27FC236}">
-                <a16:creationId xmlns:a16="http://schemas.microsoft.com/office/drawing/2014/main" id="{001ED44F-66C7-40FB-AB40-6201C101565A}"/>
+                <a16:creationId xmlns:a16="http://schemas.microsoft.com/office/drawing/2014/main" id="{FC832BEE-5A98-4959-B1F9-4B7D45F724A6}"/>
               </a:ext>
             </a:extLst>
           </p:cNvPr>
@@ -7521,7 +7521,7 @@
           <p:cNvPr id="9" name="source-3">
             <a:extLst xmlns:a="http://schemas.openxmlformats.org/drawingml/2006/main">
               <a:ext uri="{FF2B5EF4-FFF2-40B4-BE49-F238E27FC236}">
-                <a16:creationId xmlns:a16="http://schemas.microsoft.com/office/drawing/2014/main" id="{B89A7138-176E-4603-8545-933CBEB1E4D5}"/>
+                <a16:creationId xmlns:a16="http://schemas.microsoft.com/office/drawing/2014/main" id="{FC902B01-AB47-4A33-A2A2-171771F04923}"/>
               </a:ext>
             </a:extLst>
           </p:cNvPr>
@@ -7585,7 +7585,7 @@
           <p:cNvPr id="10" name="source-4">
             <a:extLst xmlns:a="http://schemas.openxmlformats.org/drawingml/2006/main">
               <a:ext uri="{FF2B5EF4-FFF2-40B4-BE49-F238E27FC236}">
-                <a16:creationId xmlns:a16="http://schemas.microsoft.com/office/drawing/2014/main" id="{455349A8-4EA6-471A-B16A-5814AFC893F9}"/>
+                <a16:creationId xmlns:a16="http://schemas.microsoft.com/office/drawing/2014/main" id="{1641EBCD-BC2D-439F-B836-34B49F682940}"/>
               </a:ext>
             </a:extLst>
           </p:cNvPr>
@@ -7649,7 +7649,7 @@
           <p:cNvPr id="11" name="s9-takeaway-rule">
             <a:extLst xmlns:a="http://schemas.openxmlformats.org/drawingml/2006/main">
               <a:ext uri="{FF2B5EF4-FFF2-40B4-BE49-F238E27FC236}">
-                <a16:creationId xmlns:a16="http://schemas.microsoft.com/office/drawing/2014/main" id="{7840200C-655D-4319-B04F-2C73E833429E}"/>
+                <a16:creationId xmlns:a16="http://schemas.microsoft.com/office/drawing/2014/main" id="{E756ECB7-7FED-472D-ABC2-464A17F1DBCA}"/>
               </a:ext>
             </a:extLst>
           </p:cNvPr>
@@ -7682,7 +7682,7 @@
           <p:cNvPr id="12" name="s9-takeaway">
             <a:extLst xmlns:a="http://schemas.openxmlformats.org/drawingml/2006/main">
               <a:ext uri="{FF2B5EF4-FFF2-40B4-BE49-F238E27FC236}">
-                <a16:creationId xmlns:a16="http://schemas.microsoft.com/office/drawing/2014/main" id="{35F1E2FE-CB45-4BB6-9DDC-9DBCB6D86531}"/>
+                <a16:creationId xmlns:a16="http://schemas.microsoft.com/office/drawing/2014/main" id="{DAA2A834-077A-4C0F-BB68-D26377916C02}"/>
               </a:ext>
             </a:extLst>
           </p:cNvPr>
@@ -7707,7 +7707,7 @@
         </p:spPr>
         <p:txBody>
           <a:bodyPr xmlns:a="http://schemas.openxmlformats.org/drawingml/2006/main" lIns="0" tIns="0" rIns="0" bIns="0" anchor="ctr">
-            <a:normAutofit fontScale="100000"/>
+            <a:normAutofit fontScale="95911"/>
           </a:bodyPr>
           <a:lstStyle xmlns:a="http://schemas.openxmlformats.org/drawingml/2006/main"/>
           <a:p xmlns:a="http://schemas.openxmlformats.org/drawingml/2006/main">
@@ -7730,7 +7730,7 @@
                 <a:ea typeface="PingFang SC"/>
                 <a:cs typeface="PingFang SC"/>
               </a:rPr>
-              <a:t>公开幻灯片只使用课程原创文字与原生图形；完整论证、链接和事实边界请见本节讲义。</a:t>
+              <a:t>课程精编页用于讲授主线；播放器中的“原课件”模式保留团队 PowerPoint 精选页、真实图片和可播放视频。</a:t>
             </a:r>
           </a:p>
         </p:txBody>
@@ -7738,7 +7738,7 @@
     </p:spTree>
     <p:extLst>
       <p:ext uri="{BB962C8B-B14F-4D97-AF65-F5344CB8AC3E}">
-        <p14:creationId xmlns:p14="http://schemas.microsoft.com/office/powerpoint/2010/main" val="246934524"/>
+        <p14:creationId xmlns:p14="http://schemas.microsoft.com/office/powerpoint/2010/main" val="1454402398"/>
       </p:ext>
     </p:extLst>
   </p:cSld>

--- a/docs/public/course-assets/course-pptx/ov-002.pptx
+++ b/docs/public/course-assets/course-pptx/ov-002.pptx
@@ -2,21 +2,21 @@
 <file path=ppt/presentation.xml><?xml version="1.0" encoding="utf-8"?>
 <p:presentation xmlns:p="http://schemas.openxmlformats.org/presentationml/2006/main">
   <p:sldMasterIdLst>
-    <p:sldMasterId xmlns:r="http://schemas.openxmlformats.org/officeDocument/2006/relationships" id="2147483648" r:id="R7b118443f1cf4bf6"/>
+    <p:sldMasterId xmlns:r="http://schemas.openxmlformats.org/officeDocument/2006/relationships" id="2147483648" r:id="Rd920ffb31567432e"/>
   </p:sldMasterIdLst>
   <p:notesMasterIdLst>
-    <p:notesMasterId xmlns:r="http://schemas.openxmlformats.org/officeDocument/2006/relationships" r:id="R02617e6fdc5e4cec"/>
+    <p:notesMasterId xmlns:r="http://schemas.openxmlformats.org/officeDocument/2006/relationships" r:id="Rdf62e62d59b74d00"/>
   </p:notesMasterIdLst>
   <p:sldIdLst>
-    <p:sldId xmlns:r="http://schemas.openxmlformats.org/officeDocument/2006/relationships" id="256" r:id="R29faa152bf554e25"/>
-    <p:sldId xmlns:r="http://schemas.openxmlformats.org/officeDocument/2006/relationships" id="257" r:id="R9b7d2b7bfe204b15"/>
-    <p:sldId xmlns:r="http://schemas.openxmlformats.org/officeDocument/2006/relationships" id="258" r:id="R84440a58a64d4f84"/>
-    <p:sldId xmlns:r="http://schemas.openxmlformats.org/officeDocument/2006/relationships" id="259" r:id="R3ad69f0eeaf84073"/>
-    <p:sldId xmlns:r="http://schemas.openxmlformats.org/officeDocument/2006/relationships" id="260" r:id="Rb85b0ccdae2747ba"/>
-    <p:sldId xmlns:r="http://schemas.openxmlformats.org/officeDocument/2006/relationships" id="261" r:id="R1ff08110ffe6472b"/>
-    <p:sldId xmlns:r="http://schemas.openxmlformats.org/officeDocument/2006/relationships" id="262" r:id="R0f1310a479ab4bb4"/>
-    <p:sldId xmlns:r="http://schemas.openxmlformats.org/officeDocument/2006/relationships" id="263" r:id="Rea1d52b666394104"/>
-    <p:sldId xmlns:r="http://schemas.openxmlformats.org/officeDocument/2006/relationships" id="264" r:id="Rb23d930b56c84cec"/>
+    <p:sldId xmlns:r="http://schemas.openxmlformats.org/officeDocument/2006/relationships" id="256" r:id="R08be0c1b04d74455"/>
+    <p:sldId xmlns:r="http://schemas.openxmlformats.org/officeDocument/2006/relationships" id="257" r:id="R0d07ffa7353f48a9"/>
+    <p:sldId xmlns:r="http://schemas.openxmlformats.org/officeDocument/2006/relationships" id="258" r:id="R342e619ffa7e4a94"/>
+    <p:sldId xmlns:r="http://schemas.openxmlformats.org/officeDocument/2006/relationships" id="259" r:id="R346d04eba1ba4fcb"/>
+    <p:sldId xmlns:r="http://schemas.openxmlformats.org/officeDocument/2006/relationships" id="260" r:id="Ra25ae87ea01f4db0"/>
+    <p:sldId xmlns:r="http://schemas.openxmlformats.org/officeDocument/2006/relationships" id="261" r:id="R82737b8b450041e0"/>
+    <p:sldId xmlns:r="http://schemas.openxmlformats.org/officeDocument/2006/relationships" id="262" r:id="R18843ccfa8f9499c"/>
+    <p:sldId xmlns:r="http://schemas.openxmlformats.org/officeDocument/2006/relationships" id="263" r:id="Rea5618bc15ca4803"/>
+    <p:sldId xmlns:r="http://schemas.openxmlformats.org/officeDocument/2006/relationships" id="264" r:id="Rcf96fabdbaec4f5e"/>
   </p:sldIdLst>
   <p:sldSz cx="12192000" cy="6858000"/>
   <p:notesSz cx="6858000" cy="9144000"/>
@@ -1137,7 +1137,7 @@
   </p:cSld>
   <p:clrMap bg1="lt1" tx1="dk1" bg2="lt2" tx2="dk2" accent1="accent1" accent2="accent2" accent3="accent3" accent4="accent4" accent5="accent5" accent6="accent6" hlink="hlink" folHlink="folHlink"/>
   <p:sldLayoutIdLst>
-    <p:sldLayoutId xmlns:r="http://schemas.openxmlformats.org/officeDocument/2006/relationships" id="2147483649" r:id="Rc452a9adfe2548aa"/>
+    <p:sldLayoutId xmlns:r="http://schemas.openxmlformats.org/officeDocument/2006/relationships" id="2147483649" r:id="Rbb6ac37018bd42bd"/>
   </p:sldLayoutIdLst>
   <p:txStyles>
     <p:titleStyle>
@@ -1688,7 +1688,7 @@
           <p:cNvPr id="1" name="cover-rule">
             <a:extLst xmlns:a="http://schemas.openxmlformats.org/drawingml/2006/main">
               <a:ext uri="{FF2B5EF4-FFF2-40B4-BE49-F238E27FC236}">
-                <a16:creationId xmlns:a16="http://schemas.microsoft.com/office/drawing/2014/main" id="{E6F905E1-29D9-4D5A-BD70-E54E3044646B}"/>
+                <a16:creationId xmlns:a16="http://schemas.microsoft.com/office/drawing/2014/main" id="{56E2385B-3F8D-4002-8739-CB1EA6558270}"/>
               </a:ext>
             </a:extLst>
           </p:cNvPr>
@@ -1721,7 +1721,7 @@
           <p:cNvPr id="2" name="cover-ring-1">
             <a:extLst xmlns:a="http://schemas.openxmlformats.org/drawingml/2006/main">
               <a:ext uri="{FF2B5EF4-FFF2-40B4-BE49-F238E27FC236}">
-                <a16:creationId xmlns:a16="http://schemas.microsoft.com/office/drawing/2014/main" id="{A5DD83C6-12FF-44FC-B82E-4222298BF6E4}"/>
+                <a16:creationId xmlns:a16="http://schemas.microsoft.com/office/drawing/2014/main" id="{15C1FC97-0B0D-4556-96E9-C9EB883EEC06}"/>
               </a:ext>
             </a:extLst>
           </p:cNvPr>
@@ -1752,7 +1752,7 @@
           <p:cNvPr id="3" name="cover-ring-2">
             <a:extLst xmlns:a="http://schemas.openxmlformats.org/drawingml/2006/main">
               <a:ext uri="{FF2B5EF4-FFF2-40B4-BE49-F238E27FC236}">
-                <a16:creationId xmlns:a16="http://schemas.microsoft.com/office/drawing/2014/main" id="{665C1A00-A9DC-45B7-95B5-682DB0DB50F4}"/>
+                <a16:creationId xmlns:a16="http://schemas.microsoft.com/office/drawing/2014/main" id="{90E21293-F637-4973-926D-C5792DB56A13}"/>
               </a:ext>
             </a:extLst>
           </p:cNvPr>
@@ -1783,7 +1783,7 @@
           <p:cNvPr id="4" name="cover-core">
             <a:extLst xmlns:a="http://schemas.openxmlformats.org/drawingml/2006/main">
               <a:ext uri="{FF2B5EF4-FFF2-40B4-BE49-F238E27FC236}">
-                <a16:creationId xmlns:a16="http://schemas.microsoft.com/office/drawing/2014/main" id="{7DBF3538-EFD2-4013-B9F6-2E651E7FD125}"/>
+                <a16:creationId xmlns:a16="http://schemas.microsoft.com/office/drawing/2014/main" id="{8DAA5F70-96AC-4E85-8C58-253D27230BE2}"/>
               </a:ext>
             </a:extLst>
           </p:cNvPr>
@@ -1816,7 +1816,7 @@
           <p:cNvPr id="5" name="cover-line-1">
             <a:extLst xmlns:a="http://schemas.openxmlformats.org/drawingml/2006/main">
               <a:ext uri="{FF2B5EF4-FFF2-40B4-BE49-F238E27FC236}">
-                <a16:creationId xmlns:a16="http://schemas.microsoft.com/office/drawing/2014/main" id="{1FFFEAB7-F3C1-4D44-8AAB-D2465DF9D47C}"/>
+                <a16:creationId xmlns:a16="http://schemas.microsoft.com/office/drawing/2014/main" id="{E40E2F85-CA22-44CC-9936-2ED11431DBAF}"/>
               </a:ext>
             </a:extLst>
           </p:cNvPr>
@@ -1847,7 +1847,7 @@
           <p:cNvPr id="6" name="cover-line-2">
             <a:extLst xmlns:a="http://schemas.openxmlformats.org/drawingml/2006/main">
               <a:ext uri="{FF2B5EF4-FFF2-40B4-BE49-F238E27FC236}">
-                <a16:creationId xmlns:a16="http://schemas.microsoft.com/office/drawing/2014/main" id="{C7DB8E7C-48DE-4CC9-A29C-8D7A8CCA766F}"/>
+                <a16:creationId xmlns:a16="http://schemas.microsoft.com/office/drawing/2014/main" id="{E48962AA-A49B-4A55-A26B-CB1325090B15}"/>
               </a:ext>
             </a:extLst>
           </p:cNvPr>
@@ -1878,7 +1878,7 @@
           <p:cNvPr id="7" name="cover-eyebrow">
             <a:extLst xmlns:a="http://schemas.openxmlformats.org/drawingml/2006/main">
               <a:ext uri="{FF2B5EF4-FFF2-40B4-BE49-F238E27FC236}">
-                <a16:creationId xmlns:a16="http://schemas.microsoft.com/office/drawing/2014/main" id="{95BC642E-030A-4B36-B189-1CEE459B5083}"/>
+                <a16:creationId xmlns:a16="http://schemas.microsoft.com/office/drawing/2014/main" id="{668C250E-26D0-4C02-92BA-3076199B8AAB}"/>
               </a:ext>
             </a:extLst>
           </p:cNvPr>
@@ -1936,7 +1936,7 @@
           <p:cNvPr id="8" name="cover-title">
             <a:extLst xmlns:a="http://schemas.openxmlformats.org/drawingml/2006/main">
               <a:ext uri="{FF2B5EF4-FFF2-40B4-BE49-F238E27FC236}">
-                <a16:creationId xmlns:a16="http://schemas.microsoft.com/office/drawing/2014/main" id="{FE60E940-7E79-45D7-95CC-9CE02045EDDB}"/>
+                <a16:creationId xmlns:a16="http://schemas.microsoft.com/office/drawing/2014/main" id="{2237B92E-8D69-458D-BB39-378E1C32E315}"/>
               </a:ext>
             </a:extLst>
           </p:cNvPr>
@@ -1994,7 +1994,7 @@
           <p:cNvPr id="9" name="cover-subtitle">
             <a:extLst xmlns:a="http://schemas.openxmlformats.org/drawingml/2006/main">
               <a:ext uri="{FF2B5EF4-FFF2-40B4-BE49-F238E27FC236}">
-                <a16:creationId xmlns:a16="http://schemas.microsoft.com/office/drawing/2014/main" id="{50C5B2D1-C135-4D68-981E-27B54CC6C07C}"/>
+                <a16:creationId xmlns:a16="http://schemas.microsoft.com/office/drawing/2014/main" id="{59FA47B4-004D-41D9-B969-6365B0445091}"/>
               </a:ext>
             </a:extLst>
           </p:cNvPr>
@@ -2056,7 +2056,7 @@
           <p:cNvPr id="10" name="cover-lead">
             <a:extLst xmlns:a="http://schemas.openxmlformats.org/drawingml/2006/main">
               <a:ext uri="{FF2B5EF4-FFF2-40B4-BE49-F238E27FC236}">
-                <a16:creationId xmlns:a16="http://schemas.microsoft.com/office/drawing/2014/main" id="{C72DE464-3C8A-423D-824A-B542CE320DD4}"/>
+                <a16:creationId xmlns:a16="http://schemas.microsoft.com/office/drawing/2014/main" id="{85D1DE30-FC35-457E-9048-905205B1077A}"/>
               </a:ext>
             </a:extLst>
           </p:cNvPr>
@@ -2114,7 +2114,7 @@
           <p:cNvPr id="11" name="cover-course">
             <a:extLst xmlns:a="http://schemas.openxmlformats.org/drawingml/2006/main">
               <a:ext uri="{FF2B5EF4-FFF2-40B4-BE49-F238E27FC236}">
-                <a16:creationId xmlns:a16="http://schemas.microsoft.com/office/drawing/2014/main" id="{5C9B61F9-B0F6-4B90-AB10-DC8F4D7E3901}"/>
+                <a16:creationId xmlns:a16="http://schemas.microsoft.com/office/drawing/2014/main" id="{D8C5924D-8591-4F5D-BE3E-4F0FF4CA2734}"/>
               </a:ext>
             </a:extLst>
           </p:cNvPr>
@@ -2172,7 +2172,7 @@
           <p:cNvPr id="12" name="cover-id">
             <a:extLst xmlns:a="http://schemas.openxmlformats.org/drawingml/2006/main">
               <a:ext uri="{FF2B5EF4-FFF2-40B4-BE49-F238E27FC236}">
-                <a16:creationId xmlns:a16="http://schemas.microsoft.com/office/drawing/2014/main" id="{319481D4-0BAC-4629-9EE0-15E7318B26E1}"/>
+                <a16:creationId xmlns:a16="http://schemas.microsoft.com/office/drawing/2014/main" id="{271C2C0B-26F5-45C3-9F84-26DCFA566FA8}"/>
               </a:ext>
             </a:extLst>
           </p:cNvPr>
@@ -2228,7 +2228,7 @@
     </p:spTree>
     <p:extLst>
       <p:ext uri="{BB962C8B-B14F-4D97-AF65-F5344CB8AC3E}">
-        <p14:creationId xmlns:p14="http://schemas.microsoft.com/office/powerpoint/2010/main" val="1040312106"/>
+        <p14:creationId xmlns:p14="http://schemas.microsoft.com/office/powerpoint/2010/main" val="605736211"/>
       </p:ext>
     </p:extLst>
   </p:cSld>
@@ -2259,7 +2259,7 @@
           <p:cNvPr id="1" name="s2-rule">
             <a:extLst xmlns:a="http://schemas.openxmlformats.org/drawingml/2006/main">
               <a:ext uri="{FF2B5EF4-FFF2-40B4-BE49-F238E27FC236}">
-                <a16:creationId xmlns:a16="http://schemas.microsoft.com/office/drawing/2014/main" id="{74B2AB2B-BE58-422F-83B0-CBC73780EB36}"/>
+                <a16:creationId xmlns:a16="http://schemas.microsoft.com/office/drawing/2014/main" id="{35EF5CB0-0408-4069-A1AE-E68AC3EB95A6}"/>
               </a:ext>
             </a:extLst>
           </p:cNvPr>
@@ -2292,7 +2292,7 @@
           <p:cNvPr id="2" name="s2-eyebrow">
             <a:extLst xmlns:a="http://schemas.openxmlformats.org/drawingml/2006/main">
               <a:ext uri="{FF2B5EF4-FFF2-40B4-BE49-F238E27FC236}">
-                <a16:creationId xmlns:a16="http://schemas.microsoft.com/office/drawing/2014/main" id="{AB60FA77-2790-4D8A-9075-C90EF85A6EC0}"/>
+                <a16:creationId xmlns:a16="http://schemas.microsoft.com/office/drawing/2014/main" id="{6C822718-D772-42EC-B3EF-7ED4E493D780}"/>
               </a:ext>
             </a:extLst>
           </p:cNvPr>
@@ -2350,7 +2350,7 @@
           <p:cNvPr id="3" name="s2-title">
             <a:extLst xmlns:a="http://schemas.openxmlformats.org/drawingml/2006/main">
               <a:ext uri="{FF2B5EF4-FFF2-40B4-BE49-F238E27FC236}">
-                <a16:creationId xmlns:a16="http://schemas.microsoft.com/office/drawing/2014/main" id="{E9357A26-5D3E-45FB-9E29-32DDA70D983B}"/>
+                <a16:creationId xmlns:a16="http://schemas.microsoft.com/office/drawing/2014/main" id="{3B333D5E-086C-4576-826F-F4D8BD427AE9}"/>
               </a:ext>
             </a:extLst>
           </p:cNvPr>
@@ -2408,7 +2408,7 @@
           <p:cNvPr id="4" name="s2-footer">
             <a:extLst xmlns:a="http://schemas.openxmlformats.org/drawingml/2006/main">
               <a:ext uri="{FF2B5EF4-FFF2-40B4-BE49-F238E27FC236}">
-                <a16:creationId xmlns:a16="http://schemas.microsoft.com/office/drawing/2014/main" id="{554D309D-5960-4B75-82A0-933A1974C734}"/>
+                <a16:creationId xmlns:a16="http://schemas.microsoft.com/office/drawing/2014/main" id="{0603959A-886A-43A8-9656-0D31DEECEC43}"/>
               </a:ext>
             </a:extLst>
           </p:cNvPr>
@@ -2439,7 +2439,7 @@
           <p:cNvPr id="5" name="s2-identity">
             <a:extLst xmlns:a="http://schemas.openxmlformats.org/drawingml/2006/main">
               <a:ext uri="{FF2B5EF4-FFF2-40B4-BE49-F238E27FC236}">
-                <a16:creationId xmlns:a16="http://schemas.microsoft.com/office/drawing/2014/main" id="{A9676FEE-95E4-40EC-B4C5-1C0AAEA7851F}"/>
+                <a16:creationId xmlns:a16="http://schemas.microsoft.com/office/drawing/2014/main" id="{97D97A32-5560-4AA8-BE41-738DB4CBA5E8}"/>
               </a:ext>
             </a:extLst>
           </p:cNvPr>
@@ -2497,7 +2497,7 @@
           <p:cNvPr id="6" name="objective-1">
             <a:extLst xmlns:a="http://schemas.openxmlformats.org/drawingml/2006/main">
               <a:ext uri="{FF2B5EF4-FFF2-40B4-BE49-F238E27FC236}">
-                <a16:creationId xmlns:a16="http://schemas.microsoft.com/office/drawing/2014/main" id="{BDB90304-3D8F-4BB7-BA8E-C454E8BFA88C}"/>
+                <a16:creationId xmlns:a16="http://schemas.microsoft.com/office/drawing/2014/main" id="{A35A4522-03D9-46EE-A5D7-9050FF9FA00A}"/>
               </a:ext>
             </a:extLst>
           </p:cNvPr>
@@ -2584,7 +2584,7 @@
           <p:cNvPr id="7" name="objective-2">
             <a:extLst xmlns:a="http://schemas.openxmlformats.org/drawingml/2006/main">
               <a:ext uri="{FF2B5EF4-FFF2-40B4-BE49-F238E27FC236}">
-                <a16:creationId xmlns:a16="http://schemas.microsoft.com/office/drawing/2014/main" id="{F74825B7-E3EA-4A91-BD9F-EC483DAD89CD}"/>
+                <a16:creationId xmlns:a16="http://schemas.microsoft.com/office/drawing/2014/main" id="{4830347B-F1F9-4778-84B4-11D089C02BE7}"/>
               </a:ext>
             </a:extLst>
           </p:cNvPr>
@@ -2671,7 +2671,7 @@
           <p:cNvPr id="8" name="objective-3">
             <a:extLst xmlns:a="http://schemas.openxmlformats.org/drawingml/2006/main">
               <a:ext uri="{FF2B5EF4-FFF2-40B4-BE49-F238E27FC236}">
-                <a16:creationId xmlns:a16="http://schemas.microsoft.com/office/drawing/2014/main" id="{D5B3E96F-AAD5-40E5-9B0F-D4613934972A}"/>
+                <a16:creationId xmlns:a16="http://schemas.microsoft.com/office/drawing/2014/main" id="{E5FC074C-C5E4-4E50-80FC-A27BB8A0F359}"/>
               </a:ext>
             </a:extLst>
           </p:cNvPr>
@@ -2756,7 +2756,7 @@
     </p:spTree>
     <p:extLst>
       <p:ext uri="{BB962C8B-B14F-4D97-AF65-F5344CB8AC3E}">
-        <p14:creationId xmlns:p14="http://schemas.microsoft.com/office/powerpoint/2010/main" val="233777403"/>
+        <p14:creationId xmlns:p14="http://schemas.microsoft.com/office/powerpoint/2010/main" val="204560105"/>
       </p:ext>
     </p:extLst>
   </p:cSld>
@@ -2787,7 +2787,7 @@
           <p:cNvPr id="1" name="s3-rule">
             <a:extLst xmlns:a="http://schemas.openxmlformats.org/drawingml/2006/main">
               <a:ext uri="{FF2B5EF4-FFF2-40B4-BE49-F238E27FC236}">
-                <a16:creationId xmlns:a16="http://schemas.microsoft.com/office/drawing/2014/main" id="{20142B73-7498-49CC-BFEE-ED131E8FF47E}"/>
+                <a16:creationId xmlns:a16="http://schemas.microsoft.com/office/drawing/2014/main" id="{459341F3-5696-4043-861A-FE0A29698072}"/>
               </a:ext>
             </a:extLst>
           </p:cNvPr>
@@ -2820,7 +2820,7 @@
           <p:cNvPr id="2" name="s3-eyebrow">
             <a:extLst xmlns:a="http://schemas.openxmlformats.org/drawingml/2006/main">
               <a:ext uri="{FF2B5EF4-FFF2-40B4-BE49-F238E27FC236}">
-                <a16:creationId xmlns:a16="http://schemas.microsoft.com/office/drawing/2014/main" id="{E2CD09C0-65FB-44E8-9901-D96EE0ADDB60}"/>
+                <a16:creationId xmlns:a16="http://schemas.microsoft.com/office/drawing/2014/main" id="{D4F9DCA9-9EC7-4760-A850-C74A12403380}"/>
               </a:ext>
             </a:extLst>
           </p:cNvPr>
@@ -2878,7 +2878,7 @@
           <p:cNvPr id="3" name="s3-title">
             <a:extLst xmlns:a="http://schemas.openxmlformats.org/drawingml/2006/main">
               <a:ext uri="{FF2B5EF4-FFF2-40B4-BE49-F238E27FC236}">
-                <a16:creationId xmlns:a16="http://schemas.microsoft.com/office/drawing/2014/main" id="{0E9729CD-3AEE-4FE7-9849-D30422C4812C}"/>
+                <a16:creationId xmlns:a16="http://schemas.microsoft.com/office/drawing/2014/main" id="{D0FDFC89-0954-47D7-B3FE-741A174A2E8F}"/>
               </a:ext>
             </a:extLst>
           </p:cNvPr>
@@ -2936,7 +2936,7 @@
           <p:cNvPr id="4" name="s3-footer">
             <a:extLst xmlns:a="http://schemas.openxmlformats.org/drawingml/2006/main">
               <a:ext uri="{FF2B5EF4-FFF2-40B4-BE49-F238E27FC236}">
-                <a16:creationId xmlns:a16="http://schemas.microsoft.com/office/drawing/2014/main" id="{509A2D63-2EFB-42D0-A6C1-5347091CF440}"/>
+                <a16:creationId xmlns:a16="http://schemas.microsoft.com/office/drawing/2014/main" id="{67DFAB19-BABA-4D5E-AECB-39C7B9C6CCAA}"/>
               </a:ext>
             </a:extLst>
           </p:cNvPr>
@@ -2967,7 +2967,7 @@
           <p:cNvPr id="5" name="s3-identity">
             <a:extLst xmlns:a="http://schemas.openxmlformats.org/drawingml/2006/main">
               <a:ext uri="{FF2B5EF4-FFF2-40B4-BE49-F238E27FC236}">
-                <a16:creationId xmlns:a16="http://schemas.microsoft.com/office/drawing/2014/main" id="{8726B9CD-8198-4556-8328-CC82E14B9661}"/>
+                <a16:creationId xmlns:a16="http://schemas.microsoft.com/office/drawing/2014/main" id="{E57B7DBB-3367-4CF8-BEFF-C6B6EF84545A}"/>
               </a:ext>
             </a:extLst>
           </p:cNvPr>
@@ -3025,7 +3025,7 @@
           <p:cNvPr id="6" name="core-no-0">
             <a:extLst xmlns:a="http://schemas.openxmlformats.org/drawingml/2006/main">
               <a:ext uri="{FF2B5EF4-FFF2-40B4-BE49-F238E27FC236}">
-                <a16:creationId xmlns:a16="http://schemas.microsoft.com/office/drawing/2014/main" id="{596A70AC-D15B-4991-973C-5979F863C76E}"/>
+                <a16:creationId xmlns:a16="http://schemas.microsoft.com/office/drawing/2014/main" id="{B4DD0610-61C1-4C71-AF25-19D08AB71FD6}"/>
               </a:ext>
             </a:extLst>
           </p:cNvPr>
@@ -3083,7 +3083,7 @@
           <p:cNvPr id="7" name="core-label-0">
             <a:extLst xmlns:a="http://schemas.openxmlformats.org/drawingml/2006/main">
               <a:ext uri="{FF2B5EF4-FFF2-40B4-BE49-F238E27FC236}">
-                <a16:creationId xmlns:a16="http://schemas.microsoft.com/office/drawing/2014/main" id="{C1EDEE1B-E61A-478C-912A-8B9DB5C9AD0D}"/>
+                <a16:creationId xmlns:a16="http://schemas.microsoft.com/office/drawing/2014/main" id="{89485B77-6195-478C-9B58-BDB0BA834CCC}"/>
               </a:ext>
             </a:extLst>
           </p:cNvPr>
@@ -3141,7 +3141,7 @@
           <p:cNvPr id="8" name="core-body-0">
             <a:extLst xmlns:a="http://schemas.openxmlformats.org/drawingml/2006/main">
               <a:ext uri="{FF2B5EF4-FFF2-40B4-BE49-F238E27FC236}">
-                <a16:creationId xmlns:a16="http://schemas.microsoft.com/office/drawing/2014/main" id="{3B0FF98B-EDCE-49AA-89FF-26D13E7A2F86}"/>
+                <a16:creationId xmlns:a16="http://schemas.microsoft.com/office/drawing/2014/main" id="{2BAF2704-3E88-441A-BC03-FB530EA06272}"/>
               </a:ext>
             </a:extLst>
           </p:cNvPr>
@@ -3205,7 +3205,7 @@
           <p:cNvPr id="9" name="core-no-1">
             <a:extLst xmlns:a="http://schemas.openxmlformats.org/drawingml/2006/main">
               <a:ext uri="{FF2B5EF4-FFF2-40B4-BE49-F238E27FC236}">
-                <a16:creationId xmlns:a16="http://schemas.microsoft.com/office/drawing/2014/main" id="{83C57F52-C997-4BE2-B9A7-EE6DE069B803}"/>
+                <a16:creationId xmlns:a16="http://schemas.microsoft.com/office/drawing/2014/main" id="{CDE1F631-7C76-4C97-83DA-1DC451EDAA20}"/>
               </a:ext>
             </a:extLst>
           </p:cNvPr>
@@ -3263,7 +3263,7 @@
           <p:cNvPr id="10" name="core-body-1">
             <a:extLst xmlns:a="http://schemas.openxmlformats.org/drawingml/2006/main">
               <a:ext uri="{FF2B5EF4-FFF2-40B4-BE49-F238E27FC236}">
-                <a16:creationId xmlns:a16="http://schemas.microsoft.com/office/drawing/2014/main" id="{5BBA33CA-335D-46DA-8F20-CF5BE65A7955}"/>
+                <a16:creationId xmlns:a16="http://schemas.microsoft.com/office/drawing/2014/main" id="{53F9F6AF-FB85-4533-9ED5-D67D03D77375}"/>
               </a:ext>
             </a:extLst>
           </p:cNvPr>
@@ -3327,7 +3327,7 @@
           <p:cNvPr id="11" name="core-no-2">
             <a:extLst xmlns:a="http://schemas.openxmlformats.org/drawingml/2006/main">
               <a:ext uri="{FF2B5EF4-FFF2-40B4-BE49-F238E27FC236}">
-                <a16:creationId xmlns:a16="http://schemas.microsoft.com/office/drawing/2014/main" id="{FCD69A8F-59C2-4558-BEF8-ED69FBB61112}"/>
+                <a16:creationId xmlns:a16="http://schemas.microsoft.com/office/drawing/2014/main" id="{C006D9E7-9389-41FA-BB81-188C73891C7D}"/>
               </a:ext>
             </a:extLst>
           </p:cNvPr>
@@ -3385,7 +3385,7 @@
           <p:cNvPr id="12" name="core-body-2">
             <a:extLst xmlns:a="http://schemas.openxmlformats.org/drawingml/2006/main">
               <a:ext uri="{FF2B5EF4-FFF2-40B4-BE49-F238E27FC236}">
-                <a16:creationId xmlns:a16="http://schemas.microsoft.com/office/drawing/2014/main" id="{523B5BE9-75FA-443A-A62E-8890341E5A78}"/>
+                <a16:creationId xmlns:a16="http://schemas.microsoft.com/office/drawing/2014/main" id="{D4ED6011-6C47-4DCA-8CE3-9F129905B027}"/>
               </a:ext>
             </a:extLst>
           </p:cNvPr>
@@ -3449,7 +3449,7 @@
           <p:cNvPr id="13" name="s3-takeaway-rule">
             <a:extLst xmlns:a="http://schemas.openxmlformats.org/drawingml/2006/main">
               <a:ext uri="{FF2B5EF4-FFF2-40B4-BE49-F238E27FC236}">
-                <a16:creationId xmlns:a16="http://schemas.microsoft.com/office/drawing/2014/main" id="{245019FB-75EA-45FE-B452-834EA049E4D9}"/>
+                <a16:creationId xmlns:a16="http://schemas.microsoft.com/office/drawing/2014/main" id="{C1F899CD-0737-426C-A4E9-B78B6FA28AF2}"/>
               </a:ext>
             </a:extLst>
           </p:cNvPr>
@@ -3482,7 +3482,7 @@
           <p:cNvPr id="14" name="s3-takeaway">
             <a:extLst xmlns:a="http://schemas.openxmlformats.org/drawingml/2006/main">
               <a:ext uri="{FF2B5EF4-FFF2-40B4-BE49-F238E27FC236}">
-                <a16:creationId xmlns:a16="http://schemas.microsoft.com/office/drawing/2014/main" id="{6648471D-89C2-4CF3-B667-47F0FF26DD84}"/>
+                <a16:creationId xmlns:a16="http://schemas.microsoft.com/office/drawing/2014/main" id="{BD6537EC-DC1D-4412-969B-D09AF64B0225}"/>
               </a:ext>
             </a:extLst>
           </p:cNvPr>
@@ -3538,7 +3538,7 @@
     </p:spTree>
     <p:extLst>
       <p:ext uri="{BB962C8B-B14F-4D97-AF65-F5344CB8AC3E}">
-        <p14:creationId xmlns:p14="http://schemas.microsoft.com/office/powerpoint/2010/main" val="1416377894"/>
+        <p14:creationId xmlns:p14="http://schemas.microsoft.com/office/powerpoint/2010/main" val="1907977515"/>
       </p:ext>
     </p:extLst>
   </p:cSld>
@@ -3569,7 +3569,7 @@
           <p:cNvPr id="1" name="s4-rule">
             <a:extLst xmlns:a="http://schemas.openxmlformats.org/drawingml/2006/main">
               <a:ext uri="{FF2B5EF4-FFF2-40B4-BE49-F238E27FC236}">
-                <a16:creationId xmlns:a16="http://schemas.microsoft.com/office/drawing/2014/main" id="{1C832250-A849-4018-9B18-178DF28F6CF3}"/>
+                <a16:creationId xmlns:a16="http://schemas.microsoft.com/office/drawing/2014/main" id="{6515D085-F347-4A3A-87AD-9D93F87BD30F}"/>
               </a:ext>
             </a:extLst>
           </p:cNvPr>
@@ -3602,7 +3602,7 @@
           <p:cNvPr id="2" name="s4-eyebrow">
             <a:extLst xmlns:a="http://schemas.openxmlformats.org/drawingml/2006/main">
               <a:ext uri="{FF2B5EF4-FFF2-40B4-BE49-F238E27FC236}">
-                <a16:creationId xmlns:a16="http://schemas.microsoft.com/office/drawing/2014/main" id="{783A5615-C631-4BEF-9F31-1DD8F3E6B2A1}"/>
+                <a16:creationId xmlns:a16="http://schemas.microsoft.com/office/drawing/2014/main" id="{54AD6CB6-3EC3-4DAA-ADD4-0E0122E10208}"/>
               </a:ext>
             </a:extLst>
           </p:cNvPr>
@@ -3660,7 +3660,7 @@
           <p:cNvPr id="3" name="s4-title">
             <a:extLst xmlns:a="http://schemas.openxmlformats.org/drawingml/2006/main">
               <a:ext uri="{FF2B5EF4-FFF2-40B4-BE49-F238E27FC236}">
-                <a16:creationId xmlns:a16="http://schemas.microsoft.com/office/drawing/2014/main" id="{0A68C491-47E9-4ACE-AAA7-CCC457F22E76}"/>
+                <a16:creationId xmlns:a16="http://schemas.microsoft.com/office/drawing/2014/main" id="{D2113AF2-29E7-4657-9A5A-9DD351CB5647}"/>
               </a:ext>
             </a:extLst>
           </p:cNvPr>
@@ -3718,7 +3718,7 @@
           <p:cNvPr id="4" name="s4-footer">
             <a:extLst xmlns:a="http://schemas.openxmlformats.org/drawingml/2006/main">
               <a:ext uri="{FF2B5EF4-FFF2-40B4-BE49-F238E27FC236}">
-                <a16:creationId xmlns:a16="http://schemas.microsoft.com/office/drawing/2014/main" id="{C9C32DEF-A040-48FE-8AFE-76826A31F5CA}"/>
+                <a16:creationId xmlns:a16="http://schemas.microsoft.com/office/drawing/2014/main" id="{B53A3B36-59A1-4000-8D3F-29176CFC6F22}"/>
               </a:ext>
             </a:extLst>
           </p:cNvPr>
@@ -3749,7 +3749,7 @@
           <p:cNvPr id="5" name="s4-identity">
             <a:extLst xmlns:a="http://schemas.openxmlformats.org/drawingml/2006/main">
               <a:ext uri="{FF2B5EF4-FFF2-40B4-BE49-F238E27FC236}">
-                <a16:creationId xmlns:a16="http://schemas.microsoft.com/office/drawing/2014/main" id="{47A7D16C-151A-4007-933E-1CABF3627125}"/>
+                <a16:creationId xmlns:a16="http://schemas.microsoft.com/office/drawing/2014/main" id="{17E8E12D-1323-47A5-8D48-1792725BAC94}"/>
               </a:ext>
             </a:extLst>
           </p:cNvPr>
@@ -3807,7 +3807,7 @@
           <p:cNvPr id="6" name="core-no-0">
             <a:extLst xmlns:a="http://schemas.openxmlformats.org/drawingml/2006/main">
               <a:ext uri="{FF2B5EF4-FFF2-40B4-BE49-F238E27FC236}">
-                <a16:creationId xmlns:a16="http://schemas.microsoft.com/office/drawing/2014/main" id="{AAD9593B-D756-4B5C-9A26-1D3CDC0BEEC2}"/>
+                <a16:creationId xmlns:a16="http://schemas.microsoft.com/office/drawing/2014/main" id="{0418D08A-0051-4FE7-9CDB-CAA4A5AC0496}"/>
               </a:ext>
             </a:extLst>
           </p:cNvPr>
@@ -3865,7 +3865,7 @@
           <p:cNvPr id="7" name="core-label-0">
             <a:extLst xmlns:a="http://schemas.openxmlformats.org/drawingml/2006/main">
               <a:ext uri="{FF2B5EF4-FFF2-40B4-BE49-F238E27FC236}">
-                <a16:creationId xmlns:a16="http://schemas.microsoft.com/office/drawing/2014/main" id="{12E33474-2D7C-4DE4-8A35-9629082AD887}"/>
+                <a16:creationId xmlns:a16="http://schemas.microsoft.com/office/drawing/2014/main" id="{70E74052-0139-4340-8B0D-5932FB95FF17}"/>
               </a:ext>
             </a:extLst>
           </p:cNvPr>
@@ -3923,7 +3923,7 @@
           <p:cNvPr id="8" name="core-body-0">
             <a:extLst xmlns:a="http://schemas.openxmlformats.org/drawingml/2006/main">
               <a:ext uri="{FF2B5EF4-FFF2-40B4-BE49-F238E27FC236}">
-                <a16:creationId xmlns:a16="http://schemas.microsoft.com/office/drawing/2014/main" id="{9C8C9E6F-1418-4AEC-8A22-B905B64B5708}"/>
+                <a16:creationId xmlns:a16="http://schemas.microsoft.com/office/drawing/2014/main" id="{A25AFA07-AA68-4049-A1D1-303539B8380A}"/>
               </a:ext>
             </a:extLst>
           </p:cNvPr>
@@ -3987,7 +3987,7 @@
           <p:cNvPr id="9" name="core-no-1">
             <a:extLst xmlns:a="http://schemas.openxmlformats.org/drawingml/2006/main">
               <a:ext uri="{FF2B5EF4-FFF2-40B4-BE49-F238E27FC236}">
-                <a16:creationId xmlns:a16="http://schemas.microsoft.com/office/drawing/2014/main" id="{7663CDD2-9A66-42C4-AE80-37A12B2D6DB6}"/>
+                <a16:creationId xmlns:a16="http://schemas.microsoft.com/office/drawing/2014/main" id="{5D10880C-DB9B-4AF7-ABF1-D1D9EAD5F15C}"/>
               </a:ext>
             </a:extLst>
           </p:cNvPr>
@@ -4045,7 +4045,7 @@
           <p:cNvPr id="10" name="core-body-1">
             <a:extLst xmlns:a="http://schemas.openxmlformats.org/drawingml/2006/main">
               <a:ext uri="{FF2B5EF4-FFF2-40B4-BE49-F238E27FC236}">
-                <a16:creationId xmlns:a16="http://schemas.microsoft.com/office/drawing/2014/main" id="{F7C9A873-11F6-4F9D-9099-7E6A9C01CEFF}"/>
+                <a16:creationId xmlns:a16="http://schemas.microsoft.com/office/drawing/2014/main" id="{7A44A487-E439-4883-A980-C9F7246DF133}"/>
               </a:ext>
             </a:extLst>
           </p:cNvPr>
@@ -4109,7 +4109,7 @@
           <p:cNvPr id="11" name="s4-takeaway-rule">
             <a:extLst xmlns:a="http://schemas.openxmlformats.org/drawingml/2006/main">
               <a:ext uri="{FF2B5EF4-FFF2-40B4-BE49-F238E27FC236}">
-                <a16:creationId xmlns:a16="http://schemas.microsoft.com/office/drawing/2014/main" id="{1FC86A2A-9C3E-4B0E-9C8E-1E9ACF707726}"/>
+                <a16:creationId xmlns:a16="http://schemas.microsoft.com/office/drawing/2014/main" id="{D4FDA670-EC36-4FD5-869E-A1522C55BD1C}"/>
               </a:ext>
             </a:extLst>
           </p:cNvPr>
@@ -4142,7 +4142,7 @@
           <p:cNvPr id="12" name="s4-takeaway">
             <a:extLst xmlns:a="http://schemas.openxmlformats.org/drawingml/2006/main">
               <a:ext uri="{FF2B5EF4-FFF2-40B4-BE49-F238E27FC236}">
-                <a16:creationId xmlns:a16="http://schemas.microsoft.com/office/drawing/2014/main" id="{BDF61CCD-E89A-49E0-882B-F68BBBED1F1F}"/>
+                <a16:creationId xmlns:a16="http://schemas.microsoft.com/office/drawing/2014/main" id="{44F591ED-D159-43C3-B38B-D01CBF6DF5D0}"/>
               </a:ext>
             </a:extLst>
           </p:cNvPr>
@@ -4198,7 +4198,7 @@
     </p:spTree>
     <p:extLst>
       <p:ext uri="{BB962C8B-B14F-4D97-AF65-F5344CB8AC3E}">
-        <p14:creationId xmlns:p14="http://schemas.microsoft.com/office/powerpoint/2010/main" val="204677636"/>
+        <p14:creationId xmlns:p14="http://schemas.microsoft.com/office/powerpoint/2010/main" val="777176905"/>
       </p:ext>
     </p:extLst>
   </p:cSld>
@@ -4229,7 +4229,7 @@
           <p:cNvPr id="1" name="s5-rule">
             <a:extLst xmlns:a="http://schemas.openxmlformats.org/drawingml/2006/main">
               <a:ext uri="{FF2B5EF4-FFF2-40B4-BE49-F238E27FC236}">
-                <a16:creationId xmlns:a16="http://schemas.microsoft.com/office/drawing/2014/main" id="{7A1F473C-7E83-4B81-9862-9FBFC41064F4}"/>
+                <a16:creationId xmlns:a16="http://schemas.microsoft.com/office/drawing/2014/main" id="{00F642F6-2FC3-4D64-B264-63819342A96B}"/>
               </a:ext>
             </a:extLst>
           </p:cNvPr>
@@ -4262,7 +4262,7 @@
           <p:cNvPr id="2" name="s5-eyebrow">
             <a:extLst xmlns:a="http://schemas.openxmlformats.org/drawingml/2006/main">
               <a:ext uri="{FF2B5EF4-FFF2-40B4-BE49-F238E27FC236}">
-                <a16:creationId xmlns:a16="http://schemas.microsoft.com/office/drawing/2014/main" id="{125E302D-8A98-45A8-998E-70D491144EEF}"/>
+                <a16:creationId xmlns:a16="http://schemas.microsoft.com/office/drawing/2014/main" id="{F84304A5-7B23-4A43-A610-B7494AA20304}"/>
               </a:ext>
             </a:extLst>
           </p:cNvPr>
@@ -4320,7 +4320,7 @@
           <p:cNvPr id="3" name="s5-title">
             <a:extLst xmlns:a="http://schemas.openxmlformats.org/drawingml/2006/main">
               <a:ext uri="{FF2B5EF4-FFF2-40B4-BE49-F238E27FC236}">
-                <a16:creationId xmlns:a16="http://schemas.microsoft.com/office/drawing/2014/main" id="{52F69D5E-95B4-4108-A5B1-65534C537DF4}"/>
+                <a16:creationId xmlns:a16="http://schemas.microsoft.com/office/drawing/2014/main" id="{D63199D2-30A8-4101-AD67-A3E6F0257988}"/>
               </a:ext>
             </a:extLst>
           </p:cNvPr>
@@ -4378,7 +4378,7 @@
           <p:cNvPr id="4" name="s5-footer">
             <a:extLst xmlns:a="http://schemas.openxmlformats.org/drawingml/2006/main">
               <a:ext uri="{FF2B5EF4-FFF2-40B4-BE49-F238E27FC236}">
-                <a16:creationId xmlns:a16="http://schemas.microsoft.com/office/drawing/2014/main" id="{79442323-2B42-448B-80A2-97B457097E1B}"/>
+                <a16:creationId xmlns:a16="http://schemas.microsoft.com/office/drawing/2014/main" id="{44AB4197-D64B-4692-BA3B-80D5AE7B1515}"/>
               </a:ext>
             </a:extLst>
           </p:cNvPr>
@@ -4409,7 +4409,7 @@
           <p:cNvPr id="5" name="s5-identity">
             <a:extLst xmlns:a="http://schemas.openxmlformats.org/drawingml/2006/main">
               <a:ext uri="{FF2B5EF4-FFF2-40B4-BE49-F238E27FC236}">
-                <a16:creationId xmlns:a16="http://schemas.microsoft.com/office/drawing/2014/main" id="{D7C20667-CB86-4955-97A5-C8EE38D0EC77}"/>
+                <a16:creationId xmlns:a16="http://schemas.microsoft.com/office/drawing/2014/main" id="{C472011D-7C3B-4191-8FA5-E0262BC37DAA}"/>
               </a:ext>
             </a:extLst>
           </p:cNvPr>
@@ -4467,7 +4467,7 @@
           <p:cNvPr id="6" name="core-no-0">
             <a:extLst xmlns:a="http://schemas.openxmlformats.org/drawingml/2006/main">
               <a:ext uri="{FF2B5EF4-FFF2-40B4-BE49-F238E27FC236}">
-                <a16:creationId xmlns:a16="http://schemas.microsoft.com/office/drawing/2014/main" id="{93901C80-286B-4F51-9960-8BD6C0B9FC71}"/>
+                <a16:creationId xmlns:a16="http://schemas.microsoft.com/office/drawing/2014/main" id="{DB3BAA40-197B-4F0A-9609-E69C1DF004EB}"/>
               </a:ext>
             </a:extLst>
           </p:cNvPr>
@@ -4525,7 +4525,7 @@
           <p:cNvPr id="7" name="core-label-0">
             <a:extLst xmlns:a="http://schemas.openxmlformats.org/drawingml/2006/main">
               <a:ext uri="{FF2B5EF4-FFF2-40B4-BE49-F238E27FC236}">
-                <a16:creationId xmlns:a16="http://schemas.microsoft.com/office/drawing/2014/main" id="{1A42E5AB-5D48-46D9-8B38-896ED70DBE4D}"/>
+                <a16:creationId xmlns:a16="http://schemas.microsoft.com/office/drawing/2014/main" id="{F8C836BE-B721-48C7-9D84-F0D29D11B365}"/>
               </a:ext>
             </a:extLst>
           </p:cNvPr>
@@ -4583,7 +4583,7 @@
           <p:cNvPr id="8" name="core-body-0">
             <a:extLst xmlns:a="http://schemas.openxmlformats.org/drawingml/2006/main">
               <a:ext uri="{FF2B5EF4-FFF2-40B4-BE49-F238E27FC236}">
-                <a16:creationId xmlns:a16="http://schemas.microsoft.com/office/drawing/2014/main" id="{8C6B17AC-EFBD-4CC6-B51D-4D53739C2485}"/>
+                <a16:creationId xmlns:a16="http://schemas.microsoft.com/office/drawing/2014/main" id="{FFD340B9-F28E-4747-A31D-E4DE616D24B3}"/>
               </a:ext>
             </a:extLst>
           </p:cNvPr>
@@ -4647,7 +4647,7 @@
           <p:cNvPr id="9" name="core-no-1">
             <a:extLst xmlns:a="http://schemas.openxmlformats.org/drawingml/2006/main">
               <a:ext uri="{FF2B5EF4-FFF2-40B4-BE49-F238E27FC236}">
-                <a16:creationId xmlns:a16="http://schemas.microsoft.com/office/drawing/2014/main" id="{6C93CFFE-A76A-4BE8-882B-A2A1A996EB22}"/>
+                <a16:creationId xmlns:a16="http://schemas.microsoft.com/office/drawing/2014/main" id="{04D04AF2-D9FF-476A-8732-8C9411728328}"/>
               </a:ext>
             </a:extLst>
           </p:cNvPr>
@@ -4705,7 +4705,7 @@
           <p:cNvPr id="10" name="core-body-1">
             <a:extLst xmlns:a="http://schemas.openxmlformats.org/drawingml/2006/main">
               <a:ext uri="{FF2B5EF4-FFF2-40B4-BE49-F238E27FC236}">
-                <a16:creationId xmlns:a16="http://schemas.microsoft.com/office/drawing/2014/main" id="{459B33EB-8CA3-43DC-9EC0-E22F2CEBB603}"/>
+                <a16:creationId xmlns:a16="http://schemas.microsoft.com/office/drawing/2014/main" id="{E79FEB0E-1AE2-4947-BF8E-8B7419E69F10}"/>
               </a:ext>
             </a:extLst>
           </p:cNvPr>
@@ -4769,7 +4769,7 @@
           <p:cNvPr id="11" name="core-no-2">
             <a:extLst xmlns:a="http://schemas.openxmlformats.org/drawingml/2006/main">
               <a:ext uri="{FF2B5EF4-FFF2-40B4-BE49-F238E27FC236}">
-                <a16:creationId xmlns:a16="http://schemas.microsoft.com/office/drawing/2014/main" id="{F317C191-F000-44FB-9100-A9EA1DADFDE6}"/>
+                <a16:creationId xmlns:a16="http://schemas.microsoft.com/office/drawing/2014/main" id="{B5284A8B-416A-4FF2-8F5F-E10B4C85EED6}"/>
               </a:ext>
             </a:extLst>
           </p:cNvPr>
@@ -4827,7 +4827,7 @@
           <p:cNvPr id="12" name="core-body-2">
             <a:extLst xmlns:a="http://schemas.openxmlformats.org/drawingml/2006/main">
               <a:ext uri="{FF2B5EF4-FFF2-40B4-BE49-F238E27FC236}">
-                <a16:creationId xmlns:a16="http://schemas.microsoft.com/office/drawing/2014/main" id="{0B06D20D-607F-4B75-B7B4-3C8263EC6107}"/>
+                <a16:creationId xmlns:a16="http://schemas.microsoft.com/office/drawing/2014/main" id="{89A9C64A-512C-450B-BCF5-32183B53CC04}"/>
               </a:ext>
             </a:extLst>
           </p:cNvPr>
@@ -4891,7 +4891,7 @@
           <p:cNvPr id="13" name="s5-takeaway-rule">
             <a:extLst xmlns:a="http://schemas.openxmlformats.org/drawingml/2006/main">
               <a:ext uri="{FF2B5EF4-FFF2-40B4-BE49-F238E27FC236}">
-                <a16:creationId xmlns:a16="http://schemas.microsoft.com/office/drawing/2014/main" id="{56EAE58D-9197-4F21-9202-F4DDE8A1BF9D}"/>
+                <a16:creationId xmlns:a16="http://schemas.microsoft.com/office/drawing/2014/main" id="{149EE1BB-96C3-4FF7-9CC8-DB6B8C727BA2}"/>
               </a:ext>
             </a:extLst>
           </p:cNvPr>
@@ -4924,7 +4924,7 @@
           <p:cNvPr id="14" name="s5-takeaway">
             <a:extLst xmlns:a="http://schemas.openxmlformats.org/drawingml/2006/main">
               <a:ext uri="{FF2B5EF4-FFF2-40B4-BE49-F238E27FC236}">
-                <a16:creationId xmlns:a16="http://schemas.microsoft.com/office/drawing/2014/main" id="{4C1938EF-1734-4C58-A60F-7D6F82C88705}"/>
+                <a16:creationId xmlns:a16="http://schemas.microsoft.com/office/drawing/2014/main" id="{3EF7A898-774A-4CA3-881C-F000438AD5BF}"/>
               </a:ext>
             </a:extLst>
           </p:cNvPr>
@@ -4980,7 +4980,7 @@
     </p:spTree>
     <p:extLst>
       <p:ext uri="{BB962C8B-B14F-4D97-AF65-F5344CB8AC3E}">
-        <p14:creationId xmlns:p14="http://schemas.microsoft.com/office/powerpoint/2010/main" val="1074362376"/>
+        <p14:creationId xmlns:p14="http://schemas.microsoft.com/office/powerpoint/2010/main" val="11166138"/>
       </p:ext>
     </p:extLst>
   </p:cSld>
@@ -5011,7 +5011,7 @@
           <p:cNvPr id="1" name="s6-rule">
             <a:extLst xmlns:a="http://schemas.openxmlformats.org/drawingml/2006/main">
               <a:ext uri="{FF2B5EF4-FFF2-40B4-BE49-F238E27FC236}">
-                <a16:creationId xmlns:a16="http://schemas.microsoft.com/office/drawing/2014/main" id="{114D3FED-AED0-4103-B60C-2C00B23E768D}"/>
+                <a16:creationId xmlns:a16="http://schemas.microsoft.com/office/drawing/2014/main" id="{2CC5459D-6ACC-4092-8EFE-7CE450B9E5B5}"/>
               </a:ext>
             </a:extLst>
           </p:cNvPr>
@@ -5044,7 +5044,7 @@
           <p:cNvPr id="2" name="s6-eyebrow">
             <a:extLst xmlns:a="http://schemas.openxmlformats.org/drawingml/2006/main">
               <a:ext uri="{FF2B5EF4-FFF2-40B4-BE49-F238E27FC236}">
-                <a16:creationId xmlns:a16="http://schemas.microsoft.com/office/drawing/2014/main" id="{86362689-DC45-4CB7-AD0D-A9FF0D76C50D}"/>
+                <a16:creationId xmlns:a16="http://schemas.microsoft.com/office/drawing/2014/main" id="{D94E1C29-C2F8-4ECF-80E0-73A04333E023}"/>
               </a:ext>
             </a:extLst>
           </p:cNvPr>
@@ -5102,7 +5102,7 @@
           <p:cNvPr id="3" name="s6-title">
             <a:extLst xmlns:a="http://schemas.openxmlformats.org/drawingml/2006/main">
               <a:ext uri="{FF2B5EF4-FFF2-40B4-BE49-F238E27FC236}">
-                <a16:creationId xmlns:a16="http://schemas.microsoft.com/office/drawing/2014/main" id="{4A957274-4AB1-4D0A-A9C7-F9A39E64DEA6}"/>
+                <a16:creationId xmlns:a16="http://schemas.microsoft.com/office/drawing/2014/main" id="{22F6F0A0-BA89-4C32-924E-1370DD4758E4}"/>
               </a:ext>
             </a:extLst>
           </p:cNvPr>
@@ -5160,7 +5160,7 @@
           <p:cNvPr id="4" name="s6-footer">
             <a:extLst xmlns:a="http://schemas.openxmlformats.org/drawingml/2006/main">
               <a:ext uri="{FF2B5EF4-FFF2-40B4-BE49-F238E27FC236}">
-                <a16:creationId xmlns:a16="http://schemas.microsoft.com/office/drawing/2014/main" id="{E8EA5943-B919-4B7C-8ED8-AB9FBCF0151C}"/>
+                <a16:creationId xmlns:a16="http://schemas.microsoft.com/office/drawing/2014/main" id="{4A84B65A-20A7-4F26-9B55-4F531EEE2483}"/>
               </a:ext>
             </a:extLst>
           </p:cNvPr>
@@ -5191,7 +5191,7 @@
           <p:cNvPr id="5" name="s6-identity">
             <a:extLst xmlns:a="http://schemas.openxmlformats.org/drawingml/2006/main">
               <a:ext uri="{FF2B5EF4-FFF2-40B4-BE49-F238E27FC236}">
-                <a16:creationId xmlns:a16="http://schemas.microsoft.com/office/drawing/2014/main" id="{4ADB420B-6E96-4BD4-A078-038DE62C623E}"/>
+                <a16:creationId xmlns:a16="http://schemas.microsoft.com/office/drawing/2014/main" id="{928F5D2D-BFAE-4057-A109-E844BAA5A7E7}"/>
               </a:ext>
             </a:extLst>
           </p:cNvPr>
@@ -5249,7 +5249,7 @@
           <p:cNvPr id="6" name="case-title">
             <a:extLst xmlns:a="http://schemas.openxmlformats.org/drawingml/2006/main">
               <a:ext uri="{FF2B5EF4-FFF2-40B4-BE49-F238E27FC236}">
-                <a16:creationId xmlns:a16="http://schemas.microsoft.com/office/drawing/2014/main" id="{715CCFA0-3C1F-483C-A12B-8A8C488E2616}"/>
+                <a16:creationId xmlns:a16="http://schemas.microsoft.com/office/drawing/2014/main" id="{3D44718D-6793-4A57-83CD-91E519AEEB3D}"/>
               </a:ext>
             </a:extLst>
           </p:cNvPr>
@@ -5313,7 +5313,7 @@
           <p:cNvPr id="7" name="case-row-0">
             <a:extLst xmlns:a="http://schemas.openxmlformats.org/drawingml/2006/main">
               <a:ext uri="{FF2B5EF4-FFF2-40B4-BE49-F238E27FC236}">
-                <a16:creationId xmlns:a16="http://schemas.microsoft.com/office/drawing/2014/main" id="{95E0492A-118E-4DDF-905B-3A749B9CFA2A}"/>
+                <a16:creationId xmlns:a16="http://schemas.microsoft.com/office/drawing/2014/main" id="{263C5BE4-EC3B-4F20-B3FC-2F5E4B7E970D}"/>
               </a:ext>
             </a:extLst>
           </p:cNvPr>
@@ -5377,7 +5377,7 @@
           <p:cNvPr id="8" name="case-row-1">
             <a:extLst xmlns:a="http://schemas.openxmlformats.org/drawingml/2006/main">
               <a:ext uri="{FF2B5EF4-FFF2-40B4-BE49-F238E27FC236}">
-                <a16:creationId xmlns:a16="http://schemas.microsoft.com/office/drawing/2014/main" id="{5DD1A1F0-FDCB-4E31-93F1-D387495348A0}"/>
+                <a16:creationId xmlns:a16="http://schemas.microsoft.com/office/drawing/2014/main" id="{A691303C-24A4-4CFA-984F-54B010A10D17}"/>
               </a:ext>
             </a:extLst>
           </p:cNvPr>
@@ -5441,7 +5441,7 @@
           <p:cNvPr id="9" name="case-row-2">
             <a:extLst xmlns:a="http://schemas.openxmlformats.org/drawingml/2006/main">
               <a:ext uri="{FF2B5EF4-FFF2-40B4-BE49-F238E27FC236}">
-                <a16:creationId xmlns:a16="http://schemas.microsoft.com/office/drawing/2014/main" id="{20B80C3F-0528-4FCF-8E24-F36CA89F3749}"/>
+                <a16:creationId xmlns:a16="http://schemas.microsoft.com/office/drawing/2014/main" id="{58BB5C5F-DC68-40CB-A654-7DEBC00DC2CD}"/>
               </a:ext>
             </a:extLst>
           </p:cNvPr>
@@ -5505,7 +5505,7 @@
           <p:cNvPr id="10" name="case-row-3">
             <a:extLst xmlns:a="http://schemas.openxmlformats.org/drawingml/2006/main">
               <a:ext uri="{FF2B5EF4-FFF2-40B4-BE49-F238E27FC236}">
-                <a16:creationId xmlns:a16="http://schemas.microsoft.com/office/drawing/2014/main" id="{96DA8DAD-57AC-4637-BF49-FCF6204BA120}"/>
+                <a16:creationId xmlns:a16="http://schemas.microsoft.com/office/drawing/2014/main" id="{D1B0A1C5-E84E-4056-9FBC-A8BD06FBCBB2}"/>
               </a:ext>
             </a:extLst>
           </p:cNvPr>
@@ -5569,7 +5569,7 @@
           <p:cNvPr id="11" name="s6-takeaway-rule">
             <a:extLst xmlns:a="http://schemas.openxmlformats.org/drawingml/2006/main">
               <a:ext uri="{FF2B5EF4-FFF2-40B4-BE49-F238E27FC236}">
-                <a16:creationId xmlns:a16="http://schemas.microsoft.com/office/drawing/2014/main" id="{6FCDE615-3D76-49C3-9E40-6CE34FD2C9D0}"/>
+                <a16:creationId xmlns:a16="http://schemas.microsoft.com/office/drawing/2014/main" id="{EDB1F9AB-652C-4A9A-B457-30E6D53443EF}"/>
               </a:ext>
             </a:extLst>
           </p:cNvPr>
@@ -5602,7 +5602,7 @@
           <p:cNvPr id="12" name="s6-takeaway">
             <a:extLst xmlns:a="http://schemas.openxmlformats.org/drawingml/2006/main">
               <a:ext uri="{FF2B5EF4-FFF2-40B4-BE49-F238E27FC236}">
-                <a16:creationId xmlns:a16="http://schemas.microsoft.com/office/drawing/2014/main" id="{505FFA2B-FCB7-454F-BAF0-317D3FAF208D}"/>
+                <a16:creationId xmlns:a16="http://schemas.microsoft.com/office/drawing/2014/main" id="{5E914C4C-4392-4D6C-A6EF-4B5961C1E100}"/>
               </a:ext>
             </a:extLst>
           </p:cNvPr>
@@ -5658,7 +5658,7 @@
     </p:spTree>
     <p:extLst>
       <p:ext uri="{BB962C8B-B14F-4D97-AF65-F5344CB8AC3E}">
-        <p14:creationId xmlns:p14="http://schemas.microsoft.com/office/powerpoint/2010/main" val="1716807834"/>
+        <p14:creationId xmlns:p14="http://schemas.microsoft.com/office/powerpoint/2010/main" val="2049151408"/>
       </p:ext>
     </p:extLst>
   </p:cSld>
@@ -5689,7 +5689,7 @@
           <p:cNvPr id="1" name="s7-rule">
             <a:extLst xmlns:a="http://schemas.openxmlformats.org/drawingml/2006/main">
               <a:ext uri="{FF2B5EF4-FFF2-40B4-BE49-F238E27FC236}">
-                <a16:creationId xmlns:a16="http://schemas.microsoft.com/office/drawing/2014/main" id="{7314420F-7F62-4D13-8B63-A700BF5A8C1B}"/>
+                <a16:creationId xmlns:a16="http://schemas.microsoft.com/office/drawing/2014/main" id="{2CF016AF-5DB0-4CF5-8287-E082B69033C1}"/>
               </a:ext>
             </a:extLst>
           </p:cNvPr>
@@ -5722,7 +5722,7 @@
           <p:cNvPr id="2" name="s7-eyebrow">
             <a:extLst xmlns:a="http://schemas.openxmlformats.org/drawingml/2006/main">
               <a:ext uri="{FF2B5EF4-FFF2-40B4-BE49-F238E27FC236}">
-                <a16:creationId xmlns:a16="http://schemas.microsoft.com/office/drawing/2014/main" id="{6316CB5F-90D0-4503-8C55-2200C91CFE17}"/>
+                <a16:creationId xmlns:a16="http://schemas.microsoft.com/office/drawing/2014/main" id="{04D8D541-B8A7-40A3-8067-A26FC4FB6186}"/>
               </a:ext>
             </a:extLst>
           </p:cNvPr>
@@ -5780,7 +5780,7 @@
           <p:cNvPr id="3" name="s7-title">
             <a:extLst xmlns:a="http://schemas.openxmlformats.org/drawingml/2006/main">
               <a:ext uri="{FF2B5EF4-FFF2-40B4-BE49-F238E27FC236}">
-                <a16:creationId xmlns:a16="http://schemas.microsoft.com/office/drawing/2014/main" id="{A8CE6790-DD68-410D-AD08-6010AD878E2D}"/>
+                <a16:creationId xmlns:a16="http://schemas.microsoft.com/office/drawing/2014/main" id="{B84DC2AC-3D79-4261-8BC7-E80330835271}"/>
               </a:ext>
             </a:extLst>
           </p:cNvPr>
@@ -5838,7 +5838,7 @@
           <p:cNvPr id="4" name="s7-footer">
             <a:extLst xmlns:a="http://schemas.openxmlformats.org/drawingml/2006/main">
               <a:ext uri="{FF2B5EF4-FFF2-40B4-BE49-F238E27FC236}">
-                <a16:creationId xmlns:a16="http://schemas.microsoft.com/office/drawing/2014/main" id="{BD2ECB46-1750-47D3-9BA2-2AD703515117}"/>
+                <a16:creationId xmlns:a16="http://schemas.microsoft.com/office/drawing/2014/main" id="{91F24460-ADD9-4A51-90BA-A12390D7B4C8}"/>
               </a:ext>
             </a:extLst>
           </p:cNvPr>
@@ -5869,7 +5869,7 @@
           <p:cNvPr id="5" name="s7-identity">
             <a:extLst xmlns:a="http://schemas.openxmlformats.org/drawingml/2006/main">
               <a:ext uri="{FF2B5EF4-FFF2-40B4-BE49-F238E27FC236}">
-                <a16:creationId xmlns:a16="http://schemas.microsoft.com/office/drawing/2014/main" id="{ADB77B17-8178-4AD4-9B63-E1DA823DC647}"/>
+                <a16:creationId xmlns:a16="http://schemas.microsoft.com/office/drawing/2014/main" id="{72F4FD4B-7E47-474A-836A-C6112C9D3664}"/>
               </a:ext>
             </a:extLst>
           </p:cNvPr>
@@ -5927,7 +5927,7 @@
           <p:cNvPr id="6" name="practice-circle-0">
             <a:extLst xmlns:a="http://schemas.openxmlformats.org/drawingml/2006/main">
               <a:ext uri="{FF2B5EF4-FFF2-40B4-BE49-F238E27FC236}">
-                <a16:creationId xmlns:a16="http://schemas.microsoft.com/office/drawing/2014/main" id="{C3F98466-2841-427A-B935-EFD2BF5F5E34}"/>
+                <a16:creationId xmlns:a16="http://schemas.microsoft.com/office/drawing/2014/main" id="{60507927-72F1-4D56-AEFA-9C37B8B78D63}"/>
               </a:ext>
             </a:extLst>
           </p:cNvPr>
@@ -5960,7 +5960,7 @@
           <p:cNvPr id="7" name="practice-number-0">
             <a:extLst xmlns:a="http://schemas.openxmlformats.org/drawingml/2006/main">
               <a:ext uri="{FF2B5EF4-FFF2-40B4-BE49-F238E27FC236}">
-                <a16:creationId xmlns:a16="http://schemas.microsoft.com/office/drawing/2014/main" id="{DFDC5CC5-C345-4F87-A89D-73EDF484CD62}"/>
+                <a16:creationId xmlns:a16="http://schemas.microsoft.com/office/drawing/2014/main" id="{3A268E30-CD73-43F5-9196-B331973758E4}"/>
               </a:ext>
             </a:extLst>
           </p:cNvPr>
@@ -6018,7 +6018,7 @@
           <p:cNvPr id="8" name="practice-item-0">
             <a:extLst xmlns:a="http://schemas.openxmlformats.org/drawingml/2006/main">
               <a:ext uri="{FF2B5EF4-FFF2-40B4-BE49-F238E27FC236}">
-                <a16:creationId xmlns:a16="http://schemas.microsoft.com/office/drawing/2014/main" id="{BE57C38F-3E38-4119-9605-E0C29D61594D}"/>
+                <a16:creationId xmlns:a16="http://schemas.microsoft.com/office/drawing/2014/main" id="{DAAEB6D0-BCA6-4AF5-8D64-08E9F662B0B8}"/>
               </a:ext>
             </a:extLst>
           </p:cNvPr>
@@ -6082,7 +6082,7 @@
           <p:cNvPr id="9" name="practice-connector-0">
             <a:extLst xmlns:a="http://schemas.openxmlformats.org/drawingml/2006/main">
               <a:ext uri="{FF2B5EF4-FFF2-40B4-BE49-F238E27FC236}">
-                <a16:creationId xmlns:a16="http://schemas.microsoft.com/office/drawing/2014/main" id="{9D08A16B-B3D0-4D63-8CD0-502AD0A5A928}"/>
+                <a16:creationId xmlns:a16="http://schemas.microsoft.com/office/drawing/2014/main" id="{7ACDB218-AC87-4CF3-87CF-240441B9490D}"/>
               </a:ext>
             </a:extLst>
           </p:cNvPr>
@@ -6113,7 +6113,7 @@
           <p:cNvPr id="10" name="practice-circle-1">
             <a:extLst xmlns:a="http://schemas.openxmlformats.org/drawingml/2006/main">
               <a:ext uri="{FF2B5EF4-FFF2-40B4-BE49-F238E27FC236}">
-                <a16:creationId xmlns:a16="http://schemas.microsoft.com/office/drawing/2014/main" id="{C509897F-24F5-439C-B4FC-88B7DB5154A6}"/>
+                <a16:creationId xmlns:a16="http://schemas.microsoft.com/office/drawing/2014/main" id="{2C790070-971A-4D96-86DF-8D2B874FB40A}"/>
               </a:ext>
             </a:extLst>
           </p:cNvPr>
@@ -6146,7 +6146,7 @@
           <p:cNvPr id="11" name="practice-number-1">
             <a:extLst xmlns:a="http://schemas.openxmlformats.org/drawingml/2006/main">
               <a:ext uri="{FF2B5EF4-FFF2-40B4-BE49-F238E27FC236}">
-                <a16:creationId xmlns:a16="http://schemas.microsoft.com/office/drawing/2014/main" id="{A845716E-8F5C-4934-B481-458676DE85BE}"/>
+                <a16:creationId xmlns:a16="http://schemas.microsoft.com/office/drawing/2014/main" id="{5E51F9CD-2576-44F0-ACB4-716A08E5A9F3}"/>
               </a:ext>
             </a:extLst>
           </p:cNvPr>
@@ -6204,7 +6204,7 @@
           <p:cNvPr id="12" name="practice-item-1">
             <a:extLst xmlns:a="http://schemas.openxmlformats.org/drawingml/2006/main">
               <a:ext uri="{FF2B5EF4-FFF2-40B4-BE49-F238E27FC236}">
-                <a16:creationId xmlns:a16="http://schemas.microsoft.com/office/drawing/2014/main" id="{A292DEA5-A3A4-4C2D-96D4-491B4F09F8E6}"/>
+                <a16:creationId xmlns:a16="http://schemas.microsoft.com/office/drawing/2014/main" id="{6FA2F844-4E6C-43D8-B75C-EAB205920DC5}"/>
               </a:ext>
             </a:extLst>
           </p:cNvPr>
@@ -6266,7 +6266,7 @@
     </p:spTree>
     <p:extLst>
       <p:ext uri="{BB962C8B-B14F-4D97-AF65-F5344CB8AC3E}">
-        <p14:creationId xmlns:p14="http://schemas.microsoft.com/office/powerpoint/2010/main" val="985168422"/>
+        <p14:creationId xmlns:p14="http://schemas.microsoft.com/office/powerpoint/2010/main" val="1991450636"/>
       </p:ext>
     </p:extLst>
   </p:cSld>
@@ -6297,7 +6297,7 @@
           <p:cNvPr id="1" name="s8-rule">
             <a:extLst xmlns:a="http://schemas.openxmlformats.org/drawingml/2006/main">
               <a:ext uri="{FF2B5EF4-FFF2-40B4-BE49-F238E27FC236}">
-                <a16:creationId xmlns:a16="http://schemas.microsoft.com/office/drawing/2014/main" id="{18513C4D-0FA1-4B00-9004-6DFB57C35D51}"/>
+                <a16:creationId xmlns:a16="http://schemas.microsoft.com/office/drawing/2014/main" id="{CD3972EA-B2B8-4629-B1FC-C9A680613CB8}"/>
               </a:ext>
             </a:extLst>
           </p:cNvPr>
@@ -6330,7 +6330,7 @@
           <p:cNvPr id="2" name="s8-eyebrow">
             <a:extLst xmlns:a="http://schemas.openxmlformats.org/drawingml/2006/main">
               <a:ext uri="{FF2B5EF4-FFF2-40B4-BE49-F238E27FC236}">
-                <a16:creationId xmlns:a16="http://schemas.microsoft.com/office/drawing/2014/main" id="{E53BE31A-4544-4215-9CD6-06187BC52C5E}"/>
+                <a16:creationId xmlns:a16="http://schemas.microsoft.com/office/drawing/2014/main" id="{0B5A5F5D-94F6-4ECF-BE08-EC464BF44A2F}"/>
               </a:ext>
             </a:extLst>
           </p:cNvPr>
@@ -6388,7 +6388,7 @@
           <p:cNvPr id="3" name="s8-title">
             <a:extLst xmlns:a="http://schemas.openxmlformats.org/drawingml/2006/main">
               <a:ext uri="{FF2B5EF4-FFF2-40B4-BE49-F238E27FC236}">
-                <a16:creationId xmlns:a16="http://schemas.microsoft.com/office/drawing/2014/main" id="{5127725B-F8F9-464C-B7B4-953AD7F3B89E}"/>
+                <a16:creationId xmlns:a16="http://schemas.microsoft.com/office/drawing/2014/main" id="{BFEF7438-33C9-4D89-B8FF-2E0C432CC866}"/>
               </a:ext>
             </a:extLst>
           </p:cNvPr>
@@ -6446,7 +6446,7 @@
           <p:cNvPr id="4" name="s8-footer">
             <a:extLst xmlns:a="http://schemas.openxmlformats.org/drawingml/2006/main">
               <a:ext uri="{FF2B5EF4-FFF2-40B4-BE49-F238E27FC236}">
-                <a16:creationId xmlns:a16="http://schemas.microsoft.com/office/drawing/2014/main" id="{BE0E8FAD-0334-4938-A094-1878E1130E79}"/>
+                <a16:creationId xmlns:a16="http://schemas.microsoft.com/office/drawing/2014/main" id="{6E17D86E-E1CE-4F41-A1C6-CC25236FDF53}"/>
               </a:ext>
             </a:extLst>
           </p:cNvPr>
@@ -6477,7 +6477,7 @@
           <p:cNvPr id="5" name="s8-identity">
             <a:extLst xmlns:a="http://schemas.openxmlformats.org/drawingml/2006/main">
               <a:ext uri="{FF2B5EF4-FFF2-40B4-BE49-F238E27FC236}">
-                <a16:creationId xmlns:a16="http://schemas.microsoft.com/office/drawing/2014/main" id="{E9D7CF16-4EF7-4EA4-8CF4-859C8E477B9D}"/>
+                <a16:creationId xmlns:a16="http://schemas.microsoft.com/office/drawing/2014/main" id="{F04899D6-F1FD-448B-8141-743AFADB2F9D}"/>
               </a:ext>
             </a:extLst>
           </p:cNvPr>
@@ -6535,7 +6535,7 @@
           <p:cNvPr id="6" name="recap-circle-0">
             <a:extLst xmlns:a="http://schemas.openxmlformats.org/drawingml/2006/main">
               <a:ext uri="{FF2B5EF4-FFF2-40B4-BE49-F238E27FC236}">
-                <a16:creationId xmlns:a16="http://schemas.microsoft.com/office/drawing/2014/main" id="{B93932C7-01AA-489F-89D9-E5ACAD165000}"/>
+                <a16:creationId xmlns:a16="http://schemas.microsoft.com/office/drawing/2014/main" id="{816DC088-3A77-464B-ABCB-DF6C91BE3BD4}"/>
               </a:ext>
             </a:extLst>
           </p:cNvPr>
@@ -6568,7 +6568,7 @@
           <p:cNvPr id="7" name="recap-number-0">
             <a:extLst xmlns:a="http://schemas.openxmlformats.org/drawingml/2006/main">
               <a:ext uri="{FF2B5EF4-FFF2-40B4-BE49-F238E27FC236}">
-                <a16:creationId xmlns:a16="http://schemas.microsoft.com/office/drawing/2014/main" id="{36FE6D97-8F20-41D2-845C-FD4EEEEAED32}"/>
+                <a16:creationId xmlns:a16="http://schemas.microsoft.com/office/drawing/2014/main" id="{4EACC176-3023-4184-B023-1142D912AEA7}"/>
               </a:ext>
             </a:extLst>
           </p:cNvPr>
@@ -6626,7 +6626,7 @@
           <p:cNvPr id="8" name="recap-item-0">
             <a:extLst xmlns:a="http://schemas.openxmlformats.org/drawingml/2006/main">
               <a:ext uri="{FF2B5EF4-FFF2-40B4-BE49-F238E27FC236}">
-                <a16:creationId xmlns:a16="http://schemas.microsoft.com/office/drawing/2014/main" id="{64EB9E0A-C858-4571-9B4C-A228374AB530}"/>
+                <a16:creationId xmlns:a16="http://schemas.microsoft.com/office/drawing/2014/main" id="{FE73EDBD-6FE3-48EC-9AB1-425D50670F7D}"/>
               </a:ext>
             </a:extLst>
           </p:cNvPr>
@@ -6690,7 +6690,7 @@
           <p:cNvPr id="9" name="recap-connector-0">
             <a:extLst xmlns:a="http://schemas.openxmlformats.org/drawingml/2006/main">
               <a:ext uri="{FF2B5EF4-FFF2-40B4-BE49-F238E27FC236}">
-                <a16:creationId xmlns:a16="http://schemas.microsoft.com/office/drawing/2014/main" id="{BF3F56C4-59F9-4E70-A019-92431725960F}"/>
+                <a16:creationId xmlns:a16="http://schemas.microsoft.com/office/drawing/2014/main" id="{7FCA8F94-D10A-40E4-BB00-8B88A02471D0}"/>
               </a:ext>
             </a:extLst>
           </p:cNvPr>
@@ -6721,7 +6721,7 @@
           <p:cNvPr id="10" name="recap-circle-1">
             <a:extLst xmlns:a="http://schemas.openxmlformats.org/drawingml/2006/main">
               <a:ext uri="{FF2B5EF4-FFF2-40B4-BE49-F238E27FC236}">
-                <a16:creationId xmlns:a16="http://schemas.microsoft.com/office/drawing/2014/main" id="{2187CB4F-0E34-4A83-94DC-DA83EB21D8BB}"/>
+                <a16:creationId xmlns:a16="http://schemas.microsoft.com/office/drawing/2014/main" id="{EAE2A3A2-D03E-4E12-8AE3-306AB9D215C3}"/>
               </a:ext>
             </a:extLst>
           </p:cNvPr>
@@ -6754,7 +6754,7 @@
           <p:cNvPr id="11" name="recap-number-1">
             <a:extLst xmlns:a="http://schemas.openxmlformats.org/drawingml/2006/main">
               <a:ext uri="{FF2B5EF4-FFF2-40B4-BE49-F238E27FC236}">
-                <a16:creationId xmlns:a16="http://schemas.microsoft.com/office/drawing/2014/main" id="{B1E8468B-89A3-4665-9A15-DCD64085CBD1}"/>
+                <a16:creationId xmlns:a16="http://schemas.microsoft.com/office/drawing/2014/main" id="{C0FA34F9-9B46-416F-AEE2-1739BA6457C7}"/>
               </a:ext>
             </a:extLst>
           </p:cNvPr>
@@ -6812,7 +6812,7 @@
           <p:cNvPr id="12" name="recap-item-1">
             <a:extLst xmlns:a="http://schemas.openxmlformats.org/drawingml/2006/main">
               <a:ext uri="{FF2B5EF4-FFF2-40B4-BE49-F238E27FC236}">
-                <a16:creationId xmlns:a16="http://schemas.microsoft.com/office/drawing/2014/main" id="{FD1A0384-68DC-4D84-B39D-F5D962E0735C}"/>
+                <a16:creationId xmlns:a16="http://schemas.microsoft.com/office/drawing/2014/main" id="{40E3B84A-D3A7-4168-9959-39A103747FD9}"/>
               </a:ext>
             </a:extLst>
           </p:cNvPr>
@@ -6876,7 +6876,7 @@
           <p:cNvPr id="13" name="recap-connector-1">
             <a:extLst xmlns:a="http://schemas.openxmlformats.org/drawingml/2006/main">
               <a:ext uri="{FF2B5EF4-FFF2-40B4-BE49-F238E27FC236}">
-                <a16:creationId xmlns:a16="http://schemas.microsoft.com/office/drawing/2014/main" id="{50DF86E3-7CF0-409D-BCF0-9BAE1329CDBA}"/>
+                <a16:creationId xmlns:a16="http://schemas.microsoft.com/office/drawing/2014/main" id="{734297B0-6F7D-48BF-8086-7CF7A2EEB027}"/>
               </a:ext>
             </a:extLst>
           </p:cNvPr>
@@ -6907,7 +6907,7 @@
           <p:cNvPr id="14" name="recap-circle-2">
             <a:extLst xmlns:a="http://schemas.openxmlformats.org/drawingml/2006/main">
               <a:ext uri="{FF2B5EF4-FFF2-40B4-BE49-F238E27FC236}">
-                <a16:creationId xmlns:a16="http://schemas.microsoft.com/office/drawing/2014/main" id="{3DAC3D23-69D1-47A6-96FB-E2BBCA8969DC}"/>
+                <a16:creationId xmlns:a16="http://schemas.microsoft.com/office/drawing/2014/main" id="{42C4D5B6-2C01-474C-AE0B-A38853E481A0}"/>
               </a:ext>
             </a:extLst>
           </p:cNvPr>
@@ -6940,7 +6940,7 @@
           <p:cNvPr id="15" name="recap-number-2">
             <a:extLst xmlns:a="http://schemas.openxmlformats.org/drawingml/2006/main">
               <a:ext uri="{FF2B5EF4-FFF2-40B4-BE49-F238E27FC236}">
-                <a16:creationId xmlns:a16="http://schemas.microsoft.com/office/drawing/2014/main" id="{8B775102-4A0C-472F-9F94-7FEB0F49B37C}"/>
+                <a16:creationId xmlns:a16="http://schemas.microsoft.com/office/drawing/2014/main" id="{40A67E7A-C7CE-4F9E-9549-6CAACBAF7A7E}"/>
               </a:ext>
             </a:extLst>
           </p:cNvPr>
@@ -6998,7 +6998,7 @@
           <p:cNvPr id="16" name="recap-item-2">
             <a:extLst xmlns:a="http://schemas.openxmlformats.org/drawingml/2006/main">
               <a:ext uri="{FF2B5EF4-FFF2-40B4-BE49-F238E27FC236}">
-                <a16:creationId xmlns:a16="http://schemas.microsoft.com/office/drawing/2014/main" id="{D391EA20-C0DB-412F-8437-F00A86FDF5E1}"/>
+                <a16:creationId xmlns:a16="http://schemas.microsoft.com/office/drawing/2014/main" id="{1A409058-7737-46F4-A02E-12AA03F2904E}"/>
               </a:ext>
             </a:extLst>
           </p:cNvPr>
@@ -7060,7 +7060,7 @@
     </p:spTree>
     <p:extLst>
       <p:ext uri="{BB962C8B-B14F-4D97-AF65-F5344CB8AC3E}">
-        <p14:creationId xmlns:p14="http://schemas.microsoft.com/office/powerpoint/2010/main" val="1075972647"/>
+        <p14:creationId xmlns:p14="http://schemas.microsoft.com/office/powerpoint/2010/main" val="1068653701"/>
       </p:ext>
     </p:extLst>
   </p:cSld>
@@ -7091,7 +7091,7 @@
           <p:cNvPr id="1" name="s9-rule">
             <a:extLst xmlns:a="http://schemas.openxmlformats.org/drawingml/2006/main">
               <a:ext uri="{FF2B5EF4-FFF2-40B4-BE49-F238E27FC236}">
-                <a16:creationId xmlns:a16="http://schemas.microsoft.com/office/drawing/2014/main" id="{77ACA562-768C-41FE-B7C4-4ACE4628315E}"/>
+                <a16:creationId xmlns:a16="http://schemas.microsoft.com/office/drawing/2014/main" id="{ACB4D839-32C0-4341-845A-4B6D04D8D7DD}"/>
               </a:ext>
             </a:extLst>
           </p:cNvPr>
@@ -7124,7 +7124,7 @@
           <p:cNvPr id="2" name="s9-eyebrow">
             <a:extLst xmlns:a="http://schemas.openxmlformats.org/drawingml/2006/main">
               <a:ext uri="{FF2B5EF4-FFF2-40B4-BE49-F238E27FC236}">
-                <a16:creationId xmlns:a16="http://schemas.microsoft.com/office/drawing/2014/main" id="{1064A53D-691A-48BF-B706-214D52E3604B}"/>
+                <a16:creationId xmlns:a16="http://schemas.microsoft.com/office/drawing/2014/main" id="{580C7400-5862-41E6-9630-365CCA961C9F}"/>
               </a:ext>
             </a:extLst>
           </p:cNvPr>
@@ -7182,7 +7182,7 @@
           <p:cNvPr id="3" name="s9-title">
             <a:extLst xmlns:a="http://schemas.openxmlformats.org/drawingml/2006/main">
               <a:ext uri="{FF2B5EF4-FFF2-40B4-BE49-F238E27FC236}">
-                <a16:creationId xmlns:a16="http://schemas.microsoft.com/office/drawing/2014/main" id="{6CDE2082-6F70-47D6-BD21-3CDB7F5CA902}"/>
+                <a16:creationId xmlns:a16="http://schemas.microsoft.com/office/drawing/2014/main" id="{B4A97238-5032-4990-BB22-F16C820333FD}"/>
               </a:ext>
             </a:extLst>
           </p:cNvPr>
@@ -7240,7 +7240,7 @@
           <p:cNvPr id="4" name="s9-footer">
             <a:extLst xmlns:a="http://schemas.openxmlformats.org/drawingml/2006/main">
               <a:ext uri="{FF2B5EF4-FFF2-40B4-BE49-F238E27FC236}">
-                <a16:creationId xmlns:a16="http://schemas.microsoft.com/office/drawing/2014/main" id="{1133FD1D-B72B-43F5-88B8-75B6A0773163}"/>
+                <a16:creationId xmlns:a16="http://schemas.microsoft.com/office/drawing/2014/main" id="{00FE1907-ACD9-4E10-9FCD-B027A61486FA}"/>
               </a:ext>
             </a:extLst>
           </p:cNvPr>
@@ -7271,7 +7271,7 @@
           <p:cNvPr id="5" name="s9-identity">
             <a:extLst xmlns:a="http://schemas.openxmlformats.org/drawingml/2006/main">
               <a:ext uri="{FF2B5EF4-FFF2-40B4-BE49-F238E27FC236}">
-                <a16:creationId xmlns:a16="http://schemas.microsoft.com/office/drawing/2014/main" id="{4BD8C1EC-95E4-4644-AF3F-59485F7C2B0F}"/>
+                <a16:creationId xmlns:a16="http://schemas.microsoft.com/office/drawing/2014/main" id="{6290D4F2-F3B2-4650-8272-84C89B0E3159}"/>
               </a:ext>
             </a:extLst>
           </p:cNvPr>
@@ -7329,7 +7329,7 @@
           <p:cNvPr id="6" name="source-0">
             <a:extLst xmlns:a="http://schemas.openxmlformats.org/drawingml/2006/main">
               <a:ext uri="{FF2B5EF4-FFF2-40B4-BE49-F238E27FC236}">
-                <a16:creationId xmlns:a16="http://schemas.microsoft.com/office/drawing/2014/main" id="{68797894-1A6E-4D5D-8079-DF81EB4F42B2}"/>
+                <a16:creationId xmlns:a16="http://schemas.microsoft.com/office/drawing/2014/main" id="{B32BB86C-84E7-498D-8998-918887CED1AF}"/>
               </a:ext>
             </a:extLst>
           </p:cNvPr>
@@ -7393,7 +7393,7 @@
           <p:cNvPr id="7" name="source-1">
             <a:extLst xmlns:a="http://schemas.openxmlformats.org/drawingml/2006/main">
               <a:ext uri="{FF2B5EF4-FFF2-40B4-BE49-F238E27FC236}">
-                <a16:creationId xmlns:a16="http://schemas.microsoft.com/office/drawing/2014/main" id="{39315468-270A-4F75-A4E3-66EE5440A509}"/>
+                <a16:creationId xmlns:a16="http://schemas.microsoft.com/office/drawing/2014/main" id="{3118CDA8-B379-4F27-A5B7-9649C4262240}"/>
               </a:ext>
             </a:extLst>
           </p:cNvPr>
@@ -7457,7 +7457,7 @@
           <p:cNvPr id="8" name="source-2">
             <a:extLst xmlns:a="http://schemas.openxmlformats.org/drawingml/2006/main">
               <a:ext uri="{FF2B5EF4-FFF2-40B4-BE49-F238E27FC236}">
-                <a16:creationId xmlns:a16="http://schemas.microsoft.com/office/drawing/2014/main" id="{FC832BEE-5A98-4959-B1F9-4B7D45F724A6}"/>
+                <a16:creationId xmlns:a16="http://schemas.microsoft.com/office/drawing/2014/main" id="{DF6202F5-B41F-4B47-AE9D-2BBA19CAB49E}"/>
               </a:ext>
             </a:extLst>
           </p:cNvPr>
@@ -7521,7 +7521,7 @@
           <p:cNvPr id="9" name="source-3">
             <a:extLst xmlns:a="http://schemas.openxmlformats.org/drawingml/2006/main">
               <a:ext uri="{FF2B5EF4-FFF2-40B4-BE49-F238E27FC236}">
-                <a16:creationId xmlns:a16="http://schemas.microsoft.com/office/drawing/2014/main" id="{FC902B01-AB47-4A33-A2A2-171771F04923}"/>
+                <a16:creationId xmlns:a16="http://schemas.microsoft.com/office/drawing/2014/main" id="{C1FA3975-A5AE-490C-BF75-8CDEE938FA9C}"/>
               </a:ext>
             </a:extLst>
           </p:cNvPr>
@@ -7585,7 +7585,7 @@
           <p:cNvPr id="10" name="source-4">
             <a:extLst xmlns:a="http://schemas.openxmlformats.org/drawingml/2006/main">
               <a:ext uri="{FF2B5EF4-FFF2-40B4-BE49-F238E27FC236}">
-                <a16:creationId xmlns:a16="http://schemas.microsoft.com/office/drawing/2014/main" id="{1641EBCD-BC2D-439F-B836-34B49F682940}"/>
+                <a16:creationId xmlns:a16="http://schemas.microsoft.com/office/drawing/2014/main" id="{F12D5C2B-42E3-44D1-9957-D02D0B0C7B9C}"/>
               </a:ext>
             </a:extLst>
           </p:cNvPr>
@@ -7649,7 +7649,7 @@
           <p:cNvPr id="11" name="s9-takeaway-rule">
             <a:extLst xmlns:a="http://schemas.openxmlformats.org/drawingml/2006/main">
               <a:ext uri="{FF2B5EF4-FFF2-40B4-BE49-F238E27FC236}">
-                <a16:creationId xmlns:a16="http://schemas.microsoft.com/office/drawing/2014/main" id="{E756ECB7-7FED-472D-ABC2-464A17F1DBCA}"/>
+                <a16:creationId xmlns:a16="http://schemas.microsoft.com/office/drawing/2014/main" id="{D89AE182-298A-4E99-8A0E-2CB7E142E076}"/>
               </a:ext>
             </a:extLst>
           </p:cNvPr>
@@ -7682,7 +7682,7 @@
           <p:cNvPr id="12" name="s9-takeaway">
             <a:extLst xmlns:a="http://schemas.openxmlformats.org/drawingml/2006/main">
               <a:ext uri="{FF2B5EF4-FFF2-40B4-BE49-F238E27FC236}">
-                <a16:creationId xmlns:a16="http://schemas.microsoft.com/office/drawing/2014/main" id="{DAA2A834-077A-4C0F-BB68-D26377916C02}"/>
+                <a16:creationId xmlns:a16="http://schemas.microsoft.com/office/drawing/2014/main" id="{F71D9F8C-1355-4042-A8BF-88936C3E692B}"/>
               </a:ext>
             </a:extLst>
           </p:cNvPr>
@@ -7707,7 +7707,7 @@
         </p:spPr>
         <p:txBody>
           <a:bodyPr xmlns:a="http://schemas.openxmlformats.org/drawingml/2006/main" lIns="0" tIns="0" rIns="0" bIns="0" anchor="ctr">
-            <a:normAutofit fontScale="95911"/>
+            <a:normAutofit fontScale="100000"/>
           </a:bodyPr>
           <a:lstStyle xmlns:a="http://schemas.openxmlformats.org/drawingml/2006/main"/>
           <a:p xmlns:a="http://schemas.openxmlformats.org/drawingml/2006/main">
@@ -7730,7 +7730,7 @@
                 <a:ea typeface="PingFang SC"/>
                 <a:cs typeface="PingFang SC"/>
               </a:rPr>
-              <a:t>课程精编页用于讲授主线；播放器中的“原课件”模式保留团队 PowerPoint 精选页、真实图片和可播放视频。</a:t>
+              <a:t>课程正文与幻灯片共享同一知识主线，图片和视频用于帮助理解本节概念与案例。</a:t>
             </a:r>
           </a:p>
         </p:txBody>
@@ -7738,7 +7738,7 @@
     </p:spTree>
     <p:extLst>
       <p:ext uri="{BB962C8B-B14F-4D97-AF65-F5344CB8AC3E}">
-        <p14:creationId xmlns:p14="http://schemas.microsoft.com/office/powerpoint/2010/main" val="1454402398"/>
+        <p14:creationId xmlns:p14="http://schemas.microsoft.com/office/powerpoint/2010/main" val="1726799041"/>
       </p:ext>
     </p:extLst>
   </p:cSld>
